--- a/ppt/VenkataSaiMothukuri_X25181238_smart-building-energy.pptx
+++ b/ppt/VenkataSaiMothukuri_X25181238_smart-building-energy.pptx
@@ -1144,14 +1144,34 @@
       </p:grpSpPr>
       <p:sp>
         <p:nvSpPr>
-          <p:cNvPr id="2" name="Text 0"/>
-          <p:cNvSpPr/>
-          <p:nvPr/>
-        </p:nvSpPr>
-        <p:spPr>
-          <a:xfrm>
-            <a:off x="640080" y="914400"/>
-            <a:ext cx="10972800" cy="1280160"/>
+          <p:cNvPr id="2" name="Shape 0"/>
+          <p:cNvSpPr/>
+          <p:nvPr/>
+        </p:nvSpPr>
+        <p:spPr>
+          <a:xfrm>
+            <a:off x="0" y="0"/>
+            <a:ext cx="4663440" cy="6858000"/>
+          </a:xfrm>
+          <a:prstGeom prst="rect">
+            <a:avLst/>
+          </a:prstGeom>
+          <a:solidFill>
+            <a:srgbClr val="1B5E20"/>
+          </a:solidFill>
+          <a:ln/>
+        </p:spPr>
+      </p:sp>
+      <p:sp>
+        <p:nvSpPr>
+          <p:cNvPr id="3" name="Text 1"/>
+          <p:cNvSpPr/>
+          <p:nvPr/>
+        </p:nvSpPr>
+        <p:spPr>
+          <a:xfrm>
+            <a:off x="502920" y="1280160"/>
+            <a:ext cx="3749040" cy="2377440"/>
           </a:xfrm>
           <a:prstGeom prst="rect">
             <a:avLst/>
@@ -1163,11 +1183,11 @@
           <a:bodyPr wrap="square" rtlCol="0" anchor="t"/>
           <a:lstStyle/>
           <a:p>
-            <a:pPr algn="l" indent="0" marL="0">
+            <a:pPr indent="0" marL="0">
               <a:buNone/>
             </a:pPr>
             <a:r>
-              <a:rPr lang="en-US" sz="3800" b="1" dirty="0">
+              <a:rPr lang="en-US" sz="3400" b="1" dirty="0">
                 <a:solidFill>
                   <a:srgbClr val="FFFFFF"/>
                 </a:solidFill>
@@ -1177,20 +1197,20 @@
               </a:rPr>
               <a:t>Smart Building Energy Monitoring</a:t>
             </a:r>
-            <a:endParaRPr lang="en-US" sz="3800" dirty="0"/>
-          </a:p>
-        </p:txBody>
-      </p:sp>
-      <p:sp>
-        <p:nvSpPr>
-          <p:cNvPr id="3" name="Text 1"/>
-          <p:cNvSpPr/>
-          <p:nvPr/>
-        </p:nvSpPr>
-        <p:spPr>
-          <a:xfrm>
-            <a:off x="658368" y="2148840"/>
-            <a:ext cx="10972800" cy="365760"/>
+            <a:endParaRPr lang="en-US" sz="3400" dirty="0"/>
+          </a:p>
+        </p:txBody>
+      </p:sp>
+      <p:sp>
+        <p:nvSpPr>
+          <p:cNvPr id="4" name="Text 2"/>
+          <p:cNvSpPr/>
+          <p:nvPr/>
+        </p:nvSpPr>
+        <p:spPr>
+          <a:xfrm>
+            <a:off x="521208" y="5394960"/>
+            <a:ext cx="3840480" cy="731520"/>
           </a:xfrm>
           <a:prstGeom prst="rect">
             <a:avLst/>
@@ -1206,9 +1226,9 @@
               <a:buNone/>
             </a:pPr>
             <a:r>
-              <a:rPr lang="en-US" sz="1600" dirty="0">
+              <a:rPr lang="en-US" sz="1500" dirty="0">
                 <a:solidFill>
-                  <a:srgbClr val="6A9A52"/>
+                  <a:srgbClr val="D2E4CC"/>
                 </a:solidFill>
                 <a:latin typeface="Calibri" pitchFamily="34" charset="0"/>
                 <a:ea typeface="Calibri" pitchFamily="34" charset="-122"/>
@@ -1216,20 +1236,20 @@
               </a:rPr>
               <a:t>Venkata Sai Mothukuri   ·   X25181238</a:t>
             </a:r>
-            <a:endParaRPr lang="en-US" sz="1600" dirty="0"/>
-          </a:p>
-        </p:txBody>
-      </p:sp>
-      <p:sp>
-        <p:nvSpPr>
-          <p:cNvPr id="4" name="Text 2"/>
-          <p:cNvSpPr/>
-          <p:nvPr/>
-        </p:nvSpPr>
-        <p:spPr>
-          <a:xfrm>
-            <a:off x="658368" y="2697480"/>
-            <a:ext cx="10424160" cy="1371600"/>
+            <a:endParaRPr lang="en-US" sz="1500" dirty="0"/>
+          </a:p>
+        </p:txBody>
+      </p:sp>
+      <p:sp>
+        <p:nvSpPr>
+          <p:cNvPr id="5" name="Text 3"/>
+          <p:cNvSpPr/>
+          <p:nvPr/>
+        </p:nvSpPr>
+        <p:spPr>
+          <a:xfrm>
+            <a:off x="5120640" y="1371600"/>
+            <a:ext cx="6492240" cy="2011680"/>
           </a:xfrm>
           <a:prstGeom prst="rect">
             <a:avLst/>
@@ -1243,7 +1263,7 @@
           <a:p>
             <a:pPr indent="0" marL="0">
               <a:lnSpc>
-                <a:spcPct val="110000"/>
+                <a:spcPct val="112000"/>
               </a:lnSpc>
               <a:buNone/>
             </a:pPr>
@@ -1264,14 +1284,14 @@
       </p:sp>
       <p:sp>
         <p:nvSpPr>
-          <p:cNvPr id="5" name="Shape 3"/>
-          <p:cNvSpPr/>
-          <p:nvPr/>
-        </p:nvSpPr>
-        <p:spPr>
-          <a:xfrm>
-            <a:off x="658368" y="4206240"/>
-            <a:ext cx="2651760" cy="566928"/>
+          <p:cNvPr id="6" name="Shape 4"/>
+          <p:cNvSpPr/>
+          <p:nvPr/>
+        </p:nvSpPr>
+        <p:spPr>
+          <a:xfrm>
+            <a:off x="5120640" y="4023360"/>
+            <a:ext cx="2926080" cy="566928"/>
           </a:xfrm>
           <a:prstGeom prst="roundRect">
             <a:avLst>
@@ -1291,14 +1311,14 @@
       </p:sp>
       <p:sp>
         <p:nvSpPr>
-          <p:cNvPr id="6" name="Text 4"/>
-          <p:cNvSpPr/>
-          <p:nvPr/>
-        </p:nvSpPr>
-        <p:spPr>
-          <a:xfrm>
-            <a:off x="658368" y="4206240"/>
-            <a:ext cx="2651760" cy="566928"/>
+          <p:cNvPr id="7" name="Text 5"/>
+          <p:cNvSpPr/>
+          <p:nvPr/>
+        </p:nvSpPr>
+        <p:spPr>
+          <a:xfrm>
+            <a:off x="5120640" y="4023360"/>
+            <a:ext cx="2926080" cy="566928"/>
           </a:xfrm>
           <a:prstGeom prst="rect">
             <a:avLst/>
@@ -1314,7 +1334,7 @@
               <a:buNone/>
             </a:pPr>
             <a:r>
-              <a:rPr lang="en-US" sz="1400" b="1" dirty="0">
+              <a:rPr lang="en-US" sz="1350" b="1" dirty="0">
                 <a:solidFill>
                   <a:srgbClr val="D9A62E"/>
                 </a:solidFill>
@@ -1324,20 +1344,20 @@
               </a:rPr>
               <a:t>Peak load &gt; 55 kW</a:t>
             </a:r>
-            <a:endParaRPr lang="en-US" sz="1400" dirty="0"/>
-          </a:p>
-        </p:txBody>
-      </p:sp>
-      <p:sp>
-        <p:nvSpPr>
-          <p:cNvPr id="7" name="Shape 5"/>
-          <p:cNvSpPr/>
-          <p:nvPr/>
-        </p:nvSpPr>
-        <p:spPr>
-          <a:xfrm>
-            <a:off x="3538728" y="4206240"/>
-            <a:ext cx="2651760" cy="566928"/>
+            <a:endParaRPr lang="en-US" sz="1350" dirty="0"/>
+          </a:p>
+        </p:txBody>
+      </p:sp>
+      <p:sp>
+        <p:nvSpPr>
+          <p:cNvPr id="8" name="Shape 6"/>
+          <p:cNvSpPr/>
+          <p:nvPr/>
+        </p:nvSpPr>
+        <p:spPr>
+          <a:xfrm>
+            <a:off x="5120640" y="4709160"/>
+            <a:ext cx="2926080" cy="566928"/>
           </a:xfrm>
           <a:prstGeom prst="roundRect">
             <a:avLst>
@@ -1357,14 +1377,14 @@
       </p:sp>
       <p:sp>
         <p:nvSpPr>
-          <p:cNvPr id="8" name="Text 6"/>
-          <p:cNvSpPr/>
-          <p:nvPr/>
-        </p:nvSpPr>
-        <p:spPr>
-          <a:xfrm>
-            <a:off x="3538728" y="4206240"/>
-            <a:ext cx="2651760" cy="566928"/>
+          <p:cNvPr id="9" name="Text 7"/>
+          <p:cNvSpPr/>
+          <p:nvPr/>
+        </p:nvSpPr>
+        <p:spPr>
+          <a:xfrm>
+            <a:off x="5120640" y="4709160"/>
+            <a:ext cx="2926080" cy="566928"/>
           </a:xfrm>
           <a:prstGeom prst="rect">
             <a:avLst/>
@@ -1380,7 +1400,7 @@
               <a:buNone/>
             </a:pPr>
             <a:r>
-              <a:rPr lang="en-US" sz="1400" b="1" dirty="0">
+              <a:rPr lang="en-US" sz="1350" b="1" dirty="0">
                 <a:solidFill>
                   <a:srgbClr val="D9A62E"/>
                 </a:solidFill>
@@ -1390,20 +1410,20 @@
               </a:rPr>
               <a:t>CO₂ &gt; 1,000 ppm</a:t>
             </a:r>
-            <a:endParaRPr lang="en-US" sz="1400" dirty="0"/>
-          </a:p>
-        </p:txBody>
-      </p:sp>
-      <p:sp>
-        <p:nvSpPr>
-          <p:cNvPr id="9" name="Shape 7"/>
-          <p:cNvSpPr/>
-          <p:nvPr/>
-        </p:nvSpPr>
-        <p:spPr>
-          <a:xfrm>
-            <a:off x="6419088" y="4206240"/>
-            <a:ext cx="2651760" cy="566928"/>
+            <a:endParaRPr lang="en-US" sz="1350" dirty="0"/>
+          </a:p>
+        </p:txBody>
+      </p:sp>
+      <p:sp>
+        <p:nvSpPr>
+          <p:cNvPr id="10" name="Shape 8"/>
+          <p:cNvSpPr/>
+          <p:nvPr/>
+        </p:nvSpPr>
+        <p:spPr>
+          <a:xfrm>
+            <a:off x="5120640" y="5394960"/>
+            <a:ext cx="2926080" cy="566928"/>
           </a:xfrm>
           <a:prstGeom prst="roundRect">
             <a:avLst>
@@ -1423,14 +1443,14 @@
       </p:sp>
       <p:sp>
         <p:nvSpPr>
-          <p:cNvPr id="10" name="Text 8"/>
-          <p:cNvSpPr/>
-          <p:nvPr/>
-        </p:nvSpPr>
-        <p:spPr>
-          <a:xfrm>
-            <a:off x="6419088" y="4206240"/>
-            <a:ext cx="2651760" cy="566928"/>
+          <p:cNvPr id="11" name="Text 9"/>
+          <p:cNvSpPr/>
+          <p:nvPr/>
+        </p:nvSpPr>
+        <p:spPr>
+          <a:xfrm>
+            <a:off x="5120640" y="5394960"/>
+            <a:ext cx="2926080" cy="566928"/>
           </a:xfrm>
           <a:prstGeom prst="rect">
             <a:avLst/>
@@ -1446,7 +1466,7 @@
               <a:buNone/>
             </a:pPr>
             <a:r>
-              <a:rPr lang="en-US" sz="1400" b="1" dirty="0">
+              <a:rPr lang="en-US" sz="1350" b="1" dirty="0">
                 <a:solidFill>
                   <a:srgbClr val="D9A62E"/>
                 </a:solidFill>
@@ -1456,20 +1476,20 @@
               </a:rPr>
               <a:t>HVAC 18–26 °C band</a:t>
             </a:r>
-            <a:endParaRPr lang="en-US" sz="1400" dirty="0"/>
-          </a:p>
-        </p:txBody>
-      </p:sp>
-      <p:sp>
-        <p:nvSpPr>
-          <p:cNvPr id="11" name="Text 9"/>
-          <p:cNvSpPr/>
-          <p:nvPr/>
-        </p:nvSpPr>
-        <p:spPr>
-          <a:xfrm>
-            <a:off x="658368" y="6126480"/>
-            <a:ext cx="10972800" cy="365760"/>
+            <a:endParaRPr lang="en-US" sz="1350" dirty="0"/>
+          </a:p>
+        </p:txBody>
+      </p:sp>
+      <p:sp>
+        <p:nvSpPr>
+          <p:cNvPr id="12" name="Text 10"/>
+          <p:cNvSpPr/>
+          <p:nvPr/>
+        </p:nvSpPr>
+        <p:spPr>
+          <a:xfrm>
+            <a:off x="5120640" y="6172200"/>
+            <a:ext cx="6400800" cy="365760"/>
           </a:xfrm>
           <a:prstGeom prst="rect">
             <a:avLst/>
@@ -1485,7 +1505,7 @@
               <a:buNone/>
             </a:pPr>
             <a:r>
-              <a:rPr lang="en-US" sz="1300" dirty="0">
+              <a:rPr lang="en-US" sz="1250" dirty="0">
                 <a:solidFill>
                   <a:srgbClr val="5C6E58"/>
                 </a:solidFill>
@@ -1495,7 +1515,7 @@
               </a:rPr>
               <a:t>Fog &amp; Edge Computing (H9FECC)   ·   deployed live on AWS</a:t>
             </a:r>
-            <a:endParaRPr lang="en-US" sz="1300" dirty="0"/>
+            <a:endParaRPr lang="en-US" sz="1250" dirty="0"/>
           </a:p>
         </p:txBody>
       </p:sp>
@@ -1578,12 +1598,12 @@
         </p:nvSpPr>
         <p:spPr>
           <a:xfrm>
-            <a:off x="640080" y="2468880"/>
-            <a:ext cx="1572768" cy="1371600"/>
+            <a:off x="640080" y="1874520"/>
+            <a:ext cx="2286000" cy="1280160"/>
           </a:xfrm>
           <a:prstGeom prst="roundRect">
             <a:avLst>
-              <a:gd name="adj" fmla="val 6667"/>
+              <a:gd name="adj" fmla="val 7143"/>
             </a:avLst>
           </a:prstGeom>
           <a:solidFill>
@@ -1605,8 +1625,8 @@
         </p:nvSpPr>
         <p:spPr>
           <a:xfrm>
-            <a:off x="1325880" y="2670048"/>
-            <a:ext cx="201168" cy="201168"/>
+            <a:off x="1691640" y="2039112"/>
+            <a:ext cx="182880" cy="182880"/>
           </a:xfrm>
           <a:prstGeom prst="ellipse">
             <a:avLst/>
@@ -1625,8 +1645,8 @@
         </p:nvSpPr>
         <p:spPr>
           <a:xfrm>
-            <a:off x="594360" y="2926080"/>
-            <a:ext cx="1664208" cy="411480"/>
+            <a:off x="612648" y="2258568"/>
+            <a:ext cx="2340864" cy="365760"/>
           </a:xfrm>
           <a:prstGeom prst="rect">
             <a:avLst/>
@@ -1664,8 +1684,8 @@
         </p:nvSpPr>
         <p:spPr>
           <a:xfrm>
-            <a:off x="621792" y="3310128"/>
-            <a:ext cx="1609344" cy="457200"/>
+            <a:off x="640080" y="2606040"/>
+            <a:ext cx="2286000" cy="411480"/>
           </a:xfrm>
           <a:prstGeom prst="rect">
             <a:avLst/>
@@ -1703,8 +1723,8 @@
         </p:nvSpPr>
         <p:spPr>
           <a:xfrm>
-            <a:off x="2231136" y="3154680"/>
-            <a:ext cx="258409" cy="0"/>
+            <a:off x="2944368" y="2514600"/>
+            <a:ext cx="1975104" cy="0"/>
           </a:xfrm>
           <a:prstGeom prst="line">
             <a:avLst/>
@@ -1715,6 +1735,7 @@
               <a:srgbClr val="6A9A52"/>
             </a:solidFill>
             <a:prstDash val="solid"/>
+            <a:headEnd type="none"/>
             <a:tailEnd type="triangle"/>
           </a:ln>
         </p:spPr>
@@ -1727,12 +1748,12 @@
         </p:nvSpPr>
         <p:spPr>
           <a:xfrm>
-            <a:off x="2507833" y="2468880"/>
-            <a:ext cx="1572768" cy="1371600"/>
+            <a:off x="4937760" y="1874520"/>
+            <a:ext cx="2286000" cy="1280160"/>
           </a:xfrm>
           <a:prstGeom prst="roundRect">
             <a:avLst>
-              <a:gd name="adj" fmla="val 6667"/>
+              <a:gd name="adj" fmla="val 7143"/>
             </a:avLst>
           </a:prstGeom>
           <a:solidFill>
@@ -1754,8 +1775,8 @@
         </p:nvSpPr>
         <p:spPr>
           <a:xfrm>
-            <a:off x="3193633" y="2670048"/>
-            <a:ext cx="201168" cy="201168"/>
+            <a:off x="5989320" y="2039112"/>
+            <a:ext cx="182880" cy="182880"/>
           </a:xfrm>
           <a:prstGeom prst="ellipse">
             <a:avLst/>
@@ -1774,8 +1795,8 @@
         </p:nvSpPr>
         <p:spPr>
           <a:xfrm>
-            <a:off x="2462113" y="2926080"/>
-            <a:ext cx="1664208" cy="411480"/>
+            <a:off x="4910328" y="2258568"/>
+            <a:ext cx="2340864" cy="365760"/>
           </a:xfrm>
           <a:prstGeom prst="rect">
             <a:avLst/>
@@ -1813,8 +1834,8 @@
         </p:nvSpPr>
         <p:spPr>
           <a:xfrm>
-            <a:off x="2489545" y="3310128"/>
-            <a:ext cx="1609344" cy="457200"/>
+            <a:off x="4937760" y="2606040"/>
+            <a:ext cx="2286000" cy="411480"/>
           </a:xfrm>
           <a:prstGeom prst="rect">
             <a:avLst/>
@@ -1852,8 +1873,8 @@
         </p:nvSpPr>
         <p:spPr>
           <a:xfrm>
-            <a:off x="4098889" y="3154680"/>
-            <a:ext cx="258409" cy="0"/>
+            <a:off x="7242048" y="2514600"/>
+            <a:ext cx="1975104" cy="0"/>
           </a:xfrm>
           <a:prstGeom prst="line">
             <a:avLst/>
@@ -1864,6 +1885,7 @@
               <a:srgbClr val="6A9A52"/>
             </a:solidFill>
             <a:prstDash val="solid"/>
+            <a:headEnd type="none"/>
             <a:tailEnd type="triangle"/>
           </a:ln>
         </p:spPr>
@@ -1876,12 +1898,12 @@
         </p:nvSpPr>
         <p:spPr>
           <a:xfrm>
-            <a:off x="4375587" y="2468880"/>
-            <a:ext cx="1572768" cy="1371600"/>
+            <a:off x="9235440" y="1874520"/>
+            <a:ext cx="2286000" cy="1280160"/>
           </a:xfrm>
           <a:prstGeom prst="roundRect">
             <a:avLst>
-              <a:gd name="adj" fmla="val 6667"/>
+              <a:gd name="adj" fmla="val 7143"/>
             </a:avLst>
           </a:prstGeom>
           <a:solidFill>
@@ -1903,8 +1925,8 @@
         </p:nvSpPr>
         <p:spPr>
           <a:xfrm>
-            <a:off x="5061387" y="2670048"/>
-            <a:ext cx="201168" cy="201168"/>
+            <a:off x="10287000" y="2039112"/>
+            <a:ext cx="182880" cy="182880"/>
           </a:xfrm>
           <a:prstGeom prst="ellipse">
             <a:avLst/>
@@ -1923,8 +1945,8 @@
         </p:nvSpPr>
         <p:spPr>
           <a:xfrm>
-            <a:off x="4329867" y="2926080"/>
-            <a:ext cx="1664208" cy="411480"/>
+            <a:off x="9208008" y="2258568"/>
+            <a:ext cx="2340864" cy="365760"/>
           </a:xfrm>
           <a:prstGeom prst="rect">
             <a:avLst/>
@@ -1962,8 +1984,8 @@
         </p:nvSpPr>
         <p:spPr>
           <a:xfrm>
-            <a:off x="4357299" y="3310128"/>
-            <a:ext cx="1609344" cy="457200"/>
+            <a:off x="9235440" y="2606040"/>
+            <a:ext cx="2286000" cy="411480"/>
           </a:xfrm>
           <a:prstGeom prst="rect">
             <a:avLst/>
@@ -2001,36 +2023,12 @@
         </p:nvSpPr>
         <p:spPr>
           <a:xfrm>
-            <a:off x="5966643" y="3154680"/>
-            <a:ext cx="258409" cy="0"/>
-          </a:xfrm>
-          <a:prstGeom prst="line">
-            <a:avLst/>
-          </a:prstGeom>
-          <a:noFill/>
-          <a:ln w="25400">
-            <a:solidFill>
-              <a:srgbClr val="6A9A52"/>
-            </a:solidFill>
-            <a:prstDash val="solid"/>
-            <a:tailEnd type="triangle"/>
-          </a:ln>
-        </p:spPr>
-      </p:sp>
-      <p:sp>
-        <p:nvSpPr>
-          <p:cNvPr id="18" name="Shape 16"/>
-          <p:cNvSpPr/>
-          <p:nvPr/>
-        </p:nvSpPr>
-        <p:spPr>
-          <a:xfrm>
-            <a:off x="6243340" y="2468880"/>
-            <a:ext cx="1572768" cy="1371600"/>
+            <a:off x="9235440" y="3520440"/>
+            <a:ext cx="2286000" cy="1280160"/>
           </a:xfrm>
           <a:prstGeom prst="roundRect">
             <a:avLst>
-              <a:gd name="adj" fmla="val 6667"/>
+              <a:gd name="adj" fmla="val 7143"/>
             </a:avLst>
           </a:prstGeom>
           <a:solidFill>
@@ -2046,14 +2044,14 @@
       </p:sp>
       <p:sp>
         <p:nvSpPr>
-          <p:cNvPr id="19" name="Shape 17"/>
-          <p:cNvSpPr/>
-          <p:nvPr/>
-        </p:nvSpPr>
-        <p:spPr>
-          <a:xfrm>
-            <a:off x="6929140" y="2670048"/>
-            <a:ext cx="201168" cy="201168"/>
+          <p:cNvPr id="18" name="Shape 16"/>
+          <p:cNvSpPr/>
+          <p:nvPr/>
+        </p:nvSpPr>
+        <p:spPr>
+          <a:xfrm>
+            <a:off x="10287000" y="3685032"/>
+            <a:ext cx="182880" cy="182880"/>
           </a:xfrm>
           <a:prstGeom prst="ellipse">
             <a:avLst/>
@@ -2066,14 +2064,14 @@
       </p:sp>
       <p:sp>
         <p:nvSpPr>
-          <p:cNvPr id="20" name="Text 18"/>
-          <p:cNvSpPr/>
-          <p:nvPr/>
-        </p:nvSpPr>
-        <p:spPr>
-          <a:xfrm>
-            <a:off x="6197620" y="2926080"/>
-            <a:ext cx="1664208" cy="411480"/>
+          <p:cNvPr id="19" name="Text 17"/>
+          <p:cNvSpPr/>
+          <p:nvPr/>
+        </p:nvSpPr>
+        <p:spPr>
+          <a:xfrm>
+            <a:off x="9208008" y="3904488"/>
+            <a:ext cx="2340864" cy="365760"/>
           </a:xfrm>
           <a:prstGeom prst="rect">
             <a:avLst/>
@@ -2105,14 +2103,14 @@
       </p:sp>
       <p:sp>
         <p:nvSpPr>
-          <p:cNvPr id="21" name="Text 19"/>
-          <p:cNvSpPr/>
-          <p:nvPr/>
-        </p:nvSpPr>
-        <p:spPr>
-          <a:xfrm>
-            <a:off x="6225052" y="3310128"/>
-            <a:ext cx="1609344" cy="457200"/>
+          <p:cNvPr id="20" name="Text 18"/>
+          <p:cNvSpPr/>
+          <p:nvPr/>
+        </p:nvSpPr>
+        <p:spPr>
+          <a:xfrm>
+            <a:off x="9235440" y="4251960"/>
+            <a:ext cx="2286000" cy="411480"/>
           </a:xfrm>
           <a:prstGeom prst="rect">
             <a:avLst/>
@@ -2144,14 +2142,14 @@
       </p:sp>
       <p:sp>
         <p:nvSpPr>
-          <p:cNvPr id="22" name="Shape 20"/>
-          <p:cNvSpPr/>
-          <p:nvPr/>
-        </p:nvSpPr>
-        <p:spPr>
-          <a:xfrm>
-            <a:off x="7834396" y="3154680"/>
-            <a:ext cx="258409" cy="0"/>
+          <p:cNvPr id="21" name="Shape 19"/>
+          <p:cNvSpPr/>
+          <p:nvPr/>
+        </p:nvSpPr>
+        <p:spPr>
+          <a:xfrm>
+            <a:off x="7242048" y="4160520"/>
+            <a:ext cx="1975104" cy="0"/>
           </a:xfrm>
           <a:prstGeom prst="line">
             <a:avLst/>
@@ -2162,24 +2160,25 @@
               <a:srgbClr val="6A9A52"/>
             </a:solidFill>
             <a:prstDash val="solid"/>
-            <a:tailEnd type="triangle"/>
+            <a:headEnd type="triangle"/>
+            <a:tailEnd type="oval"/>
           </a:ln>
         </p:spPr>
       </p:sp>
       <p:sp>
         <p:nvSpPr>
-          <p:cNvPr id="23" name="Shape 21"/>
-          <p:cNvSpPr/>
-          <p:nvPr/>
-        </p:nvSpPr>
-        <p:spPr>
-          <a:xfrm>
-            <a:off x="8111094" y="2468880"/>
-            <a:ext cx="1572768" cy="1371600"/>
+          <p:cNvPr id="22" name="Shape 20"/>
+          <p:cNvSpPr/>
+          <p:nvPr/>
+        </p:nvSpPr>
+        <p:spPr>
+          <a:xfrm>
+            <a:off x="4937760" y="3520440"/>
+            <a:ext cx="2286000" cy="1280160"/>
           </a:xfrm>
           <a:prstGeom prst="roundRect">
             <a:avLst>
-              <a:gd name="adj" fmla="val 6667"/>
+              <a:gd name="adj" fmla="val 7143"/>
             </a:avLst>
           </a:prstGeom>
           <a:solidFill>
@@ -2195,14 +2194,14 @@
       </p:sp>
       <p:sp>
         <p:nvSpPr>
-          <p:cNvPr id="24" name="Shape 22"/>
-          <p:cNvSpPr/>
-          <p:nvPr/>
-        </p:nvSpPr>
-        <p:spPr>
-          <a:xfrm>
-            <a:off x="8796894" y="2670048"/>
-            <a:ext cx="201168" cy="201168"/>
+          <p:cNvPr id="23" name="Shape 21"/>
+          <p:cNvSpPr/>
+          <p:nvPr/>
+        </p:nvSpPr>
+        <p:spPr>
+          <a:xfrm>
+            <a:off x="5989320" y="3685032"/>
+            <a:ext cx="182880" cy="182880"/>
           </a:xfrm>
           <a:prstGeom prst="ellipse">
             <a:avLst/>
@@ -2215,14 +2214,14 @@
       </p:sp>
       <p:sp>
         <p:nvSpPr>
-          <p:cNvPr id="25" name="Text 23"/>
-          <p:cNvSpPr/>
-          <p:nvPr/>
-        </p:nvSpPr>
-        <p:spPr>
-          <a:xfrm>
-            <a:off x="8065374" y="2926080"/>
-            <a:ext cx="1664208" cy="411480"/>
+          <p:cNvPr id="24" name="Text 22"/>
+          <p:cNvSpPr/>
+          <p:nvPr/>
+        </p:nvSpPr>
+        <p:spPr>
+          <a:xfrm>
+            <a:off x="4910328" y="3904488"/>
+            <a:ext cx="2340864" cy="365760"/>
           </a:xfrm>
           <a:prstGeom prst="rect">
             <a:avLst/>
@@ -2254,14 +2253,14 @@
       </p:sp>
       <p:sp>
         <p:nvSpPr>
-          <p:cNvPr id="26" name="Text 24"/>
-          <p:cNvSpPr/>
-          <p:nvPr/>
-        </p:nvSpPr>
-        <p:spPr>
-          <a:xfrm>
-            <a:off x="8092806" y="3310128"/>
-            <a:ext cx="1609344" cy="457200"/>
+          <p:cNvPr id="25" name="Text 23"/>
+          <p:cNvSpPr/>
+          <p:nvPr/>
+        </p:nvSpPr>
+        <p:spPr>
+          <a:xfrm>
+            <a:off x="4937760" y="4251960"/>
+            <a:ext cx="2286000" cy="411480"/>
           </a:xfrm>
           <a:prstGeom prst="rect">
             <a:avLst/>
@@ -2293,14 +2292,14 @@
       </p:sp>
       <p:sp>
         <p:nvSpPr>
-          <p:cNvPr id="27" name="Shape 25"/>
-          <p:cNvSpPr/>
-          <p:nvPr/>
-        </p:nvSpPr>
-        <p:spPr>
-          <a:xfrm>
-            <a:off x="9702150" y="3154680"/>
-            <a:ext cx="258409" cy="0"/>
+          <p:cNvPr id="26" name="Shape 24"/>
+          <p:cNvSpPr/>
+          <p:nvPr/>
+        </p:nvSpPr>
+        <p:spPr>
+          <a:xfrm>
+            <a:off x="2944368" y="4160520"/>
+            <a:ext cx="1975104" cy="0"/>
           </a:xfrm>
           <a:prstGeom prst="line">
             <a:avLst/>
@@ -2311,24 +2310,25 @@
               <a:srgbClr val="6A9A52"/>
             </a:solidFill>
             <a:prstDash val="solid"/>
-            <a:tailEnd type="triangle"/>
+            <a:headEnd type="triangle"/>
+            <a:tailEnd type="oval"/>
           </a:ln>
         </p:spPr>
       </p:sp>
       <p:sp>
         <p:nvSpPr>
-          <p:cNvPr id="28" name="Shape 26"/>
-          <p:cNvSpPr/>
-          <p:nvPr/>
-        </p:nvSpPr>
-        <p:spPr>
-          <a:xfrm>
-            <a:off x="9978847" y="2468880"/>
-            <a:ext cx="1572768" cy="1371600"/>
+          <p:cNvPr id="27" name="Shape 25"/>
+          <p:cNvSpPr/>
+          <p:nvPr/>
+        </p:nvSpPr>
+        <p:spPr>
+          <a:xfrm>
+            <a:off x="640080" y="3520440"/>
+            <a:ext cx="2286000" cy="1280160"/>
           </a:xfrm>
           <a:prstGeom prst="roundRect">
             <a:avLst>
-              <a:gd name="adj" fmla="val 6667"/>
+              <a:gd name="adj" fmla="val 7143"/>
             </a:avLst>
           </a:prstGeom>
           <a:solidFill>
@@ -2344,14 +2344,14 @@
       </p:sp>
       <p:sp>
         <p:nvSpPr>
-          <p:cNvPr id="29" name="Shape 27"/>
-          <p:cNvSpPr/>
-          <p:nvPr/>
-        </p:nvSpPr>
-        <p:spPr>
-          <a:xfrm>
-            <a:off x="10664647" y="2670048"/>
-            <a:ext cx="201168" cy="201168"/>
+          <p:cNvPr id="28" name="Shape 26"/>
+          <p:cNvSpPr/>
+          <p:nvPr/>
+        </p:nvSpPr>
+        <p:spPr>
+          <a:xfrm>
+            <a:off x="1691640" y="3685032"/>
+            <a:ext cx="182880" cy="182880"/>
           </a:xfrm>
           <a:prstGeom prst="ellipse">
             <a:avLst/>
@@ -2364,14 +2364,14 @@
       </p:sp>
       <p:sp>
         <p:nvSpPr>
-          <p:cNvPr id="30" name="Text 28"/>
-          <p:cNvSpPr/>
-          <p:nvPr/>
-        </p:nvSpPr>
-        <p:spPr>
-          <a:xfrm>
-            <a:off x="9933127" y="2926080"/>
-            <a:ext cx="1664208" cy="411480"/>
+          <p:cNvPr id="29" name="Text 27"/>
+          <p:cNvSpPr/>
+          <p:nvPr/>
+        </p:nvSpPr>
+        <p:spPr>
+          <a:xfrm>
+            <a:off x="612648" y="3904488"/>
+            <a:ext cx="2340864" cy="365760"/>
           </a:xfrm>
           <a:prstGeom prst="rect">
             <a:avLst/>
@@ -2403,14 +2403,14 @@
       </p:sp>
       <p:sp>
         <p:nvSpPr>
-          <p:cNvPr id="31" name="Text 29"/>
-          <p:cNvSpPr/>
-          <p:nvPr/>
-        </p:nvSpPr>
-        <p:spPr>
-          <a:xfrm>
-            <a:off x="9960559" y="3310128"/>
-            <a:ext cx="1609344" cy="457200"/>
+          <p:cNvPr id="30" name="Text 28"/>
+          <p:cNvSpPr/>
+          <p:nvPr/>
+        </p:nvSpPr>
+        <p:spPr>
+          <a:xfrm>
+            <a:off x="640080" y="4251960"/>
+            <a:ext cx="2286000" cy="411480"/>
           </a:xfrm>
           <a:prstGeom prst="rect">
             <a:avLst/>
@@ -2442,92 +2442,38 @@
       </p:sp>
       <p:sp>
         <p:nvSpPr>
+          <p:cNvPr id="31" name="Shape 29"/>
+          <p:cNvSpPr/>
+          <p:nvPr/>
+        </p:nvSpPr>
+        <p:spPr>
+          <a:xfrm>
+            <a:off x="10378440" y="3154680"/>
+            <a:ext cx="0" cy="365760"/>
+          </a:xfrm>
+          <a:prstGeom prst="line">
+            <a:avLst/>
+          </a:prstGeom>
+          <a:noFill/>
+          <a:ln w="25400">
+            <a:solidFill>
+              <a:srgbClr val="6A9A52"/>
+            </a:solidFill>
+            <a:prstDash val="solid"/>
+            <a:tailEnd type="triangle"/>
+          </a:ln>
+        </p:spPr>
+      </p:sp>
+      <p:sp>
+        <p:nvSpPr>
           <p:cNvPr id="32" name="Text 30"/>
           <p:cNvSpPr/>
           <p:nvPr/>
         </p:nvSpPr>
         <p:spPr>
           <a:xfrm>
-            <a:off x="640080" y="3977640"/>
-            <a:ext cx="3440521" cy="274320"/>
-          </a:xfrm>
-          <a:prstGeom prst="rect">
-            <a:avLst/>
-          </a:prstGeom>
-          <a:noFill/>
-          <a:ln/>
-        </p:spPr>
-        <p:txBody>
-          <a:bodyPr wrap="square" rtlCol="0" anchor="ctr"/>
-          <a:lstStyle/>
-          <a:p>
-            <a:pPr algn="ctr" indent="0" marL="0">
-              <a:buNone/>
-            </a:pPr>
-            <a:r>
-              <a:rPr lang="en-US" sz="1100" b="1" spc="200" kern="0" dirty="0">
-                <a:solidFill>
-                  <a:srgbClr val="6A9A52"/>
-                </a:solidFill>
-                <a:latin typeface="Calibri" pitchFamily="34" charset="0"/>
-                <a:ea typeface="Calibri" pitchFamily="34" charset="-122"/>
-                <a:cs typeface="Calibri" pitchFamily="34" charset="-120"/>
-              </a:rPr>
-              <a:t>EDGE</a:t>
-            </a:r>
-            <a:endParaRPr lang="en-US" sz="1100" dirty="0"/>
-          </a:p>
-        </p:txBody>
-      </p:sp>
-      <p:sp>
-        <p:nvSpPr>
-          <p:cNvPr id="33" name="Text 31"/>
-          <p:cNvSpPr/>
-          <p:nvPr/>
-        </p:nvSpPr>
-        <p:spPr>
-          <a:xfrm>
-            <a:off x="4375587" y="3977640"/>
-            <a:ext cx="7176028" cy="274320"/>
-          </a:xfrm>
-          <a:prstGeom prst="rect">
-            <a:avLst/>
-          </a:prstGeom>
-          <a:noFill/>
-          <a:ln/>
-        </p:spPr>
-        <p:txBody>
-          <a:bodyPr wrap="square" rtlCol="0" anchor="ctr"/>
-          <a:lstStyle/>
-          <a:p>
-            <a:pPr algn="ctr" indent="0" marL="0">
-              <a:buNone/>
-            </a:pPr>
-            <a:r>
-              <a:rPr lang="en-US" sz="1100" b="1" spc="200" kern="0" dirty="0">
-                <a:solidFill>
-                  <a:srgbClr val="1B5E20"/>
-                </a:solidFill>
-                <a:latin typeface="Calibri" pitchFamily="34" charset="0"/>
-                <a:ea typeface="Calibri" pitchFamily="34" charset="-122"/>
-                <a:cs typeface="Calibri" pitchFamily="34" charset="-120"/>
-              </a:rPr>
-              <a:t>CLOUD</a:t>
-            </a:r>
-            <a:endParaRPr lang="en-US" sz="1100" dirty="0"/>
-          </a:p>
-        </p:txBody>
-      </p:sp>
-      <p:sp>
-        <p:nvSpPr>
-          <p:cNvPr id="34" name="Text 32"/>
-          <p:cNvSpPr/>
-          <p:nvPr/>
-        </p:nvSpPr>
-        <p:spPr>
-          <a:xfrm>
-            <a:off x="640080" y="5212080"/>
-            <a:ext cx="10972800" cy="640080"/>
+            <a:off x="640080" y="5257800"/>
+            <a:ext cx="10972800" cy="731520"/>
           </a:xfrm>
           <a:prstGeom prst="rect">
             <a:avLst/>
@@ -2675,8 +2621,35 @@
         </p:nvSpPr>
         <p:spPr>
           <a:xfrm>
-            <a:off x="731520" y="1965960"/>
-            <a:ext cx="685800" cy="685800"/>
+            <a:off x="640080" y="1874520"/>
+            <a:ext cx="3502152" cy="3657600"/>
+          </a:xfrm>
+          <a:prstGeom prst="roundRect">
+            <a:avLst>
+              <a:gd name="adj" fmla="val 2611"/>
+            </a:avLst>
+          </a:prstGeom>
+          <a:solidFill>
+            <a:srgbClr val="EEF4EC"/>
+          </a:solidFill>
+          <a:ln w="15240">
+            <a:solidFill>
+              <a:srgbClr val="2E7D32"/>
+            </a:solidFill>
+            <a:prstDash val="solid"/>
+          </a:ln>
+        </p:spPr>
+      </p:sp>
+      <p:sp>
+        <p:nvSpPr>
+          <p:cNvPr id="5" name="Shape 3"/>
+          <p:cNvSpPr/>
+          <p:nvPr/>
+        </p:nvSpPr>
+        <p:spPr>
+          <a:xfrm>
+            <a:off x="914400" y="2194560"/>
+            <a:ext cx="640080" cy="640080"/>
           </a:xfrm>
           <a:prstGeom prst="ellipse">
             <a:avLst/>
@@ -2689,14 +2662,14 @@
       </p:sp>
       <p:sp>
         <p:nvSpPr>
-          <p:cNvPr id="5" name="Text 3"/>
-          <p:cNvSpPr/>
-          <p:nvPr/>
-        </p:nvSpPr>
-        <p:spPr>
-          <a:xfrm>
-            <a:off x="731520" y="1965960"/>
-            <a:ext cx="685800" cy="685800"/>
+          <p:cNvPr id="6" name="Text 4"/>
+          <p:cNvSpPr/>
+          <p:nvPr/>
+        </p:nvSpPr>
+        <p:spPr>
+          <a:xfrm>
+            <a:off x="914400" y="2194560"/>
+            <a:ext cx="640080" cy="640080"/>
           </a:xfrm>
           <a:prstGeom prst="rect">
             <a:avLst/>
@@ -2712,7 +2685,7 @@
               <a:buNone/>
             </a:pPr>
             <a:r>
-              <a:rPr lang="en-US" sz="2600" b="1" dirty="0">
+              <a:rPr lang="en-US" sz="2400" b="1" dirty="0">
                 <a:solidFill>
                   <a:srgbClr val="FFFFFF"/>
                 </a:solidFill>
@@ -2722,20 +2695,20 @@
               </a:rPr>
               <a:t>1</a:t>
             </a:r>
-            <a:endParaRPr lang="en-US" sz="2600" dirty="0"/>
-          </a:p>
-        </p:txBody>
-      </p:sp>
-      <p:sp>
-        <p:nvSpPr>
-          <p:cNvPr id="6" name="Text 4"/>
-          <p:cNvSpPr/>
-          <p:nvPr/>
-        </p:nvSpPr>
-        <p:spPr>
-          <a:xfrm>
-            <a:off x="1691640" y="1920240"/>
-            <a:ext cx="9875520" cy="411480"/>
+            <a:endParaRPr lang="en-US" sz="2400" dirty="0"/>
+          </a:p>
+        </p:txBody>
+      </p:sp>
+      <p:sp>
+        <p:nvSpPr>
+          <p:cNvPr id="7" name="Text 5"/>
+          <p:cNvSpPr/>
+          <p:nvPr/>
+        </p:nvSpPr>
+        <p:spPr>
+          <a:xfrm>
+            <a:off x="914400" y="3017520"/>
+            <a:ext cx="2953512" cy="822960"/>
           </a:xfrm>
           <a:prstGeom prst="rect">
             <a:avLst/>
@@ -2751,7 +2724,7 @@
               <a:buNone/>
             </a:pPr>
             <a:r>
-              <a:rPr lang="en-US" sz="1800" b="1" dirty="0">
+              <a:rPr lang="en-US" sz="1700" b="1" dirty="0">
                 <a:solidFill>
                   <a:srgbClr val="153020"/>
                 </a:solidFill>
@@ -2759,22 +2732,22 @@
                 <a:ea typeface="Calibri" pitchFamily="34" charset="-122"/>
                 <a:cs typeface="Calibri" pitchFamily="34" charset="-120"/>
               </a:rPr>
-              <a:t>Pipeline health, all green</a:t>
-            </a:r>
-            <a:endParaRPr lang="en-US" sz="1800" dirty="0"/>
-          </a:p>
-        </p:txBody>
-      </p:sp>
-      <p:sp>
-        <p:nvSpPr>
-          <p:cNvPr id="7" name="Text 5"/>
-          <p:cNvSpPr/>
-          <p:nvPr/>
-        </p:nvSpPr>
-        <p:spPr>
-          <a:xfrm>
-            <a:off x="1691640" y="2340864"/>
-            <a:ext cx="9875520" cy="640080"/>
+              <a:t>An A-to-F grade badge per floor</a:t>
+            </a:r>
+            <a:endParaRPr lang="en-US" sz="1700" dirty="0"/>
+          </a:p>
+        </p:txBody>
+      </p:sp>
+      <p:sp>
+        <p:nvSpPr>
+          <p:cNvPr id="8" name="Text 6"/>
+          <p:cNvSpPr/>
+          <p:nvPr/>
+        </p:nvSpPr>
+        <p:spPr>
+          <a:xfrm>
+            <a:off x="914400" y="3794760"/>
+            <a:ext cx="2953512" cy="1554480"/>
           </a:xfrm>
           <a:prstGeom prst="rect">
             <a:avLst/>
@@ -2787,10 +2760,13 @@
           <a:lstStyle/>
           <a:p>
             <a:pPr indent="0" marL="0">
+              <a:lnSpc>
+                <a:spcPct val="105000"/>
+              </a:lnSpc>
               <a:buNone/>
             </a:pPr>
             <a:r>
-              <a:rPr lang="en-US" sz="1350" dirty="0">
+              <a:rPr lang="en-US" sz="1300" dirty="0">
                 <a:solidFill>
                   <a:srgbClr val="5C6E58"/>
                 </a:solidFill>
@@ -2798,22 +2774,49 @@
                 <a:ea typeface="Calibri" pitchFamily="34" charset="-122"/>
                 <a:cs typeface="Calibri" pitchFamily="34" charset="-120"/>
               </a:rPr>
-              <a:t>Gateway, queue, processor and pipeline all healthy on the live deployment.</a:t>
-            </a:r>
-            <a:endParaRPr lang="en-US" sz="1350" dirty="0"/>
-          </a:p>
-        </p:txBody>
-      </p:sp>
-      <p:sp>
-        <p:nvSpPr>
-          <p:cNvPr id="8" name="Shape 6"/>
-          <p:cNvSpPr/>
-          <p:nvPr/>
-        </p:nvSpPr>
-        <p:spPr>
-          <a:xfrm>
-            <a:off x="731520" y="3383280"/>
-            <a:ext cx="685800" cy="685800"/>
+              <a:t>Each floor is graded fresh on read — both floors sit at A right now, at 100 and 91.7, the score beneath the letter separating lean from drifting.</a:t>
+            </a:r>
+            <a:endParaRPr lang="en-US" sz="1300" dirty="0"/>
+          </a:p>
+        </p:txBody>
+      </p:sp>
+      <p:sp>
+        <p:nvSpPr>
+          <p:cNvPr id="9" name="Shape 7"/>
+          <p:cNvSpPr/>
+          <p:nvPr/>
+        </p:nvSpPr>
+        <p:spPr>
+          <a:xfrm>
+            <a:off x="4416552" y="1874520"/>
+            <a:ext cx="3502152" cy="3657600"/>
+          </a:xfrm>
+          <a:prstGeom prst="roundRect">
+            <a:avLst>
+              <a:gd name="adj" fmla="val 2611"/>
+            </a:avLst>
+          </a:prstGeom>
+          <a:solidFill>
+            <a:srgbClr val="EEF4EC"/>
+          </a:solidFill>
+          <a:ln w="15240">
+            <a:solidFill>
+              <a:srgbClr val="2E7D32"/>
+            </a:solidFill>
+            <a:prstDash val="solid"/>
+          </a:ln>
+        </p:spPr>
+      </p:sp>
+      <p:sp>
+        <p:nvSpPr>
+          <p:cNvPr id="10" name="Shape 8"/>
+          <p:cNvSpPr/>
+          <p:nvPr/>
+        </p:nvSpPr>
+        <p:spPr>
+          <a:xfrm>
+            <a:off x="4690872" y="2194560"/>
+            <a:ext cx="640080" cy="640080"/>
           </a:xfrm>
           <a:prstGeom prst="ellipse">
             <a:avLst/>
@@ -2826,14 +2829,14 @@
       </p:sp>
       <p:sp>
         <p:nvSpPr>
-          <p:cNvPr id="9" name="Text 7"/>
-          <p:cNvSpPr/>
-          <p:nvPr/>
-        </p:nvSpPr>
-        <p:spPr>
-          <a:xfrm>
-            <a:off x="731520" y="3383280"/>
-            <a:ext cx="685800" cy="685800"/>
+          <p:cNvPr id="11" name="Text 9"/>
+          <p:cNvSpPr/>
+          <p:nvPr/>
+        </p:nvSpPr>
+        <p:spPr>
+          <a:xfrm>
+            <a:off x="4690872" y="2194560"/>
+            <a:ext cx="640080" cy="640080"/>
           </a:xfrm>
           <a:prstGeom prst="rect">
             <a:avLst/>
@@ -2849,7 +2852,7 @@
               <a:buNone/>
             </a:pPr>
             <a:r>
-              <a:rPr lang="en-US" sz="2600" b="1" dirty="0">
+              <a:rPr lang="en-US" sz="2400" b="1" dirty="0">
                 <a:solidFill>
                   <a:srgbClr val="FFFFFF"/>
                 </a:solidFill>
@@ -2859,20 +2862,20 @@
               </a:rPr>
               <a:t>2</a:t>
             </a:r>
-            <a:endParaRPr lang="en-US" sz="2600" dirty="0"/>
-          </a:p>
-        </p:txBody>
-      </p:sp>
-      <p:sp>
-        <p:nvSpPr>
-          <p:cNvPr id="10" name="Text 8"/>
-          <p:cNvSpPr/>
-          <p:nvPr/>
-        </p:nvSpPr>
-        <p:spPr>
-          <a:xfrm>
-            <a:off x="1691640" y="3337560"/>
-            <a:ext cx="9875520" cy="411480"/>
+            <a:endParaRPr lang="en-US" sz="2400" dirty="0"/>
+          </a:p>
+        </p:txBody>
+      </p:sp>
+      <p:sp>
+        <p:nvSpPr>
+          <p:cNvPr id="12" name="Text 10"/>
+          <p:cNvSpPr/>
+          <p:nvPr/>
+        </p:nvSpPr>
+        <p:spPr>
+          <a:xfrm>
+            <a:off x="4690872" y="3017520"/>
+            <a:ext cx="2953512" cy="822960"/>
           </a:xfrm>
           <a:prstGeom prst="rect">
             <a:avLst/>
@@ -2888,7 +2891,7 @@
               <a:buNone/>
             </a:pPr>
             <a:r>
-              <a:rPr lang="en-US" sz="1800" b="1" dirty="0">
+              <a:rPr lang="en-US" sz="1700" b="1" dirty="0">
                 <a:solidFill>
                   <a:srgbClr val="153020"/>
                 </a:solidFill>
@@ -2896,22 +2899,22 @@
                 <a:ea typeface="Calibri" pitchFamily="34" charset="-122"/>
                 <a:cs typeface="Calibri" pitchFamily="34" charset="-120"/>
               </a:rPr>
-              <a:t>Live A-to-F scorecard</a:t>
-            </a:r>
-            <a:endParaRPr lang="en-US" sz="1800" dirty="0"/>
-          </a:p>
-        </p:txBody>
-      </p:sp>
-      <p:sp>
-        <p:nvSpPr>
-          <p:cNvPr id="11" name="Text 9"/>
-          <p:cNvSpPr/>
-          <p:nvPr/>
-        </p:nvSpPr>
-        <p:spPr>
-          <a:xfrm>
-            <a:off x="1691640" y="3758184"/>
-            <a:ext cx="9875520" cy="640080"/>
+              <a:t>Alarm and rating on separate axes</a:t>
+            </a:r>
+            <a:endParaRPr lang="en-US" sz="1700" dirty="0"/>
+          </a:p>
+        </p:txBody>
+      </p:sp>
+      <p:sp>
+        <p:nvSpPr>
+          <p:cNvPr id="13" name="Text 11"/>
+          <p:cNvSpPr/>
+          <p:nvPr/>
+        </p:nvSpPr>
+        <p:spPr>
+          <a:xfrm>
+            <a:off x="4690872" y="3794760"/>
+            <a:ext cx="2953512" cy="1554480"/>
           </a:xfrm>
           <a:prstGeom prst="rect">
             <a:avLst/>
@@ -2924,10 +2927,13 @@
           <a:lstStyle/>
           <a:p>
             <a:pPr indent="0" marL="0">
+              <a:lnSpc>
+                <a:spcPct val="105000"/>
+              </a:lnSpc>
               <a:buNone/>
             </a:pPr>
             <a:r>
-              <a:rPr lang="en-US" sz="1350" dirty="0">
+              <a:rPr lang="en-US" sz="1300" dirty="0">
                 <a:solidFill>
                   <a:srgbClr val="5C6E58"/>
                 </a:solidFill>
@@ -2935,22 +2941,49 @@
                 <a:ea typeface="Calibri" pitchFamily="34" charset="-122"/>
                 <a:cs typeface="Calibri" pitchFamily="34" charset="-120"/>
               </a:rPr>
-              <a:t>Both floors graded A, the numeric score beneath the letter separating a lean floor from one starting to drift.</a:t>
-            </a:r>
-            <a:endParaRPr lang="en-US" sz="1350" dirty="0"/>
-          </a:p>
-        </p:txBody>
-      </p:sp>
-      <p:sp>
-        <p:nvSpPr>
-          <p:cNvPr id="12" name="Shape 10"/>
-          <p:cNvSpPr/>
-          <p:nvPr/>
-        </p:nvSpPr>
-        <p:spPr>
-          <a:xfrm>
-            <a:off x="731520" y="4800600"/>
-            <a:ext cx="685800" cy="685800"/>
+              <a:t>Four hard exception alarms fire at the edge, while the A-to-F rating answers a different question: how efficiently the floor runs overall.</a:t>
+            </a:r>
+            <a:endParaRPr lang="en-US" sz="1300" dirty="0"/>
+          </a:p>
+        </p:txBody>
+      </p:sp>
+      <p:sp>
+        <p:nvSpPr>
+          <p:cNvPr id="14" name="Shape 12"/>
+          <p:cNvSpPr/>
+          <p:nvPr/>
+        </p:nvSpPr>
+        <p:spPr>
+          <a:xfrm>
+            <a:off x="8193024" y="1874520"/>
+            <a:ext cx="3502152" cy="3657600"/>
+          </a:xfrm>
+          <a:prstGeom prst="roundRect">
+            <a:avLst>
+              <a:gd name="adj" fmla="val 2611"/>
+            </a:avLst>
+          </a:prstGeom>
+          <a:solidFill>
+            <a:srgbClr val="EEF4EC"/>
+          </a:solidFill>
+          <a:ln w="15240">
+            <a:solidFill>
+              <a:srgbClr val="2E7D32"/>
+            </a:solidFill>
+            <a:prstDash val="solid"/>
+          </a:ln>
+        </p:spPr>
+      </p:sp>
+      <p:sp>
+        <p:nvSpPr>
+          <p:cNvPr id="15" name="Shape 13"/>
+          <p:cNvSpPr/>
+          <p:nvPr/>
+        </p:nvSpPr>
+        <p:spPr>
+          <a:xfrm>
+            <a:off x="8467344" y="2194560"/>
+            <a:ext cx="640080" cy="640080"/>
           </a:xfrm>
           <a:prstGeom prst="ellipse">
             <a:avLst/>
@@ -2963,14 +2996,14 @@
       </p:sp>
       <p:sp>
         <p:nvSpPr>
-          <p:cNvPr id="13" name="Text 11"/>
-          <p:cNvSpPr/>
-          <p:nvPr/>
-        </p:nvSpPr>
-        <p:spPr>
-          <a:xfrm>
-            <a:off x="731520" y="4800600"/>
-            <a:ext cx="685800" cy="685800"/>
+          <p:cNvPr id="16" name="Text 14"/>
+          <p:cNvSpPr/>
+          <p:nvPr/>
+        </p:nvSpPr>
+        <p:spPr>
+          <a:xfrm>
+            <a:off x="8467344" y="2194560"/>
+            <a:ext cx="640080" cy="640080"/>
           </a:xfrm>
           <a:prstGeom prst="rect">
             <a:avLst/>
@@ -2986,7 +3019,7 @@
               <a:buNone/>
             </a:pPr>
             <a:r>
-              <a:rPr lang="en-US" sz="2600" b="1" dirty="0">
+              <a:rPr lang="en-US" sz="2400" b="1" dirty="0">
                 <a:solidFill>
                   <a:srgbClr val="FFFFFF"/>
                 </a:solidFill>
@@ -2996,20 +3029,20 @@
               </a:rPr>
               <a:t>3</a:t>
             </a:r>
-            <a:endParaRPr lang="en-US" sz="2600" dirty="0"/>
-          </a:p>
-        </p:txBody>
-      </p:sp>
-      <p:sp>
-        <p:nvSpPr>
-          <p:cNvPr id="14" name="Text 12"/>
-          <p:cNvSpPr/>
-          <p:nvPr/>
-        </p:nvSpPr>
-        <p:spPr>
-          <a:xfrm>
-            <a:off x="1691640" y="4754880"/>
-            <a:ext cx="9875520" cy="411480"/>
+            <a:endParaRPr lang="en-US" sz="2400" dirty="0"/>
+          </a:p>
+        </p:txBody>
+      </p:sp>
+      <p:sp>
+        <p:nvSpPr>
+          <p:cNvPr id="17" name="Text 15"/>
+          <p:cNvSpPr/>
+          <p:nvPr/>
+        </p:nvSpPr>
+        <p:spPr>
+          <a:xfrm>
+            <a:off x="8467344" y="3017520"/>
+            <a:ext cx="2953512" cy="822960"/>
           </a:xfrm>
           <a:prstGeom prst="rect">
             <a:avLst/>
@@ -3025,7 +3058,7 @@
               <a:buNone/>
             </a:pPr>
             <a:r>
-              <a:rPr lang="en-US" sz="1800" b="1" dirty="0">
+              <a:rPr lang="en-US" sz="1700" b="1" dirty="0">
                 <a:solidFill>
                   <a:srgbClr val="153020"/>
                 </a:solidFill>
@@ -3033,22 +3066,22 @@
                 <a:ea typeface="Calibri" pitchFamily="34" charset="-122"/>
                 <a:cs typeface="Calibri" pitchFamily="34" charset="-120"/>
               </a:rPr>
-              <a:t>Tested and scales</a:t>
-            </a:r>
-            <a:endParaRPr lang="en-US" sz="1800" dirty="0"/>
-          </a:p>
-        </p:txBody>
-      </p:sp>
-      <p:sp>
-        <p:nvSpPr>
-          <p:cNvPr id="15" name="Text 13"/>
-          <p:cNvSpPr/>
-          <p:nvPr/>
-        </p:nvSpPr>
-        <p:spPr>
-          <a:xfrm>
-            <a:off x="1691640" y="5175504"/>
-            <a:ext cx="9875520" cy="640080"/>
+              <a:t>A live energy-consumption trend</a:t>
+            </a:r>
+            <a:endParaRPr lang="en-US" sz="1700" dirty="0"/>
+          </a:p>
+        </p:txBody>
+      </p:sp>
+      <p:sp>
+        <p:nvSpPr>
+          <p:cNvPr id="18" name="Text 16"/>
+          <p:cNvSpPr/>
+          <p:nvPr/>
+        </p:nvSpPr>
+        <p:spPr>
+          <a:xfrm>
+            <a:off x="8467344" y="3794760"/>
+            <a:ext cx="2953512" cy="1554480"/>
           </a:xfrm>
           <a:prstGeom prst="rect">
             <a:avLst/>
@@ -3061,10 +3094,13 @@
           <a:lstStyle/>
           <a:p>
             <a:pPr indent="0" marL="0">
+              <a:lnSpc>
+                <a:spcPct val="105000"/>
+              </a:lnSpc>
               <a:buNone/>
             </a:pPr>
             <a:r>
-              <a:rPr lang="en-US" sz="1350" dirty="0">
+              <a:rPr lang="en-US" sz="1300" dirty="0">
                 <a:solidFill>
                   <a:srgbClr val="5C6E58"/>
                 </a:solidFill>
@@ -3072,15 +3108,15 @@
                 <a:ea typeface="Calibri" pitchFamily="34" charset="-122"/>
                 <a:cs typeface="Calibri" pitchFamily="34" charset="-120"/>
               </a:rPr>
-              <a:t>133 automated tests pass across sensor, fog, processor and dashboard; a 2,000-message burst via 32 senders absorbed.</a:t>
-            </a:r>
-            <a:endParaRPr lang="en-US" sz="1350" dirty="0"/>
-          </a:p>
-        </p:txBody>
-      </p:sp>
-      <p:sp>
-        <p:nvSpPr>
-          <p:cNvPr id="16" name="Text 14"/>
+              <a:t>The energy chart tracks both floors, so the number behind each grade is visible as it moves.</a:t>
+            </a:r>
+            <a:endParaRPr lang="en-US" sz="1300" dirty="0"/>
+          </a:p>
+        </p:txBody>
+      </p:sp>
+      <p:sp>
+        <p:nvSpPr>
+          <p:cNvPr id="19" name="Text 17"/>
           <p:cNvSpPr/>
           <p:nvPr/>
         </p:nvSpPr>
@@ -3157,24 +3193,24 @@
         </p:nvSpPr>
         <p:spPr>
           <a:xfrm>
-            <a:off x="640080" y="640080"/>
-            <a:ext cx="10972800" cy="640080"/>
-          </a:xfrm>
-          <a:prstGeom prst="rect">
-            <a:avLst/>
-          </a:prstGeom>
-          <a:noFill/>
-          <a:ln/>
-        </p:spPr>
-        <p:txBody>
-          <a:bodyPr wrap="square" rtlCol="0" anchor="ctr"/>
+            <a:off x="640080" y="594360"/>
+            <a:ext cx="10972800" cy="822960"/>
+          </a:xfrm>
+          <a:prstGeom prst="rect">
+            <a:avLst/>
+          </a:prstGeom>
+          <a:noFill/>
+          <a:ln/>
+        </p:spPr>
+        <p:txBody>
+          <a:bodyPr wrap="square" rtlCol="0" anchor="t"/>
           <a:lstStyle/>
           <a:p>
             <a:pPr indent="0" marL="0">
               <a:buNone/>
             </a:pPr>
             <a:r>
-              <a:rPr lang="en-US" sz="3000" b="1" dirty="0">
+              <a:rPr lang="en-US" sz="2800" b="1" dirty="0">
                 <a:solidFill>
                   <a:srgbClr val="FFFFFF"/>
                 </a:solidFill>
@@ -3184,7 +3220,7 @@
               </a:rPr>
               <a:t>Hardest Part — grade the floor without storing the grade</a:t>
             </a:r>
-            <a:endParaRPr lang="en-US" sz="3000" dirty="0"/>
+            <a:endParaRPr lang="en-US" sz="2800" dirty="0"/>
           </a:p>
         </p:txBody>
       </p:sp>

--- a/ppt/VenkataSaiMothukuri_X25181238_smart-building-energy.pptx
+++ b/ppt/VenkataSaiMothukuri_X25181238_smart-building-energy.pptx
@@ -3167,7 +3167,7 @@
     <p:bg>
       <p:bgPr>
         <a:solidFill>
-          <a:srgbClr val="14301C"/>
+          <a:srgbClr val="FFFFFF"/>
         </a:solidFill>
       </p:bgPr>
     </p:bg>
@@ -3193,7 +3193,7 @@
         </p:nvSpPr>
         <p:spPr>
           <a:xfrm>
-            <a:off x="640080" y="594360"/>
+            <a:off x="640080" y="502920"/>
             <a:ext cx="10972800" cy="822960"/>
           </a:xfrm>
           <a:prstGeom prst="rect">
@@ -3212,7 +3212,7 @@
             <a:r>
               <a:rPr lang="en-US" sz="2800" b="1" dirty="0">
                 <a:solidFill>
-                  <a:srgbClr val="FFFFFF"/>
+                  <a:srgbClr val="153020"/>
                 </a:solidFill>
                 <a:latin typeface="Cambria" pitchFamily="34" charset="0"/>
                 <a:ea typeface="Cambria" pitchFamily="34" charset="-122"/>
@@ -3241,9 +3241,9 @@
             </a:avLst>
           </a:prstGeom>
           <a:solidFill>
-            <a:srgbClr val="20402A"/>
-          </a:solidFill>
-          <a:ln w="15875">
+            <a:srgbClr val="EEF4EC"/>
+          </a:solidFill>
+          <a:ln w="19050">
             <a:solidFill>
               <a:srgbClr val="D9A62E"/>
             </a:solidFill>
@@ -3320,7 +3320,7 @@
             <a:r>
               <a:rPr lang="en-US" sz="1300" dirty="0">
                 <a:solidFill>
-                  <a:srgbClr val="D2E4CC"/>
+                  <a:srgbClr val="153020"/>
                 </a:solidFill>
                 <a:latin typeface="Calibri" pitchFamily="34" charset="0"/>
                 <a:ea typeface="Calibri" pitchFamily="34" charset="-122"/>
@@ -3349,11 +3349,11 @@
             </a:avLst>
           </a:prstGeom>
           <a:solidFill>
-            <a:srgbClr val="20402A"/>
-          </a:solidFill>
-          <a:ln w="15875">
+            <a:srgbClr val="EEF4EC"/>
+          </a:solidFill>
+          <a:ln w="19050">
             <a:solidFill>
-              <a:srgbClr val="6A9A52"/>
+              <a:srgbClr val="2E7D32"/>
             </a:solidFill>
             <a:prstDash val="solid"/>
           </a:ln>
@@ -3386,7 +3386,7 @@
             <a:r>
               <a:rPr lang="en-US" sz="1900" b="1" dirty="0">
                 <a:solidFill>
-                  <a:srgbClr val="6A9A52"/>
+                  <a:srgbClr val="2E7D32"/>
                 </a:solidFill>
                 <a:latin typeface="Cambria" pitchFamily="34" charset="0"/>
                 <a:ea typeface="Cambria" pitchFamily="34" charset="-122"/>
@@ -3428,7 +3428,7 @@
             <a:r>
               <a:rPr lang="en-US" sz="1300" dirty="0">
                 <a:solidFill>
-                  <a:srgbClr val="D2E4CC"/>
+                  <a:srgbClr val="153020"/>
                 </a:solidFill>
                 <a:latin typeface="Calibri" pitchFamily="34" charset="0"/>
                 <a:ea typeface="Calibri" pitchFamily="34" charset="-122"/>

--- a/ppt/VenkataSaiMothukuri_X25181238_smart-building-energy.pptx
+++ b/ppt/VenkataSaiMothukuri_X25181238_smart-building-energy.pptx
@@ -1144,34 +1144,83 @@
       </p:grpSpPr>
       <p:sp>
         <p:nvSpPr>
-          <p:cNvPr id="2" name="Shape 0"/>
-          <p:cNvSpPr/>
-          <p:nvPr/>
-        </p:nvSpPr>
-        <p:spPr>
-          <a:xfrm>
-            <a:off x="0" y="0"/>
-            <a:ext cx="4663440" cy="6858000"/>
-          </a:xfrm>
-          <a:prstGeom prst="rect">
-            <a:avLst/>
-          </a:prstGeom>
-          <a:solidFill>
-            <a:srgbClr val="1B5E20"/>
-          </a:solidFill>
-          <a:ln/>
-        </p:spPr>
-      </p:sp>
-      <p:sp>
-        <p:nvSpPr>
-          <p:cNvPr id="3" name="Text 1"/>
-          <p:cNvSpPr/>
-          <p:nvPr/>
-        </p:nvSpPr>
-        <p:spPr>
-          <a:xfrm>
-            <a:off x="502920" y="1280160"/>
-            <a:ext cx="3749040" cy="2377440"/>
+          <p:cNvPr id="2" name="Text 0"/>
+          <p:cNvSpPr/>
+          <p:nvPr/>
+        </p:nvSpPr>
+        <p:spPr>
+          <a:xfrm>
+            <a:off x="658368" y="777240"/>
+            <a:ext cx="10607040" cy="1280160"/>
+          </a:xfrm>
+          <a:prstGeom prst="rect">
+            <a:avLst/>
+          </a:prstGeom>
+          <a:noFill/>
+          <a:ln/>
+        </p:spPr>
+        <p:txBody>
+          <a:bodyPr wrap="square" rtlCol="0" anchor="ctr"/>
+          <a:lstStyle/>
+          <a:p>
+            <a:pPr indent="0" marL="0">
+              <a:lnSpc>
+                <a:spcPct val="108000"/>
+              </a:lnSpc>
+              <a:buNone/>
+            </a:pPr>
+            <a:r>
+              <a:rPr lang="en-US" sz="1800" dirty="0">
+                <a:solidFill>
+                  <a:srgbClr val="D2E4CC"/>
+                </a:solidFill>
+                <a:latin typeface="Calibri" pitchFamily="34" charset="0"/>
+                <a:ea typeface="Calibri" pitchFamily="34" charset="-122"/>
+                <a:cs typeface="Calibri" pitchFamily="34" charset="-120"/>
+              </a:rPr>
+              <a:t>A building manager asks two different things at once — is anything wrong right now, and how efficiently is this floor running overall — and they are not the same question.</a:t>
+            </a:r>
+            <a:endParaRPr lang="en-US" sz="1800" dirty="0"/>
+          </a:p>
+        </p:txBody>
+      </p:sp>
+      <p:sp>
+        <p:nvSpPr>
+          <p:cNvPr id="3" name="Shape 1"/>
+          <p:cNvSpPr/>
+          <p:nvPr/>
+        </p:nvSpPr>
+        <p:spPr>
+          <a:xfrm>
+            <a:off x="1097280" y="2377440"/>
+            <a:ext cx="9966960" cy="2011680"/>
+          </a:xfrm>
+          <a:prstGeom prst="roundRect">
+            <a:avLst>
+              <a:gd name="adj" fmla="val 5455"/>
+            </a:avLst>
+          </a:prstGeom>
+          <a:solidFill>
+            <a:srgbClr val="1C3A24"/>
+          </a:solidFill>
+          <a:ln w="15875">
+            <a:solidFill>
+              <a:srgbClr val="D9A62E"/>
+            </a:solidFill>
+            <a:prstDash val="solid"/>
+          </a:ln>
+        </p:spPr>
+      </p:sp>
+      <p:sp>
+        <p:nvSpPr>
+          <p:cNvPr id="4" name="Text 2"/>
+          <p:cNvSpPr/>
+          <p:nvPr/>
+        </p:nvSpPr>
+        <p:spPr>
+          <a:xfrm>
+            <a:off x="1463040" y="2651760"/>
+            <a:ext cx="9235440" cy="1005840"/>
           </a:xfrm>
           <a:prstGeom prst="rect">
             <a:avLst/>
@@ -1187,7 +1236,7 @@
               <a:buNone/>
             </a:pPr>
             <a:r>
-              <a:rPr lang="en-US" sz="3400" b="1" dirty="0">
+              <a:rPr lang="en-US" sz="3600" b="1" dirty="0">
                 <a:solidFill>
                   <a:srgbClr val="FFFFFF"/>
                 </a:solidFill>
@@ -1197,20 +1246,20 @@
               </a:rPr>
               <a:t>Smart Building Energy Monitoring</a:t>
             </a:r>
-            <a:endParaRPr lang="en-US" sz="3400" dirty="0"/>
-          </a:p>
-        </p:txBody>
-      </p:sp>
-      <p:sp>
-        <p:nvSpPr>
-          <p:cNvPr id="4" name="Text 2"/>
-          <p:cNvSpPr/>
-          <p:nvPr/>
-        </p:nvSpPr>
-        <p:spPr>
-          <a:xfrm>
-            <a:off x="521208" y="5394960"/>
-            <a:ext cx="3840480" cy="731520"/>
+            <a:endParaRPr lang="en-US" sz="3600" dirty="0"/>
+          </a:p>
+        </p:txBody>
+      </p:sp>
+      <p:sp>
+        <p:nvSpPr>
+          <p:cNvPr id="5" name="Text 3"/>
+          <p:cNvSpPr/>
+          <p:nvPr/>
+        </p:nvSpPr>
+        <p:spPr>
+          <a:xfrm>
+            <a:off x="1481328" y="3703320"/>
+            <a:ext cx="9144000" cy="457200"/>
           </a:xfrm>
           <a:prstGeom prst="rect">
             <a:avLst/>
@@ -1228,7 +1277,7 @@
             <a:r>
               <a:rPr lang="en-US" sz="1500" dirty="0">
                 <a:solidFill>
-                  <a:srgbClr val="D2E4CC"/>
+                  <a:srgbClr val="6A9A52"/>
                 </a:solidFill>
                 <a:latin typeface="Calibri" pitchFamily="34" charset="0"/>
                 <a:ea typeface="Calibri" pitchFamily="34" charset="-122"/>
@@ -1242,56 +1291,14 @@
       </p:sp>
       <p:sp>
         <p:nvSpPr>
-          <p:cNvPr id="5" name="Text 3"/>
-          <p:cNvSpPr/>
-          <p:nvPr/>
-        </p:nvSpPr>
-        <p:spPr>
-          <a:xfrm>
-            <a:off x="5120640" y="1371600"/>
-            <a:ext cx="6492240" cy="2011680"/>
-          </a:xfrm>
-          <a:prstGeom prst="rect">
-            <a:avLst/>
-          </a:prstGeom>
-          <a:noFill/>
-          <a:ln/>
-        </p:spPr>
-        <p:txBody>
-          <a:bodyPr wrap="square" rtlCol="0" anchor="ctr"/>
-          <a:lstStyle/>
-          <a:p>
-            <a:pPr indent="0" marL="0">
-              <a:lnSpc>
-                <a:spcPct val="112000"/>
-              </a:lnSpc>
-              <a:buNone/>
-            </a:pPr>
-            <a:r>
-              <a:rPr lang="en-US" sz="2000" dirty="0">
-                <a:solidFill>
-                  <a:srgbClr val="D2E4CC"/>
-                </a:solidFill>
-                <a:latin typeface="Calibri" pitchFamily="34" charset="0"/>
-                <a:ea typeface="Calibri" pitchFamily="34" charset="-122"/>
-                <a:cs typeface="Calibri" pitchFamily="34" charset="-120"/>
-              </a:rPr>
-              <a:t>A building manager asks two different things at once — is anything wrong right now, and how efficiently is this floor running overall — and they are not the same question.</a:t>
-            </a:r>
-            <a:endParaRPr lang="en-US" sz="2000" dirty="0"/>
-          </a:p>
-        </p:txBody>
-      </p:sp>
-      <p:sp>
-        <p:nvSpPr>
           <p:cNvPr id="6" name="Shape 4"/>
           <p:cNvSpPr/>
           <p:nvPr/>
         </p:nvSpPr>
         <p:spPr>
           <a:xfrm>
-            <a:off x="5120640" y="4023360"/>
-            <a:ext cx="2926080" cy="566928"/>
+            <a:off x="1097280" y="4709160"/>
+            <a:ext cx="2651760" cy="566928"/>
           </a:xfrm>
           <a:prstGeom prst="roundRect">
             <a:avLst>
@@ -1317,8 +1324,8 @@
         </p:nvSpPr>
         <p:spPr>
           <a:xfrm>
-            <a:off x="5120640" y="4023360"/>
-            <a:ext cx="2926080" cy="566928"/>
+            <a:off x="1097280" y="4709160"/>
+            <a:ext cx="2651760" cy="566928"/>
           </a:xfrm>
           <a:prstGeom prst="rect">
             <a:avLst/>
@@ -1356,8 +1363,8 @@
         </p:nvSpPr>
         <p:spPr>
           <a:xfrm>
-            <a:off x="5120640" y="4709160"/>
-            <a:ext cx="2926080" cy="566928"/>
+            <a:off x="3977640" y="4709160"/>
+            <a:ext cx="2651760" cy="566928"/>
           </a:xfrm>
           <a:prstGeom prst="roundRect">
             <a:avLst>
@@ -1383,8 +1390,8 @@
         </p:nvSpPr>
         <p:spPr>
           <a:xfrm>
-            <a:off x="5120640" y="4709160"/>
-            <a:ext cx="2926080" cy="566928"/>
+            <a:off x="3977640" y="4709160"/>
+            <a:ext cx="2651760" cy="566928"/>
           </a:xfrm>
           <a:prstGeom prst="rect">
             <a:avLst/>
@@ -1422,8 +1429,8 @@
         </p:nvSpPr>
         <p:spPr>
           <a:xfrm>
-            <a:off x="5120640" y="5394960"/>
-            <a:ext cx="2926080" cy="566928"/>
+            <a:off x="6858000" y="4709160"/>
+            <a:ext cx="2651760" cy="566928"/>
           </a:xfrm>
           <a:prstGeom prst="roundRect">
             <a:avLst>
@@ -1449,8 +1456,8 @@
         </p:nvSpPr>
         <p:spPr>
           <a:xfrm>
-            <a:off x="5120640" y="5394960"/>
-            <a:ext cx="2926080" cy="566928"/>
+            <a:off x="6858000" y="4709160"/>
+            <a:ext cx="2651760" cy="566928"/>
           </a:xfrm>
           <a:prstGeom prst="rect">
             <a:avLst/>
@@ -1488,8 +1495,8 @@
         </p:nvSpPr>
         <p:spPr>
           <a:xfrm>
-            <a:off x="5120640" y="6172200"/>
-            <a:ext cx="6400800" cy="365760"/>
+            <a:off x="658368" y="6355080"/>
+            <a:ext cx="10972800" cy="320040"/>
           </a:xfrm>
           <a:prstGeom prst="rect">
             <a:avLst/>
@@ -3232,12 +3239,12 @@
         </p:nvSpPr>
         <p:spPr>
           <a:xfrm>
-            <a:off x="731520" y="1920240"/>
-            <a:ext cx="10698480" cy="1965960"/>
+            <a:off x="640080" y="1874520"/>
+            <a:ext cx="4937760" cy="4160520"/>
           </a:xfrm>
           <a:prstGeom prst="roundRect">
             <a:avLst>
-              <a:gd name="adj" fmla="val 4651"/>
+              <a:gd name="adj" fmla="val 2198"/>
             </a:avLst>
           </a:prstGeom>
           <a:solidFill>
@@ -3259,7 +3266,7 @@
         </p:nvSpPr>
         <p:spPr>
           <a:xfrm>
-            <a:off x="1005840" y="2103120"/>
+            <a:off x="960120" y="2103120"/>
             <a:ext cx="3657600" cy="457200"/>
           </a:xfrm>
           <a:prstGeom prst="rect">
@@ -3298,8 +3305,8 @@
         </p:nvSpPr>
         <p:spPr>
           <a:xfrm>
-            <a:off x="1005840" y="2578608"/>
-            <a:ext cx="9966960" cy="1188720"/>
+            <a:off x="960120" y="2651760"/>
+            <a:ext cx="4343400" cy="3200400"/>
           </a:xfrm>
           <a:prstGeom prst="rect">
             <a:avLst/>
@@ -3313,12 +3320,12 @@
           <a:p>
             <a:pPr indent="0" marL="0">
               <a:lnSpc>
-                <a:spcPct val="105000"/>
+                <a:spcPct val="112000"/>
               </a:lnSpc>
               <a:buNone/>
             </a:pPr>
             <a:r>
-              <a:rPr lang="en-US" sz="1300" dirty="0">
+              <a:rPr lang="en-US" sz="1350" dirty="0">
                 <a:solidFill>
                   <a:srgbClr val="153020"/>
                 </a:solidFill>
@@ -3328,7 +3335,7 @@
               </a:rPr>
               <a:t>A manager needs both an exception (something specific is wrong now) and a rating (how efficiently the floor runs overall) — but they belong on separate axes. Baking a rating into stored records would freeze the thresholds and blur the two questions together.</a:t>
             </a:r>
-            <a:endParaRPr lang="en-US" sz="1300" dirty="0"/>
+            <a:endParaRPr lang="en-US" sz="1350" dirty="0"/>
           </a:p>
         </p:txBody>
       </p:sp>
@@ -3340,12 +3347,12 @@
         </p:nvSpPr>
         <p:spPr>
           <a:xfrm>
-            <a:off x="731520" y="4041648"/>
-            <a:ext cx="10698480" cy="1965960"/>
+            <a:off x="6611112" y="1874520"/>
+            <a:ext cx="4937760" cy="4160520"/>
           </a:xfrm>
           <a:prstGeom prst="roundRect">
             <a:avLst>
-              <a:gd name="adj" fmla="val 4651"/>
+              <a:gd name="adj" fmla="val 2198"/>
             </a:avLst>
           </a:prstGeom>
           <a:solidFill>
@@ -3367,7 +3374,7 @@
         </p:nvSpPr>
         <p:spPr>
           <a:xfrm>
-            <a:off x="1005840" y="4224528"/>
+            <a:off x="6931152" y="2103120"/>
             <a:ext cx="3657600" cy="457200"/>
           </a:xfrm>
           <a:prstGeom prst="rect">
@@ -3406,8 +3413,8 @@
         </p:nvSpPr>
         <p:spPr>
           <a:xfrm>
-            <a:off x="1005840" y="4700016"/>
-            <a:ext cx="9966960" cy="1188720"/>
+            <a:off x="6931152" y="2651760"/>
+            <a:ext cx="4343400" cy="3200400"/>
           </a:xfrm>
           <a:prstGeom prst="rect">
             <a:avLst/>
@@ -3421,12 +3428,12 @@
           <a:p>
             <a:pPr indent="0" marL="0">
               <a:lnSpc>
-                <a:spcPct val="105000"/>
+                <a:spcPct val="112000"/>
               </a:lnSpc>
               <a:buNone/>
             </a:pPr>
             <a:r>
-              <a:rPr lang="en-US" sz="1300" dirty="0">
+              <a:rPr lang="en-US" sz="1350" dirty="0">
                 <a:solidFill>
                   <a:srgbClr val="153020"/>
                 </a:solidFill>
@@ -3436,9 +3443,29 @@
               </a:rPr>
               <a:t>The fog answers the exception question at the edge, raising four hard alarms per window. The dashboard answers performance on read: it scores energy draw and air quality each from 100 down to 0, averages them, and maps the number to an A-to-F letter like a building energy certificate — derived fresh on every read, never stored, so thresholds can be retuned without touching a saved record.</a:t>
             </a:r>
-            <a:endParaRPr lang="en-US" sz="1300" dirty="0"/>
-          </a:p>
-        </p:txBody>
+            <a:endParaRPr lang="en-US" sz="1350" dirty="0"/>
+          </a:p>
+        </p:txBody>
+      </p:sp>
+      <p:sp>
+        <p:nvSpPr>
+          <p:cNvPr id="9" name="Shape 7"/>
+          <p:cNvSpPr/>
+          <p:nvPr/>
+        </p:nvSpPr>
+        <p:spPr>
+          <a:xfrm>
+            <a:off x="5669280" y="3703320"/>
+            <a:ext cx="841248" cy="512064"/>
+          </a:xfrm>
+          <a:prstGeom prst="rightArrow">
+            <a:avLst/>
+          </a:prstGeom>
+          <a:solidFill>
+            <a:srgbClr val="1B5E20"/>
+          </a:solidFill>
+          <a:ln/>
+        </p:spPr>
       </p:sp>
     </p:spTree>
   </p:cSld>

--- a/ppt/VenkataSaiMothukuri_X25181238_smart-building-energy.pptx
+++ b/ppt/VenkataSaiMothukuri_X25181238_smart-building-energy.pptx
@@ -2628,12 +2628,12 @@
         </p:nvSpPr>
         <p:spPr>
           <a:xfrm>
-            <a:off x="640080" y="1874520"/>
-            <a:ext cx="3502152" cy="3657600"/>
+            <a:off x="640080" y="1828800"/>
+            <a:ext cx="10881360" cy="1371600"/>
           </a:xfrm>
           <a:prstGeom prst="roundRect">
             <a:avLst>
-              <a:gd name="adj" fmla="val 2611"/>
+              <a:gd name="adj" fmla="val 6667"/>
             </a:avLst>
           </a:prstGeom>
           <a:solidFill>
@@ -2655,8 +2655,8 @@
         </p:nvSpPr>
         <p:spPr>
           <a:xfrm>
-            <a:off x="914400" y="2194560"/>
-            <a:ext cx="640080" cy="640080"/>
+            <a:off x="960120" y="2203704"/>
+            <a:ext cx="621792" cy="621792"/>
           </a:xfrm>
           <a:prstGeom prst="ellipse">
             <a:avLst/>
@@ -2675,8 +2675,8 @@
         </p:nvSpPr>
         <p:spPr>
           <a:xfrm>
-            <a:off x="914400" y="2194560"/>
-            <a:ext cx="640080" cy="640080"/>
+            <a:off x="960120" y="2203704"/>
+            <a:ext cx="621792" cy="621792"/>
           </a:xfrm>
           <a:prstGeom prst="rect">
             <a:avLst/>
@@ -2692,7 +2692,7 @@
               <a:buNone/>
             </a:pPr>
             <a:r>
-              <a:rPr lang="en-US" sz="2400" b="1" dirty="0">
+              <a:rPr lang="en-US" sz="2200" b="1" dirty="0">
                 <a:solidFill>
                   <a:srgbClr val="FFFFFF"/>
                 </a:solidFill>
@@ -2702,7 +2702,7 @@
               </a:rPr>
               <a:t>1</a:t>
             </a:r>
-            <a:endParaRPr lang="en-US" sz="2400" dirty="0"/>
+            <a:endParaRPr lang="en-US" sz="2200" dirty="0"/>
           </a:p>
         </p:txBody>
       </p:sp>
@@ -2714,8 +2714,8 @@
         </p:nvSpPr>
         <p:spPr>
           <a:xfrm>
-            <a:off x="914400" y="3017520"/>
-            <a:ext cx="2953512" cy="822960"/>
+            <a:off x="1828800" y="2029968"/>
+            <a:ext cx="9418320" cy="411480"/>
           </a:xfrm>
           <a:prstGeom prst="rect">
             <a:avLst/>
@@ -2753,8 +2753,8 @@
         </p:nvSpPr>
         <p:spPr>
           <a:xfrm>
-            <a:off x="914400" y="3794760"/>
-            <a:ext cx="2953512" cy="1554480"/>
+            <a:off x="1828800" y="2450592"/>
+            <a:ext cx="9418320" cy="594360"/>
           </a:xfrm>
           <a:prstGeom prst="rect">
             <a:avLst/>
@@ -2795,12 +2795,12 @@
         </p:nvSpPr>
         <p:spPr>
           <a:xfrm>
-            <a:off x="4416552" y="1874520"/>
-            <a:ext cx="3502152" cy="3657600"/>
+            <a:off x="640080" y="3346704"/>
+            <a:ext cx="10881360" cy="1371600"/>
           </a:xfrm>
           <a:prstGeom prst="roundRect">
             <a:avLst>
-              <a:gd name="adj" fmla="val 2611"/>
+              <a:gd name="adj" fmla="val 6667"/>
             </a:avLst>
           </a:prstGeom>
           <a:solidFill>
@@ -2822,8 +2822,8 @@
         </p:nvSpPr>
         <p:spPr>
           <a:xfrm>
-            <a:off x="4690872" y="2194560"/>
-            <a:ext cx="640080" cy="640080"/>
+            <a:off x="960120" y="3721608"/>
+            <a:ext cx="621792" cy="621792"/>
           </a:xfrm>
           <a:prstGeom prst="ellipse">
             <a:avLst/>
@@ -2842,8 +2842,8 @@
         </p:nvSpPr>
         <p:spPr>
           <a:xfrm>
-            <a:off x="4690872" y="2194560"/>
-            <a:ext cx="640080" cy="640080"/>
+            <a:off x="960120" y="3721608"/>
+            <a:ext cx="621792" cy="621792"/>
           </a:xfrm>
           <a:prstGeom prst="rect">
             <a:avLst/>
@@ -2859,7 +2859,7 @@
               <a:buNone/>
             </a:pPr>
             <a:r>
-              <a:rPr lang="en-US" sz="2400" b="1" dirty="0">
+              <a:rPr lang="en-US" sz="2200" b="1" dirty="0">
                 <a:solidFill>
                   <a:srgbClr val="FFFFFF"/>
                 </a:solidFill>
@@ -2869,7 +2869,7 @@
               </a:rPr>
               <a:t>2</a:t>
             </a:r>
-            <a:endParaRPr lang="en-US" sz="2400" dirty="0"/>
+            <a:endParaRPr lang="en-US" sz="2200" dirty="0"/>
           </a:p>
         </p:txBody>
       </p:sp>
@@ -2881,8 +2881,8 @@
         </p:nvSpPr>
         <p:spPr>
           <a:xfrm>
-            <a:off x="4690872" y="3017520"/>
-            <a:ext cx="2953512" cy="822960"/>
+            <a:off x="1828800" y="3547872"/>
+            <a:ext cx="9418320" cy="411480"/>
           </a:xfrm>
           <a:prstGeom prst="rect">
             <a:avLst/>
@@ -2920,8 +2920,8 @@
         </p:nvSpPr>
         <p:spPr>
           <a:xfrm>
-            <a:off x="4690872" y="3794760"/>
-            <a:ext cx="2953512" cy="1554480"/>
+            <a:off x="1828800" y="3968496"/>
+            <a:ext cx="9418320" cy="594360"/>
           </a:xfrm>
           <a:prstGeom prst="rect">
             <a:avLst/>
@@ -2962,12 +2962,12 @@
         </p:nvSpPr>
         <p:spPr>
           <a:xfrm>
-            <a:off x="8193024" y="1874520"/>
-            <a:ext cx="3502152" cy="3657600"/>
+            <a:off x="640080" y="4864608"/>
+            <a:ext cx="10881360" cy="1371600"/>
           </a:xfrm>
           <a:prstGeom prst="roundRect">
             <a:avLst>
-              <a:gd name="adj" fmla="val 2611"/>
+              <a:gd name="adj" fmla="val 6667"/>
             </a:avLst>
           </a:prstGeom>
           <a:solidFill>
@@ -2989,8 +2989,8 @@
         </p:nvSpPr>
         <p:spPr>
           <a:xfrm>
-            <a:off x="8467344" y="2194560"/>
-            <a:ext cx="640080" cy="640080"/>
+            <a:off x="960120" y="5239512"/>
+            <a:ext cx="621792" cy="621792"/>
           </a:xfrm>
           <a:prstGeom prst="ellipse">
             <a:avLst/>
@@ -3009,8 +3009,8 @@
         </p:nvSpPr>
         <p:spPr>
           <a:xfrm>
-            <a:off x="8467344" y="2194560"/>
-            <a:ext cx="640080" cy="640080"/>
+            <a:off x="960120" y="5239512"/>
+            <a:ext cx="621792" cy="621792"/>
           </a:xfrm>
           <a:prstGeom prst="rect">
             <a:avLst/>
@@ -3026,7 +3026,7 @@
               <a:buNone/>
             </a:pPr>
             <a:r>
-              <a:rPr lang="en-US" sz="2400" b="1" dirty="0">
+              <a:rPr lang="en-US" sz="2200" b="1" dirty="0">
                 <a:solidFill>
                   <a:srgbClr val="FFFFFF"/>
                 </a:solidFill>
@@ -3036,7 +3036,7 @@
               </a:rPr>
               <a:t>3</a:t>
             </a:r>
-            <a:endParaRPr lang="en-US" sz="2400" dirty="0"/>
+            <a:endParaRPr lang="en-US" sz="2200" dirty="0"/>
           </a:p>
         </p:txBody>
       </p:sp>
@@ -3048,8 +3048,8 @@
         </p:nvSpPr>
         <p:spPr>
           <a:xfrm>
-            <a:off x="8467344" y="3017520"/>
-            <a:ext cx="2953512" cy="822960"/>
+            <a:off x="1828800" y="5065776"/>
+            <a:ext cx="9418320" cy="411480"/>
           </a:xfrm>
           <a:prstGeom prst="rect">
             <a:avLst/>
@@ -3087,8 +3087,8 @@
         </p:nvSpPr>
         <p:spPr>
           <a:xfrm>
-            <a:off x="8467344" y="3794760"/>
-            <a:ext cx="2953512" cy="1554480"/>
+            <a:off x="1828800" y="5486400"/>
+            <a:ext cx="9418320" cy="594360"/>
           </a:xfrm>
           <a:prstGeom prst="rect">
             <a:avLst/>
@@ -3116,45 +3116,6 @@
                 <a:cs typeface="Calibri" pitchFamily="34" charset="-120"/>
               </a:rPr>
               <a:t>The energy chart tracks both floors, so the number behind each grade is visible as it moves.</a:t>
-            </a:r>
-            <a:endParaRPr lang="en-US" sz="1300" dirty="0"/>
-          </a:p>
-        </p:txBody>
-      </p:sp>
-      <p:sp>
-        <p:nvSpPr>
-          <p:cNvPr id="19" name="Text 17"/>
-          <p:cNvSpPr/>
-          <p:nvPr/>
-        </p:nvSpPr>
-        <p:spPr>
-          <a:xfrm>
-            <a:off x="640080" y="6263640"/>
-            <a:ext cx="10972800" cy="365760"/>
-          </a:xfrm>
-          <a:prstGeom prst="rect">
-            <a:avLst/>
-          </a:prstGeom>
-          <a:noFill/>
-          <a:ln/>
-        </p:spPr>
-        <p:txBody>
-          <a:bodyPr wrap="square" rtlCol="0" anchor="ctr"/>
-          <a:lstStyle/>
-          <a:p>
-            <a:pPr indent="0" marL="0">
-              <a:buNone/>
-            </a:pPr>
-            <a:r>
-              <a:rPr lang="en-US" sz="1300" i="1" dirty="0">
-                <a:solidFill>
-                  <a:srgbClr val="6A9A52"/>
-                </a:solidFill>
-                <a:latin typeface="Calibri" pitchFamily="34" charset="0"/>
-                <a:ea typeface="Calibri" pitchFamily="34" charset="-122"/>
-                <a:cs typeface="Calibri" pitchFamily="34" charset="-120"/>
-              </a:rPr>
-              <a:t>Switch to the live dashboard here — backup video ready.</a:t>
             </a:r>
             <a:endParaRPr lang="en-US" sz="1300" dirty="0"/>
           </a:p>
@@ -3239,12 +3200,12 @@
         </p:nvSpPr>
         <p:spPr>
           <a:xfrm>
-            <a:off x="640080" y="1874520"/>
-            <a:ext cx="4937760" cy="4160520"/>
+            <a:off x="731520" y="1920240"/>
+            <a:ext cx="10698480" cy="1965960"/>
           </a:xfrm>
           <a:prstGeom prst="roundRect">
             <a:avLst>
-              <a:gd name="adj" fmla="val 2198"/>
+              <a:gd name="adj" fmla="val 4651"/>
             </a:avLst>
           </a:prstGeom>
           <a:solidFill>
@@ -3266,7 +3227,7 @@
         </p:nvSpPr>
         <p:spPr>
           <a:xfrm>
-            <a:off x="960120" y="2103120"/>
+            <a:off x="1005840" y="2103120"/>
             <a:ext cx="3657600" cy="457200"/>
           </a:xfrm>
           <a:prstGeom prst="rect">
@@ -3305,8 +3266,8 @@
         </p:nvSpPr>
         <p:spPr>
           <a:xfrm>
-            <a:off x="960120" y="2651760"/>
-            <a:ext cx="4343400" cy="3200400"/>
+            <a:off x="1005840" y="2578608"/>
+            <a:ext cx="9966960" cy="1188720"/>
           </a:xfrm>
           <a:prstGeom prst="rect">
             <a:avLst/>
@@ -3320,12 +3281,12 @@
           <a:p>
             <a:pPr indent="0" marL="0">
               <a:lnSpc>
-                <a:spcPct val="112000"/>
+                <a:spcPct val="105000"/>
               </a:lnSpc>
               <a:buNone/>
             </a:pPr>
             <a:r>
-              <a:rPr lang="en-US" sz="1350" dirty="0">
+              <a:rPr lang="en-US" sz="1300" dirty="0">
                 <a:solidFill>
                   <a:srgbClr val="153020"/>
                 </a:solidFill>
@@ -3335,7 +3296,7 @@
               </a:rPr>
               <a:t>A manager needs both an exception (something specific is wrong now) and a rating (how efficiently the floor runs overall) — but they belong on separate axes. Baking a rating into stored records would freeze the thresholds and blur the two questions together.</a:t>
             </a:r>
-            <a:endParaRPr lang="en-US" sz="1350" dirty="0"/>
+            <a:endParaRPr lang="en-US" sz="1300" dirty="0"/>
           </a:p>
         </p:txBody>
       </p:sp>
@@ -3347,12 +3308,12 @@
         </p:nvSpPr>
         <p:spPr>
           <a:xfrm>
-            <a:off x="6611112" y="1874520"/>
-            <a:ext cx="4937760" cy="4160520"/>
+            <a:off x="731520" y="4041648"/>
+            <a:ext cx="10698480" cy="1965960"/>
           </a:xfrm>
           <a:prstGeom prst="roundRect">
             <a:avLst>
-              <a:gd name="adj" fmla="val 2198"/>
+              <a:gd name="adj" fmla="val 4651"/>
             </a:avLst>
           </a:prstGeom>
           <a:solidFill>
@@ -3374,7 +3335,7 @@
         </p:nvSpPr>
         <p:spPr>
           <a:xfrm>
-            <a:off x="6931152" y="2103120"/>
+            <a:off x="1005840" y="4224528"/>
             <a:ext cx="3657600" cy="457200"/>
           </a:xfrm>
           <a:prstGeom prst="rect">
@@ -3413,8 +3374,8 @@
         </p:nvSpPr>
         <p:spPr>
           <a:xfrm>
-            <a:off x="6931152" y="2651760"/>
-            <a:ext cx="4343400" cy="3200400"/>
+            <a:off x="1005840" y="4700016"/>
+            <a:ext cx="9966960" cy="1188720"/>
           </a:xfrm>
           <a:prstGeom prst="rect">
             <a:avLst/>
@@ -3428,12 +3389,12 @@
           <a:p>
             <a:pPr indent="0" marL="0">
               <a:lnSpc>
-                <a:spcPct val="112000"/>
+                <a:spcPct val="105000"/>
               </a:lnSpc>
               <a:buNone/>
             </a:pPr>
             <a:r>
-              <a:rPr lang="en-US" sz="1350" dirty="0">
+              <a:rPr lang="en-US" sz="1300" dirty="0">
                 <a:solidFill>
                   <a:srgbClr val="153020"/>
                 </a:solidFill>
@@ -3443,29 +3404,9 @@
               </a:rPr>
               <a:t>The fog answers the exception question at the edge, raising four hard alarms per window. The dashboard answers performance on read: it scores energy draw and air quality each from 100 down to 0, averages them, and maps the number to an A-to-F letter like a building energy certificate — derived fresh on every read, never stored, so thresholds can be retuned without touching a saved record.</a:t>
             </a:r>
-            <a:endParaRPr lang="en-US" sz="1350" dirty="0"/>
-          </a:p>
-        </p:txBody>
-      </p:sp>
-      <p:sp>
-        <p:nvSpPr>
-          <p:cNvPr id="9" name="Shape 7"/>
-          <p:cNvSpPr/>
-          <p:nvPr/>
-        </p:nvSpPr>
-        <p:spPr>
-          <a:xfrm>
-            <a:off x="5669280" y="3703320"/>
-            <a:ext cx="841248" cy="512064"/>
-          </a:xfrm>
-          <a:prstGeom prst="rightArrow">
-            <a:avLst/>
-          </a:prstGeom>
-          <a:solidFill>
-            <a:srgbClr val="1B5E20"/>
-          </a:solidFill>
-          <a:ln/>
-        </p:spPr>
+            <a:endParaRPr lang="en-US" sz="1300" dirty="0"/>
+          </a:p>
+        </p:txBody>
       </p:sp>
     </p:spTree>
   </p:cSld>

--- a/ppt/VenkataSaiMothukuri_X25181238_smart-building-energy.pptx
+++ b/ppt/VenkataSaiMothukuri_X25181238_smart-building-energy.pptx
@@ -1201,14 +1201,9 @@
             </a:avLst>
           </a:prstGeom>
           <a:solidFill>
-            <a:srgbClr val="1C3A24"/>
-          </a:solidFill>
-          <a:ln w="15875">
-            <a:solidFill>
-              <a:srgbClr val="D9A62E"/>
-            </a:solidFill>
-            <a:prstDash val="solid"/>
-          </a:ln>
+            <a:srgbClr val="1B5E20"/>
+          </a:solidFill>
+          <a:ln/>
         </p:spPr>
       </p:sp>
       <p:sp>
@@ -1277,7 +1272,7 @@
             <a:r>
               <a:rPr lang="en-US" sz="1500" dirty="0">
                 <a:solidFill>
-                  <a:srgbClr val="6A9A52"/>
+                  <a:srgbClr val="D2E4CC"/>
                 </a:solidFill>
                 <a:latin typeface="Calibri" pitchFamily="34" charset="0"/>
                 <a:ea typeface="Calibri" pitchFamily="34" charset="-122"/>
@@ -1291,41 +1286,14 @@
       </p:sp>
       <p:sp>
         <p:nvSpPr>
-          <p:cNvPr id="6" name="Shape 4"/>
+          <p:cNvPr id="6" name="Text 4"/>
           <p:cNvSpPr/>
           <p:nvPr/>
         </p:nvSpPr>
         <p:spPr>
           <a:xfrm>
             <a:off x="1097280" y="4709160"/>
-            <a:ext cx="2651760" cy="566928"/>
-          </a:xfrm>
-          <a:prstGeom prst="roundRect">
-            <a:avLst>
-              <a:gd name="adj" fmla="val 50000"/>
-            </a:avLst>
-          </a:prstGeom>
-          <a:solidFill>
-            <a:srgbClr val="1C3A24"/>
-          </a:solidFill>
-          <a:ln w="12700">
-            <a:solidFill>
-              <a:srgbClr val="D9A62E"/>
-            </a:solidFill>
-            <a:prstDash val="solid"/>
-          </a:ln>
-        </p:spPr>
-      </p:sp>
-      <p:sp>
-        <p:nvSpPr>
-          <p:cNvPr id="7" name="Text 5"/>
-          <p:cNvSpPr/>
-          <p:nvPr/>
-        </p:nvSpPr>
-        <p:spPr>
-          <a:xfrm>
-            <a:off x="1097280" y="4709160"/>
-            <a:ext cx="2651760" cy="566928"/>
+            <a:ext cx="10972800" cy="457200"/>
           </a:xfrm>
           <a:prstGeom prst="rect">
             <a:avLst/>
@@ -1337,11 +1305,11 @@
           <a:bodyPr wrap="square" lIns="0" tIns="0" rIns="0" bIns="0" rtlCol="0" anchor="ctr"/>
           <a:lstStyle/>
           <a:p>
-            <a:pPr algn="ctr" indent="0" marL="0">
+            <a:pPr indent="0" marL="0">
               <a:buNone/>
             </a:pPr>
             <a:r>
-              <a:rPr lang="en-US" sz="1350" b="1" dirty="0">
+              <a:rPr lang="en-US" sz="1550" b="1" dirty="0">
                 <a:solidFill>
                   <a:srgbClr val="D9A62E"/>
                 </a:solidFill>
@@ -1349,147 +1317,15 @@
                 <a:ea typeface="Calibri" pitchFamily="34" charset="-122"/>
                 <a:cs typeface="Calibri" pitchFamily="34" charset="-120"/>
               </a:rPr>
-              <a:t>Peak load &gt; 55 kW</a:t>
-            </a:r>
-            <a:endParaRPr lang="en-US" sz="1350" dirty="0"/>
-          </a:p>
-        </p:txBody>
-      </p:sp>
-      <p:sp>
-        <p:nvSpPr>
-          <p:cNvPr id="8" name="Shape 6"/>
-          <p:cNvSpPr/>
-          <p:nvPr/>
-        </p:nvSpPr>
-        <p:spPr>
-          <a:xfrm>
-            <a:off x="3977640" y="4709160"/>
-            <a:ext cx="2651760" cy="566928"/>
-          </a:xfrm>
-          <a:prstGeom prst="roundRect">
-            <a:avLst>
-              <a:gd name="adj" fmla="val 50000"/>
-            </a:avLst>
-          </a:prstGeom>
-          <a:solidFill>
-            <a:srgbClr val="1C3A24"/>
-          </a:solidFill>
-          <a:ln w="12700">
-            <a:solidFill>
-              <a:srgbClr val="D9A62E"/>
-            </a:solidFill>
-            <a:prstDash val="solid"/>
-          </a:ln>
-        </p:spPr>
-      </p:sp>
-      <p:sp>
-        <p:nvSpPr>
-          <p:cNvPr id="9" name="Text 7"/>
-          <p:cNvSpPr/>
-          <p:nvPr/>
-        </p:nvSpPr>
-        <p:spPr>
-          <a:xfrm>
-            <a:off x="3977640" y="4709160"/>
-            <a:ext cx="2651760" cy="566928"/>
-          </a:xfrm>
-          <a:prstGeom prst="rect">
-            <a:avLst/>
-          </a:prstGeom>
-          <a:noFill/>
-          <a:ln/>
-        </p:spPr>
-        <p:txBody>
-          <a:bodyPr wrap="square" lIns="0" tIns="0" rIns="0" bIns="0" rtlCol="0" anchor="ctr"/>
-          <a:lstStyle/>
-          <a:p>
-            <a:pPr algn="ctr" indent="0" marL="0">
-              <a:buNone/>
-            </a:pPr>
-            <a:r>
-              <a:rPr lang="en-US" sz="1350" b="1" dirty="0">
-                <a:solidFill>
-                  <a:srgbClr val="D9A62E"/>
-                </a:solidFill>
-                <a:latin typeface="Calibri" pitchFamily="34" charset="0"/>
-                <a:ea typeface="Calibri" pitchFamily="34" charset="-122"/>
-                <a:cs typeface="Calibri" pitchFamily="34" charset="-120"/>
-              </a:rPr>
-              <a:t>CO₂ &gt; 1,000 ppm</a:t>
-            </a:r>
-            <a:endParaRPr lang="en-US" sz="1350" dirty="0"/>
-          </a:p>
-        </p:txBody>
-      </p:sp>
-      <p:sp>
-        <p:nvSpPr>
-          <p:cNvPr id="10" name="Shape 8"/>
-          <p:cNvSpPr/>
-          <p:nvPr/>
-        </p:nvSpPr>
-        <p:spPr>
-          <a:xfrm>
-            <a:off x="6858000" y="4709160"/>
-            <a:ext cx="2651760" cy="566928"/>
-          </a:xfrm>
-          <a:prstGeom prst="roundRect">
-            <a:avLst>
-              <a:gd name="adj" fmla="val 50000"/>
-            </a:avLst>
-          </a:prstGeom>
-          <a:solidFill>
-            <a:srgbClr val="1C3A24"/>
-          </a:solidFill>
-          <a:ln w="12700">
-            <a:solidFill>
-              <a:srgbClr val="D9A62E"/>
-            </a:solidFill>
-            <a:prstDash val="solid"/>
-          </a:ln>
-        </p:spPr>
-      </p:sp>
-      <p:sp>
-        <p:nvSpPr>
-          <p:cNvPr id="11" name="Text 9"/>
-          <p:cNvSpPr/>
-          <p:nvPr/>
-        </p:nvSpPr>
-        <p:spPr>
-          <a:xfrm>
-            <a:off x="6858000" y="4709160"/>
-            <a:ext cx="2651760" cy="566928"/>
-          </a:xfrm>
-          <a:prstGeom prst="rect">
-            <a:avLst/>
-          </a:prstGeom>
-          <a:noFill/>
-          <a:ln/>
-        </p:spPr>
-        <p:txBody>
-          <a:bodyPr wrap="square" lIns="0" tIns="0" rIns="0" bIns="0" rtlCol="0" anchor="ctr"/>
-          <a:lstStyle/>
-          <a:p>
-            <a:pPr algn="ctr" indent="0" marL="0">
-              <a:buNone/>
-            </a:pPr>
-            <a:r>
-              <a:rPr lang="en-US" sz="1350" b="1" dirty="0">
-                <a:solidFill>
-                  <a:srgbClr val="D9A62E"/>
-                </a:solidFill>
-                <a:latin typeface="Calibri" pitchFamily="34" charset="0"/>
-                <a:ea typeface="Calibri" pitchFamily="34" charset="-122"/>
-                <a:cs typeface="Calibri" pitchFamily="34" charset="-120"/>
-              </a:rPr>
-              <a:t>HVAC 18–26 °C band</a:t>
-            </a:r>
-            <a:endParaRPr lang="en-US" sz="1350" dirty="0"/>
-          </a:p>
-        </p:txBody>
-      </p:sp>
-      <p:sp>
-        <p:nvSpPr>
-          <p:cNvPr id="12" name="Text 10"/>
+              <a:t>Peak load &gt; 55 kW      ·      CO₂ &gt; 1,000 ppm      ·      HVAC 18–26 °C band</a:t>
+            </a:r>
+            <a:endParaRPr lang="en-US" sz="1550" dirty="0"/>
+          </a:p>
+        </p:txBody>
+      </p:sp>
+      <p:sp>
+        <p:nvSpPr>
+          <p:cNvPr id="7" name="Text 5"/>
           <p:cNvSpPr/>
           <p:nvPr/>
         </p:nvSpPr>
@@ -1511,17 +1347,6 @@
             <a:pPr indent="0" marL="0">
               <a:buNone/>
             </a:pPr>
-            <a:r>
-              <a:rPr lang="en-US" sz="1250" dirty="0">
-                <a:solidFill>
-                  <a:srgbClr val="5C6E58"/>
-                </a:solidFill>
-                <a:latin typeface="Calibri" pitchFamily="34" charset="0"/>
-                <a:ea typeface="Calibri" pitchFamily="34" charset="-122"/>
-                <a:cs typeface="Calibri" pitchFamily="34" charset="-120"/>
-              </a:rPr>
-              <a:t>Fog &amp; Edge Computing (H9FECC)   ·   deployed live on AWS</a:t>
-            </a:r>
             <a:endParaRPr lang="en-US" sz="1250" dirty="0"/>
           </a:p>
         </p:txBody>

--- a/ppt/VenkataSaiMothukuri_X25181238_smart-building-energy.pptx
+++ b/ppt/VenkataSaiMothukuri_X25181238_smart-building-energy.pptx
@@ -1124,7 +1124,7 @@
     <p:bg>
       <p:bgPr>
         <a:solidFill>
-          <a:srgbClr val="14301C"/>
+          <a:srgbClr val="F4FAF6"/>
         </a:solidFill>
       </p:bgPr>
     </p:bg>
@@ -1144,14 +1144,125 @@
       </p:grpSpPr>
       <p:sp>
         <p:nvSpPr>
-          <p:cNvPr id="2" name="Text 0"/>
-          <p:cNvSpPr/>
-          <p:nvPr/>
-        </p:nvSpPr>
-        <p:spPr>
-          <a:xfrm>
-            <a:off x="658368" y="777240"/>
-            <a:ext cx="10607040" cy="1280160"/>
+          <p:cNvPr id="2" name="Shape 0"/>
+          <p:cNvSpPr/>
+          <p:nvPr/>
+        </p:nvSpPr>
+        <p:spPr>
+          <a:xfrm>
+            <a:off x="777240" y="777240"/>
+            <a:ext cx="10637215" cy="0"/>
+          </a:xfrm>
+          <a:prstGeom prst="line">
+            <a:avLst/>
+          </a:prstGeom>
+          <a:noFill/>
+          <a:ln w="15875">
+            <a:solidFill>
+              <a:srgbClr val="1F7A4D"/>
+            </a:solidFill>
+            <a:prstDash val="solid"/>
+          </a:ln>
+        </p:spPr>
+      </p:sp>
+      <p:sp>
+        <p:nvSpPr>
+          <p:cNvPr id="3" name="Shape 1"/>
+          <p:cNvSpPr/>
+          <p:nvPr/>
+        </p:nvSpPr>
+        <p:spPr>
+          <a:xfrm>
+            <a:off x="777240" y="896112"/>
+            <a:ext cx="10637215" cy="0"/>
+          </a:xfrm>
+          <a:prstGeom prst="line">
+            <a:avLst/>
+          </a:prstGeom>
+          <a:noFill/>
+          <a:ln w="6350">
+            <a:solidFill>
+              <a:srgbClr val="5F6B74"/>
+            </a:solidFill>
+            <a:prstDash val="solid"/>
+          </a:ln>
+        </p:spPr>
+      </p:sp>
+      <p:sp>
+        <p:nvSpPr>
+          <p:cNvPr id="4" name="Shape 2"/>
+          <p:cNvSpPr/>
+          <p:nvPr/>
+        </p:nvSpPr>
+        <p:spPr>
+          <a:xfrm>
+            <a:off x="777240" y="6217920"/>
+            <a:ext cx="10637215" cy="0"/>
+          </a:xfrm>
+          <a:prstGeom prst="line">
+            <a:avLst/>
+          </a:prstGeom>
+          <a:noFill/>
+          <a:ln w="6350">
+            <a:solidFill>
+              <a:srgbClr val="5F6B74"/>
+            </a:solidFill>
+            <a:prstDash val="solid"/>
+          </a:ln>
+        </p:spPr>
+      </p:sp>
+      <p:sp>
+        <p:nvSpPr>
+          <p:cNvPr id="5" name="Text 3"/>
+          <p:cNvSpPr/>
+          <p:nvPr/>
+        </p:nvSpPr>
+        <p:spPr>
+          <a:xfrm>
+            <a:off x="758952" y="1737360"/>
+            <a:ext cx="10637215" cy="1645920"/>
+          </a:xfrm>
+          <a:prstGeom prst="rect">
+            <a:avLst/>
+          </a:prstGeom>
+          <a:noFill/>
+          <a:ln/>
+        </p:spPr>
+        <p:txBody>
+          <a:bodyPr wrap="square" rtlCol="0" anchor="t"/>
+          <a:lstStyle/>
+          <a:p>
+            <a:pPr indent="0" marL="0">
+              <a:lnSpc>
+                <a:spcPct val="98000"/>
+              </a:lnSpc>
+              <a:buNone/>
+            </a:pPr>
+            <a:r>
+              <a:rPr lang="en-US" sz="3800" b="1" dirty="0">
+                <a:solidFill>
+                  <a:srgbClr val="16261C"/>
+                </a:solidFill>
+                <a:latin typeface="Cambria" pitchFamily="34" charset="0"/>
+                <a:ea typeface="Cambria" pitchFamily="34" charset="-122"/>
+                <a:cs typeface="Cambria" pitchFamily="34" charset="-120"/>
+              </a:rPr>
+              <a:t>Smart Building Energy Monitoring</a:t>
+            </a:r>
+            <a:endParaRPr lang="en-US" sz="3800" dirty="0"/>
+          </a:p>
+        </p:txBody>
+      </p:sp>
+      <p:sp>
+        <p:nvSpPr>
+          <p:cNvPr id="6" name="Text 4"/>
+          <p:cNvSpPr/>
+          <p:nvPr/>
+        </p:nvSpPr>
+        <p:spPr>
+          <a:xfrm>
+            <a:off x="777240" y="3429000"/>
+            <a:ext cx="10637215" cy="365760"/>
           </a:xfrm>
           <a:prstGeom prst="rect">
             <a:avLst/>
@@ -1164,58 +1275,33 @@
           <a:lstStyle/>
           <a:p>
             <a:pPr indent="0" marL="0">
-              <a:lnSpc>
-                <a:spcPct val="108000"/>
-              </a:lnSpc>
-              <a:buNone/>
-            </a:pPr>
-            <a:r>
-              <a:rPr lang="en-US" sz="1800" dirty="0">
-                <a:solidFill>
-                  <a:srgbClr val="D2E4CC"/>
+              <a:buNone/>
+            </a:pPr>
+            <a:r>
+              <a:rPr lang="en-US" sz="1450" dirty="0">
+                <a:solidFill>
+                  <a:srgbClr val="5F6B74"/>
                 </a:solidFill>
                 <a:latin typeface="Calibri" pitchFamily="34" charset="0"/>
                 <a:ea typeface="Calibri" pitchFamily="34" charset="-122"/>
                 <a:cs typeface="Calibri" pitchFamily="34" charset="-120"/>
               </a:rPr>
-              <a:t>A building manager asks two different things at once — is anything wrong right now, and how efficiently is this floor running overall — and they are not the same question.</a:t>
-            </a:r>
-            <a:endParaRPr lang="en-US" sz="1800" dirty="0"/>
-          </a:p>
-        </p:txBody>
-      </p:sp>
-      <p:sp>
-        <p:nvSpPr>
-          <p:cNvPr id="3" name="Shape 1"/>
-          <p:cNvSpPr/>
-          <p:nvPr/>
-        </p:nvSpPr>
-        <p:spPr>
-          <a:xfrm>
-            <a:off x="1097280" y="2377440"/>
-            <a:ext cx="9966960" cy="2011680"/>
-          </a:xfrm>
-          <a:prstGeom prst="roundRect">
-            <a:avLst>
-              <a:gd name="adj" fmla="val 5455"/>
-            </a:avLst>
-          </a:prstGeom>
-          <a:solidFill>
-            <a:srgbClr val="1B5E20"/>
-          </a:solidFill>
-          <a:ln/>
-        </p:spPr>
-      </p:sp>
-      <p:sp>
-        <p:nvSpPr>
-          <p:cNvPr id="4" name="Text 2"/>
-          <p:cNvSpPr/>
-          <p:nvPr/>
-        </p:nvSpPr>
-        <p:spPr>
-          <a:xfrm>
-            <a:off x="1463040" y="2651760"/>
-            <a:ext cx="9235440" cy="1005840"/>
+              <a:t>Venkata Sai Mothukuri   ·   X25181238</a:t>
+            </a:r>
+            <a:endParaRPr lang="en-US" sz="1450" dirty="0"/>
+          </a:p>
+        </p:txBody>
+      </p:sp>
+      <p:sp>
+        <p:nvSpPr>
+          <p:cNvPr id="7" name="Text 5"/>
+          <p:cNvSpPr/>
+          <p:nvPr/>
+        </p:nvSpPr>
+        <p:spPr>
+          <a:xfrm>
+            <a:off x="777240" y="4023360"/>
+            <a:ext cx="8138160" cy="1234440"/>
           </a:xfrm>
           <a:prstGeom prst="rect">
             <a:avLst/>
@@ -1228,126 +1314,23 @@
           <a:lstStyle/>
           <a:p>
             <a:pPr indent="0" marL="0">
-              <a:buNone/>
-            </a:pPr>
-            <a:r>
-              <a:rPr lang="en-US" sz="3600" b="1" dirty="0">
-                <a:solidFill>
-                  <a:srgbClr val="FFFFFF"/>
-                </a:solidFill>
-                <a:latin typeface="Cambria" pitchFamily="34" charset="0"/>
-                <a:ea typeface="Cambria" pitchFamily="34" charset="-122"/>
-                <a:cs typeface="Cambria" pitchFamily="34" charset="-120"/>
-              </a:rPr>
-              <a:t>Smart Building Energy Monitoring</a:t>
-            </a:r>
-            <a:endParaRPr lang="en-US" sz="3600" dirty="0"/>
-          </a:p>
-        </p:txBody>
-      </p:sp>
-      <p:sp>
-        <p:nvSpPr>
-          <p:cNvPr id="5" name="Text 3"/>
-          <p:cNvSpPr/>
-          <p:nvPr/>
-        </p:nvSpPr>
-        <p:spPr>
-          <a:xfrm>
-            <a:off x="1481328" y="3703320"/>
-            <a:ext cx="9144000" cy="457200"/>
-          </a:xfrm>
-          <a:prstGeom prst="rect">
-            <a:avLst/>
-          </a:prstGeom>
-          <a:noFill/>
-          <a:ln/>
-        </p:spPr>
-        <p:txBody>
-          <a:bodyPr wrap="square" rtlCol="0" anchor="ctr"/>
-          <a:lstStyle/>
-          <a:p>
-            <a:pPr indent="0" marL="0">
-              <a:buNone/>
-            </a:pPr>
-            <a:r>
-              <a:rPr lang="en-US" sz="1500" dirty="0">
-                <a:solidFill>
-                  <a:srgbClr val="D2E4CC"/>
+              <a:lnSpc>
+                <a:spcPct val="130000"/>
+              </a:lnSpc>
+              <a:buNone/>
+            </a:pPr>
+            <a:r>
+              <a:rPr lang="en-US" sz="1400" dirty="0">
+                <a:solidFill>
+                  <a:srgbClr val="16261C"/>
                 </a:solidFill>
                 <a:latin typeface="Calibri" pitchFamily="34" charset="0"/>
                 <a:ea typeface="Calibri" pitchFamily="34" charset="-122"/>
                 <a:cs typeface="Calibri" pitchFamily="34" charset="-120"/>
               </a:rPr>
-              <a:t>Venkata Sai Mothukuri   ·   X25181238</a:t>
-            </a:r>
-            <a:endParaRPr lang="en-US" sz="1500" dirty="0"/>
-          </a:p>
-        </p:txBody>
-      </p:sp>
-      <p:sp>
-        <p:nvSpPr>
-          <p:cNvPr id="6" name="Text 4"/>
-          <p:cNvSpPr/>
-          <p:nvPr/>
-        </p:nvSpPr>
-        <p:spPr>
-          <a:xfrm>
-            <a:off x="1097280" y="4709160"/>
-            <a:ext cx="10972800" cy="457200"/>
-          </a:xfrm>
-          <a:prstGeom prst="rect">
-            <a:avLst/>
-          </a:prstGeom>
-          <a:noFill/>
-          <a:ln/>
-        </p:spPr>
-        <p:txBody>
-          <a:bodyPr wrap="square" lIns="0" tIns="0" rIns="0" bIns="0" rtlCol="0" anchor="ctr"/>
-          <a:lstStyle/>
-          <a:p>
-            <a:pPr indent="0" marL="0">
-              <a:buNone/>
-            </a:pPr>
-            <a:r>
-              <a:rPr lang="en-US" sz="1550" b="1" dirty="0">
-                <a:solidFill>
-                  <a:srgbClr val="D9A62E"/>
-                </a:solidFill>
-                <a:latin typeface="Calibri" pitchFamily="34" charset="0"/>
-                <a:ea typeface="Calibri" pitchFamily="34" charset="-122"/>
-                <a:cs typeface="Calibri" pitchFamily="34" charset="-120"/>
-              </a:rPr>
-              <a:t>Peak load &gt; 55 kW      ·      CO₂ &gt; 1,000 ppm      ·      HVAC 18–26 °C band</a:t>
-            </a:r>
-            <a:endParaRPr lang="en-US" sz="1550" dirty="0"/>
-          </a:p>
-        </p:txBody>
-      </p:sp>
-      <p:sp>
-        <p:nvSpPr>
-          <p:cNvPr id="7" name="Text 5"/>
-          <p:cNvSpPr/>
-          <p:nvPr/>
-        </p:nvSpPr>
-        <p:spPr>
-          <a:xfrm>
-            <a:off x="658368" y="6355080"/>
-            <a:ext cx="10972800" cy="320040"/>
-          </a:xfrm>
-          <a:prstGeom prst="rect">
-            <a:avLst/>
-          </a:prstGeom>
-          <a:noFill/>
-          <a:ln/>
-        </p:spPr>
-        <p:txBody>
-          <a:bodyPr wrap="square" rtlCol="0" anchor="ctr"/>
-          <a:lstStyle/>
-          <a:p>
-            <a:pPr indent="0" marL="0">
-              <a:buNone/>
-            </a:pPr>
-            <a:endParaRPr lang="en-US" sz="1250" dirty="0"/>
+              <a:t>A building manager asks two different things at once — is anything wrong right now, and how efficiently is this floor running overall — and they are not the same question.</a:t>
+            </a:r>
+            <a:endParaRPr lang="en-US" sz="1400" dirty="0"/>
           </a:p>
         </p:txBody>
       </p:sp>
@@ -1365,7 +1348,7 @@
     <p:bg>
       <p:bgPr>
         <a:solidFill>
-          <a:srgbClr val="FFFFFF"/>
+          <a:srgbClr val="F4FAF6"/>
         </a:solidFill>
       </p:bgPr>
     </p:bg>
@@ -1385,23 +1368,92 @@
       </p:grpSpPr>
       <p:sp>
         <p:nvSpPr>
-          <p:cNvPr id="2" name="Text 0"/>
-          <p:cNvSpPr/>
-          <p:nvPr/>
-        </p:nvSpPr>
-        <p:spPr>
-          <a:xfrm>
-            <a:off x="640080" y="457200"/>
-            <a:ext cx="10972800" cy="640080"/>
-          </a:xfrm>
-          <a:prstGeom prst="rect">
-            <a:avLst/>
-          </a:prstGeom>
-          <a:noFill/>
-          <a:ln/>
-        </p:spPr>
-        <p:txBody>
-          <a:bodyPr wrap="square" rtlCol="0" anchor="ctr"/>
+          <p:cNvPr id="2" name="Shape 0"/>
+          <p:cNvSpPr/>
+          <p:nvPr/>
+        </p:nvSpPr>
+        <p:spPr>
+          <a:xfrm>
+            <a:off x="777240" y="777240"/>
+            <a:ext cx="10637215" cy="0"/>
+          </a:xfrm>
+          <a:prstGeom prst="line">
+            <a:avLst/>
+          </a:prstGeom>
+          <a:noFill/>
+          <a:ln w="15875">
+            <a:solidFill>
+              <a:srgbClr val="1F7A4D"/>
+            </a:solidFill>
+            <a:prstDash val="solid"/>
+          </a:ln>
+        </p:spPr>
+      </p:sp>
+      <p:sp>
+        <p:nvSpPr>
+          <p:cNvPr id="3" name="Shape 1"/>
+          <p:cNvSpPr/>
+          <p:nvPr/>
+        </p:nvSpPr>
+        <p:spPr>
+          <a:xfrm>
+            <a:off x="777240" y="896112"/>
+            <a:ext cx="10637215" cy="0"/>
+          </a:xfrm>
+          <a:prstGeom prst="line">
+            <a:avLst/>
+          </a:prstGeom>
+          <a:noFill/>
+          <a:ln w="6350">
+            <a:solidFill>
+              <a:srgbClr val="5F6B74"/>
+            </a:solidFill>
+            <a:prstDash val="solid"/>
+          </a:ln>
+        </p:spPr>
+      </p:sp>
+      <p:sp>
+        <p:nvSpPr>
+          <p:cNvPr id="4" name="Shape 2"/>
+          <p:cNvSpPr/>
+          <p:nvPr/>
+        </p:nvSpPr>
+        <p:spPr>
+          <a:xfrm>
+            <a:off x="777240" y="6217920"/>
+            <a:ext cx="10637215" cy="0"/>
+          </a:xfrm>
+          <a:prstGeom prst="line">
+            <a:avLst/>
+          </a:prstGeom>
+          <a:noFill/>
+          <a:ln w="6350">
+            <a:solidFill>
+              <a:srgbClr val="5F6B74"/>
+            </a:solidFill>
+            <a:prstDash val="solid"/>
+          </a:ln>
+        </p:spPr>
+      </p:sp>
+      <p:sp>
+        <p:nvSpPr>
+          <p:cNvPr id="5" name="Text 3"/>
+          <p:cNvSpPr/>
+          <p:nvPr/>
+        </p:nvSpPr>
+        <p:spPr>
+          <a:xfrm>
+            <a:off x="777240" y="1051560"/>
+            <a:ext cx="914400" cy="640080"/>
+          </a:xfrm>
+          <a:prstGeom prst="rect">
+            <a:avLst/>
+          </a:prstGeom>
+          <a:noFill/>
+          <a:ln/>
+        </p:spPr>
+        <p:txBody>
+          <a:bodyPr wrap="square" lIns="0" tIns="0" rIns="0" bIns="0" rtlCol="0" anchor="ctr"/>
           <a:lstStyle/>
           <a:p>
             <a:pPr indent="0" marL="0">
@@ -1410,40 +1462,118 @@
             <a:r>
               <a:rPr lang="en-US" sz="3000" b="1" dirty="0">
                 <a:solidFill>
-                  <a:srgbClr val="153020"/>
+                  <a:srgbClr val="1F7A4D"/>
                 </a:solidFill>
                 <a:latin typeface="Cambria" pitchFamily="34" charset="0"/>
                 <a:ea typeface="Cambria" pitchFamily="34" charset="-122"/>
                 <a:cs typeface="Cambria" pitchFamily="34" charset="-120"/>
               </a:rPr>
+              <a:t>01</a:t>
+            </a:r>
+            <a:endParaRPr lang="en-US" sz="3000" dirty="0"/>
+          </a:p>
+        </p:txBody>
+      </p:sp>
+      <p:sp>
+        <p:nvSpPr>
+          <p:cNvPr id="6" name="Text 4"/>
+          <p:cNvSpPr/>
+          <p:nvPr/>
+        </p:nvSpPr>
+        <p:spPr>
+          <a:xfrm>
+            <a:off x="1645920" y="1225296"/>
+            <a:ext cx="9768535" cy="274320"/>
+          </a:xfrm>
+          <a:prstGeom prst="rect">
+            <a:avLst/>
+          </a:prstGeom>
+          <a:noFill/>
+          <a:ln/>
+        </p:spPr>
+        <p:txBody>
+          <a:bodyPr wrap="square" lIns="0" tIns="0" rIns="0" bIns="0" rtlCol="0" anchor="ctr"/>
+          <a:lstStyle/>
+          <a:p>
+            <a:pPr indent="0" marL="0">
+              <a:buNone/>
+            </a:pPr>
+            <a:r>
+              <a:rPr lang="en-US" sz="1100" b="1" spc="200" kern="0" dirty="0">
+                <a:solidFill>
+                  <a:srgbClr val="5F6B74"/>
+                </a:solidFill>
+                <a:latin typeface="Calibri" pitchFamily="34" charset="0"/>
+                <a:ea typeface="Calibri" pitchFamily="34" charset="-122"/>
+                <a:cs typeface="Calibri" pitchFamily="34" charset="-120"/>
+              </a:rPr>
+              <a:t>ARCHITECTURE</a:t>
+            </a:r>
+            <a:endParaRPr lang="en-US" sz="1100" dirty="0"/>
+          </a:p>
+        </p:txBody>
+      </p:sp>
+      <p:sp>
+        <p:nvSpPr>
+          <p:cNvPr id="7" name="Text 5"/>
+          <p:cNvSpPr/>
+          <p:nvPr/>
+        </p:nvSpPr>
+        <p:spPr>
+          <a:xfrm>
+            <a:off x="777240" y="1700784"/>
+            <a:ext cx="10637215" cy="640080"/>
+          </a:xfrm>
+          <a:prstGeom prst="rect">
+            <a:avLst/>
+          </a:prstGeom>
+          <a:noFill/>
+          <a:ln/>
+        </p:spPr>
+        <p:txBody>
+          <a:bodyPr wrap="square" lIns="0" tIns="0" rIns="0" bIns="0" rtlCol="0" anchor="ctr"/>
+          <a:lstStyle/>
+          <a:p>
+            <a:pPr indent="0" marL="0">
+              <a:buNone/>
+            </a:pPr>
+            <a:r>
+              <a:rPr lang="en-US" sz="2300" b="1" dirty="0">
+                <a:solidFill>
+                  <a:srgbClr val="16261C"/>
+                </a:solidFill>
+                <a:latin typeface="Cambria" pitchFamily="34" charset="0"/>
+                <a:ea typeface="Cambria" pitchFamily="34" charset="-122"/>
+                <a:cs typeface="Cambria" pitchFamily="34" charset="-120"/>
+              </a:rPr>
               <a:t>What I Built — Meter to Scorecard</a:t>
             </a:r>
-            <a:endParaRPr lang="en-US" sz="3000" dirty="0"/>
-          </a:p>
-        </p:txBody>
-      </p:sp>
-      <p:sp>
-        <p:nvSpPr>
-          <p:cNvPr id="3" name="Shape 1"/>
-          <p:cNvSpPr/>
-          <p:nvPr/>
-        </p:nvSpPr>
-        <p:spPr>
-          <a:xfrm>
-            <a:off x="640080" y="1874520"/>
-            <a:ext cx="2286000" cy="1280160"/>
+            <a:endParaRPr lang="en-US" sz="2300" dirty="0"/>
+          </a:p>
+        </p:txBody>
+      </p:sp>
+      <p:sp>
+        <p:nvSpPr>
+          <p:cNvPr id="8" name="Shape 6"/>
+          <p:cNvSpPr/>
+          <p:nvPr/>
+        </p:nvSpPr>
+        <p:spPr>
+          <a:xfrm>
+            <a:off x="777240" y="3291840"/>
+            <a:ext cx="1391869" cy="1965960"/>
           </a:xfrm>
           <a:prstGeom prst="roundRect">
             <a:avLst>
-              <a:gd name="adj" fmla="val 7143"/>
+              <a:gd name="adj" fmla="val 2628"/>
             </a:avLst>
           </a:prstGeom>
           <a:solidFill>
-            <a:srgbClr val="EEF4EC"/>
+            <a:srgbClr val="1F7A4D"/>
           </a:solidFill>
-          <a:ln w="19050">
+          <a:ln w="12700">
             <a:solidFill>
-              <a:srgbClr val="6A9A52"/>
+              <a:srgbClr val="1F7A4D"/>
             </a:solidFill>
             <a:prstDash val="solid"/>
           </a:ln>
@@ -1451,34 +1581,14 @@
       </p:sp>
       <p:sp>
         <p:nvSpPr>
-          <p:cNvPr id="4" name="Shape 2"/>
-          <p:cNvSpPr/>
-          <p:nvPr/>
-        </p:nvSpPr>
-        <p:spPr>
-          <a:xfrm>
-            <a:off x="1691640" y="2039112"/>
-            <a:ext cx="182880" cy="182880"/>
-          </a:xfrm>
-          <a:prstGeom prst="ellipse">
-            <a:avLst/>
-          </a:prstGeom>
-          <a:solidFill>
-            <a:srgbClr val="6A9A52"/>
-          </a:solidFill>
-          <a:ln/>
-        </p:spPr>
-      </p:sp>
-      <p:sp>
-        <p:nvSpPr>
-          <p:cNvPr id="5" name="Text 3"/>
-          <p:cNvSpPr/>
-          <p:nvPr/>
-        </p:nvSpPr>
-        <p:spPr>
-          <a:xfrm>
-            <a:off x="612648" y="2258568"/>
-            <a:ext cx="2340864" cy="365760"/>
+          <p:cNvPr id="9" name="Text 7"/>
+          <p:cNvSpPr/>
+          <p:nvPr/>
+        </p:nvSpPr>
+        <p:spPr>
+          <a:xfrm>
+            <a:off x="923544" y="3474720"/>
+            <a:ext cx="1099261" cy="320040"/>
           </a:xfrm>
           <a:prstGeom prst="rect">
             <a:avLst/>
@@ -1490,34 +1600,201 @@
           <a:bodyPr wrap="square" lIns="0" tIns="0" rIns="0" bIns="0" rtlCol="0" anchor="ctr"/>
           <a:lstStyle/>
           <a:p>
-            <a:pPr algn="ctr" indent="0" marL="0">
-              <a:buNone/>
-            </a:pPr>
-            <a:r>
-              <a:rPr lang="en-US" sz="1450" b="1" dirty="0">
-                <a:solidFill>
-                  <a:srgbClr val="153020"/>
+            <a:pPr indent="0" marL="0">
+              <a:buNone/>
+            </a:pPr>
+            <a:r>
+              <a:rPr lang="en-US" sz="1100" dirty="0">
+                <a:solidFill>
+                  <a:srgbClr val="FFFFFF"/>
+                </a:solidFill>
+                <a:latin typeface="Consolas" pitchFamily="34" charset="0"/>
+                <a:ea typeface="Consolas" pitchFamily="34" charset="-122"/>
+                <a:cs typeface="Consolas" pitchFamily="34" charset="-120"/>
+              </a:rPr>
+              <a:t>01</a:t>
+            </a:r>
+            <a:endParaRPr lang="en-US" sz="1100" dirty="0"/>
+          </a:p>
+        </p:txBody>
+      </p:sp>
+      <p:sp>
+        <p:nvSpPr>
+          <p:cNvPr id="10" name="Text 8"/>
+          <p:cNvSpPr/>
+          <p:nvPr/>
+        </p:nvSpPr>
+        <p:spPr>
+          <a:xfrm>
+            <a:off x="923544" y="3913632"/>
+            <a:ext cx="1099261" cy="868680"/>
+          </a:xfrm>
+          <a:prstGeom prst="rect">
+            <a:avLst/>
+          </a:prstGeom>
+          <a:noFill/>
+          <a:ln/>
+        </p:spPr>
+        <p:txBody>
+          <a:bodyPr wrap="square" lIns="0" tIns="0" rIns="0" bIns="0" rtlCol="0" anchor="t"/>
+          <a:lstStyle/>
+          <a:p>
+            <a:pPr indent="0" marL="0">
+              <a:lnSpc>
+                <a:spcPct val="96000"/>
+              </a:lnSpc>
+              <a:buNone/>
+            </a:pPr>
+            <a:r>
+              <a:rPr lang="en-US" sz="1300" b="1" dirty="0">
+                <a:solidFill>
+                  <a:srgbClr val="FFFFFF"/>
+                </a:solidFill>
+                <a:latin typeface="Cambria" pitchFamily="34" charset="0"/>
+                <a:ea typeface="Cambria" pitchFamily="34" charset="-122"/>
+                <a:cs typeface="Cambria" pitchFamily="34" charset="-120"/>
+              </a:rPr>
+              <a:t>Floor sensors</a:t>
+            </a:r>
+            <a:endParaRPr lang="en-US" sz="1300" dirty="0"/>
+          </a:p>
+        </p:txBody>
+      </p:sp>
+      <p:sp>
+        <p:nvSpPr>
+          <p:cNvPr id="11" name="Text 9"/>
+          <p:cNvSpPr/>
+          <p:nvPr/>
+        </p:nvSpPr>
+        <p:spPr>
+          <a:xfrm>
+            <a:off x="923544" y="4773168"/>
+            <a:ext cx="1099261" cy="365760"/>
+          </a:xfrm>
+          <a:prstGeom prst="rect">
+            <a:avLst/>
+          </a:prstGeom>
+          <a:noFill/>
+          <a:ln/>
+        </p:spPr>
+        <p:txBody>
+          <a:bodyPr wrap="square" lIns="0" tIns="0" rIns="0" bIns="0" rtlCol="0" anchor="ctr"/>
+          <a:lstStyle/>
+          <a:p>
+            <a:pPr indent="0" marL="0">
+              <a:buNone/>
+            </a:pPr>
+            <a:r>
+              <a:rPr lang="en-US" sz="900" dirty="0">
+                <a:solidFill>
+                  <a:srgbClr val="FFFFFF"/>
                 </a:solidFill>
                 <a:latin typeface="Calibri" pitchFamily="34" charset="0"/>
                 <a:ea typeface="Calibri" pitchFamily="34" charset="-122"/>
                 <a:cs typeface="Calibri" pitchFamily="34" charset="-120"/>
               </a:rPr>
-              <a:t>Floor sensors</a:t>
-            </a:r>
-            <a:endParaRPr lang="en-US" sz="1450" dirty="0"/>
-          </a:p>
-        </p:txBody>
-      </p:sp>
-      <p:sp>
-        <p:nvSpPr>
-          <p:cNvPr id="6" name="Text 4"/>
-          <p:cNvSpPr/>
-          <p:nvPr/>
-        </p:nvSpPr>
-        <p:spPr>
-          <a:xfrm>
-            <a:off x="640080" y="2606040"/>
-            <a:ext cx="2286000" cy="411480"/>
+              <a:t>10 · 2 floors</a:t>
+            </a:r>
+            <a:endParaRPr lang="en-US" sz="900" dirty="0"/>
+          </a:p>
+        </p:txBody>
+      </p:sp>
+      <p:sp>
+        <p:nvSpPr>
+          <p:cNvPr id="12" name="Shape 10"/>
+          <p:cNvSpPr/>
+          <p:nvPr/>
+        </p:nvSpPr>
+        <p:spPr>
+          <a:xfrm>
+            <a:off x="2242261" y="4165092"/>
+            <a:ext cx="310896" cy="219456"/>
+          </a:xfrm>
+          <a:prstGeom prst="rightArrow">
+            <a:avLst/>
+          </a:prstGeom>
+          <a:solidFill>
+            <a:srgbClr val="5F6B74"/>
+          </a:solidFill>
+          <a:ln/>
+        </p:spPr>
+      </p:sp>
+      <p:sp>
+        <p:nvSpPr>
+          <p:cNvPr id="13" name="Shape 11"/>
+          <p:cNvSpPr/>
+          <p:nvPr/>
+        </p:nvSpPr>
+        <p:spPr>
+          <a:xfrm>
+            <a:off x="2626309" y="3291840"/>
+            <a:ext cx="1391869" cy="1965960"/>
+          </a:xfrm>
+          <a:prstGeom prst="roundRect">
+            <a:avLst>
+              <a:gd name="adj" fmla="val 2628"/>
+            </a:avLst>
+          </a:prstGeom>
+          <a:solidFill>
+            <a:srgbClr val="1F7A4D"/>
+          </a:solidFill>
+          <a:ln w="12700">
+            <a:solidFill>
+              <a:srgbClr val="1F7A4D"/>
+            </a:solidFill>
+            <a:prstDash val="solid"/>
+          </a:ln>
+        </p:spPr>
+      </p:sp>
+      <p:sp>
+        <p:nvSpPr>
+          <p:cNvPr id="14" name="Text 12"/>
+          <p:cNvSpPr/>
+          <p:nvPr/>
+        </p:nvSpPr>
+        <p:spPr>
+          <a:xfrm>
+            <a:off x="2772613" y="3474720"/>
+            <a:ext cx="1099261" cy="320040"/>
+          </a:xfrm>
+          <a:prstGeom prst="rect">
+            <a:avLst/>
+          </a:prstGeom>
+          <a:noFill/>
+          <a:ln/>
+        </p:spPr>
+        <p:txBody>
+          <a:bodyPr wrap="square" lIns="0" tIns="0" rIns="0" bIns="0" rtlCol="0" anchor="ctr"/>
+          <a:lstStyle/>
+          <a:p>
+            <a:pPr indent="0" marL="0">
+              <a:buNone/>
+            </a:pPr>
+            <a:r>
+              <a:rPr lang="en-US" sz="1100" dirty="0">
+                <a:solidFill>
+                  <a:srgbClr val="FFFFFF"/>
+                </a:solidFill>
+                <a:latin typeface="Consolas" pitchFamily="34" charset="0"/>
+                <a:ea typeface="Consolas" pitchFamily="34" charset="-122"/>
+                <a:cs typeface="Consolas" pitchFamily="34" charset="-120"/>
+              </a:rPr>
+              <a:t>02</a:t>
+            </a:r>
+            <a:endParaRPr lang="en-US" sz="1100" dirty="0"/>
+          </a:p>
+        </p:txBody>
+      </p:sp>
+      <p:sp>
+        <p:nvSpPr>
+          <p:cNvPr id="15" name="Text 13"/>
+          <p:cNvSpPr/>
+          <p:nvPr/>
+        </p:nvSpPr>
+        <p:spPr>
+          <a:xfrm>
+            <a:off x="2772613" y="3913632"/>
+            <a:ext cx="1099261" cy="868680"/>
           </a:xfrm>
           <a:prstGeom prst="rect">
             <a:avLst/>
@@ -1529,71 +1806,108 @@
           <a:bodyPr wrap="square" lIns="0" tIns="0" rIns="0" bIns="0" rtlCol="0" anchor="t"/>
           <a:lstStyle/>
           <a:p>
-            <a:pPr algn="ctr" indent="0" marL="0">
-              <a:buNone/>
-            </a:pPr>
-            <a:r>
-              <a:rPr lang="en-US" sz="1050" dirty="0">
-                <a:solidFill>
-                  <a:srgbClr val="5C6E58"/>
+            <a:pPr indent="0" marL="0">
+              <a:lnSpc>
+                <a:spcPct val="96000"/>
+              </a:lnSpc>
+              <a:buNone/>
+            </a:pPr>
+            <a:r>
+              <a:rPr lang="en-US" sz="1300" b="1" dirty="0">
+                <a:solidFill>
+                  <a:srgbClr val="FFFFFF"/>
+                </a:solidFill>
+                <a:latin typeface="Cambria" pitchFamily="34" charset="0"/>
+                <a:ea typeface="Cambria" pitchFamily="34" charset="-122"/>
+                <a:cs typeface="Cambria" pitchFamily="34" charset="-120"/>
+              </a:rPr>
+              <a:t>Fog node</a:t>
+            </a:r>
+            <a:endParaRPr lang="en-US" sz="1300" dirty="0"/>
+          </a:p>
+        </p:txBody>
+      </p:sp>
+      <p:sp>
+        <p:nvSpPr>
+          <p:cNvPr id="16" name="Text 14"/>
+          <p:cNvSpPr/>
+          <p:nvPr/>
+        </p:nvSpPr>
+        <p:spPr>
+          <a:xfrm>
+            <a:off x="2772613" y="4773168"/>
+            <a:ext cx="1099261" cy="365760"/>
+          </a:xfrm>
+          <a:prstGeom prst="rect">
+            <a:avLst/>
+          </a:prstGeom>
+          <a:noFill/>
+          <a:ln/>
+        </p:spPr>
+        <p:txBody>
+          <a:bodyPr wrap="square" lIns="0" tIns="0" rIns="0" bIns="0" rtlCol="0" anchor="ctr"/>
+          <a:lstStyle/>
+          <a:p>
+            <a:pPr indent="0" marL="0">
+              <a:buNone/>
+            </a:pPr>
+            <a:r>
+              <a:rPr lang="en-US" sz="900" dirty="0">
+                <a:solidFill>
+                  <a:srgbClr val="FFFFFF"/>
                 </a:solidFill>
                 <a:latin typeface="Calibri" pitchFamily="34" charset="0"/>
                 <a:ea typeface="Calibri" pitchFamily="34" charset="-122"/>
                 <a:cs typeface="Calibri" pitchFamily="34" charset="-120"/>
               </a:rPr>
-              <a:t>10 · 2 floors</a:t>
-            </a:r>
-            <a:endParaRPr lang="en-US" sz="1050" dirty="0"/>
-          </a:p>
-        </p:txBody>
-      </p:sp>
-      <p:sp>
-        <p:nvSpPr>
-          <p:cNvPr id="7" name="Shape 5"/>
-          <p:cNvSpPr/>
-          <p:nvPr/>
-        </p:nvSpPr>
-        <p:spPr>
-          <a:xfrm>
-            <a:off x="2944368" y="2514600"/>
-            <a:ext cx="1975104" cy="0"/>
-          </a:xfrm>
-          <a:prstGeom prst="line">
-            <a:avLst/>
-          </a:prstGeom>
-          <a:noFill/>
-          <a:ln w="25400">
-            <a:solidFill>
-              <a:srgbClr val="6A9A52"/>
-            </a:solidFill>
-            <a:prstDash val="solid"/>
-            <a:headEnd type="none"/>
-            <a:tailEnd type="triangle"/>
-          </a:ln>
-        </p:spPr>
-      </p:sp>
-      <p:sp>
-        <p:nvSpPr>
-          <p:cNvPr id="8" name="Shape 6"/>
-          <p:cNvSpPr/>
-          <p:nvPr/>
-        </p:nvSpPr>
-        <p:spPr>
-          <a:xfrm>
-            <a:off x="4937760" y="1874520"/>
-            <a:ext cx="2286000" cy="1280160"/>
+              <a:t>one consumer thread</a:t>
+            </a:r>
+            <a:endParaRPr lang="en-US" sz="900" dirty="0"/>
+          </a:p>
+        </p:txBody>
+      </p:sp>
+      <p:sp>
+        <p:nvSpPr>
+          <p:cNvPr id="17" name="Shape 15"/>
+          <p:cNvSpPr/>
+          <p:nvPr/>
+        </p:nvSpPr>
+        <p:spPr>
+          <a:xfrm>
+            <a:off x="4091330" y="4165092"/>
+            <a:ext cx="310896" cy="219456"/>
+          </a:xfrm>
+          <a:prstGeom prst="rightArrow">
+            <a:avLst/>
+          </a:prstGeom>
+          <a:solidFill>
+            <a:srgbClr val="5F6B74"/>
+          </a:solidFill>
+          <a:ln/>
+        </p:spPr>
+      </p:sp>
+      <p:sp>
+        <p:nvSpPr>
+          <p:cNvPr id="18" name="Shape 16"/>
+          <p:cNvSpPr/>
+          <p:nvPr/>
+        </p:nvSpPr>
+        <p:spPr>
+          <a:xfrm>
+            <a:off x="4475378" y="3291840"/>
+            <a:ext cx="1391869" cy="1965960"/>
           </a:xfrm>
           <a:prstGeom prst="roundRect">
             <a:avLst>
-              <a:gd name="adj" fmla="val 7143"/>
+              <a:gd name="adj" fmla="val 2628"/>
             </a:avLst>
           </a:prstGeom>
           <a:solidFill>
-            <a:srgbClr val="EEF4EC"/>
+            <a:srgbClr val="FFFFFF"/>
           </a:solidFill>
-          <a:ln w="19050">
+          <a:ln w="12700">
             <a:solidFill>
-              <a:srgbClr val="6A9A52"/>
+              <a:srgbClr val="E4E6E9"/>
             </a:solidFill>
             <a:prstDash val="solid"/>
           </a:ln>
@@ -1601,34 +1915,14 @@
       </p:sp>
       <p:sp>
         <p:nvSpPr>
-          <p:cNvPr id="9" name="Shape 7"/>
-          <p:cNvSpPr/>
-          <p:nvPr/>
-        </p:nvSpPr>
-        <p:spPr>
-          <a:xfrm>
-            <a:off x="5989320" y="2039112"/>
-            <a:ext cx="182880" cy="182880"/>
-          </a:xfrm>
-          <a:prstGeom prst="ellipse">
-            <a:avLst/>
-          </a:prstGeom>
-          <a:solidFill>
-            <a:srgbClr val="6A9A52"/>
-          </a:solidFill>
-          <a:ln/>
-        </p:spPr>
-      </p:sp>
-      <p:sp>
-        <p:nvSpPr>
-          <p:cNvPr id="10" name="Text 8"/>
-          <p:cNvSpPr/>
-          <p:nvPr/>
-        </p:nvSpPr>
-        <p:spPr>
-          <a:xfrm>
-            <a:off x="4910328" y="2258568"/>
-            <a:ext cx="2340864" cy="365760"/>
+          <p:cNvPr id="19" name="Text 17"/>
+          <p:cNvSpPr/>
+          <p:nvPr/>
+        </p:nvSpPr>
+        <p:spPr>
+          <a:xfrm>
+            <a:off x="4621682" y="3474720"/>
+            <a:ext cx="1099261" cy="320040"/>
           </a:xfrm>
           <a:prstGeom prst="rect">
             <a:avLst/>
@@ -1640,34 +1934,201 @@
           <a:bodyPr wrap="square" lIns="0" tIns="0" rIns="0" bIns="0" rtlCol="0" anchor="ctr"/>
           <a:lstStyle/>
           <a:p>
-            <a:pPr algn="ctr" indent="0" marL="0">
-              <a:buNone/>
-            </a:pPr>
-            <a:r>
-              <a:rPr lang="en-US" sz="1450" b="1" dirty="0">
-                <a:solidFill>
-                  <a:srgbClr val="153020"/>
+            <a:pPr indent="0" marL="0">
+              <a:buNone/>
+            </a:pPr>
+            <a:r>
+              <a:rPr lang="en-US" sz="1100" dirty="0">
+                <a:solidFill>
+                  <a:srgbClr val="1F7A4D"/>
+                </a:solidFill>
+                <a:latin typeface="Consolas" pitchFamily="34" charset="0"/>
+                <a:ea typeface="Consolas" pitchFamily="34" charset="-122"/>
+                <a:cs typeface="Consolas" pitchFamily="34" charset="-120"/>
+              </a:rPr>
+              <a:t>03</a:t>
+            </a:r>
+            <a:endParaRPr lang="en-US" sz="1100" dirty="0"/>
+          </a:p>
+        </p:txBody>
+      </p:sp>
+      <p:sp>
+        <p:nvSpPr>
+          <p:cNvPr id="20" name="Text 18"/>
+          <p:cNvSpPr/>
+          <p:nvPr/>
+        </p:nvSpPr>
+        <p:spPr>
+          <a:xfrm>
+            <a:off x="4621682" y="3913632"/>
+            <a:ext cx="1099261" cy="868680"/>
+          </a:xfrm>
+          <a:prstGeom prst="rect">
+            <a:avLst/>
+          </a:prstGeom>
+          <a:noFill/>
+          <a:ln/>
+        </p:spPr>
+        <p:txBody>
+          <a:bodyPr wrap="square" lIns="0" tIns="0" rIns="0" bIns="0" rtlCol="0" anchor="t"/>
+          <a:lstStyle/>
+          <a:p>
+            <a:pPr indent="0" marL="0">
+              <a:lnSpc>
+                <a:spcPct val="96000"/>
+              </a:lnSpc>
+              <a:buNone/>
+            </a:pPr>
+            <a:r>
+              <a:rPr lang="en-US" sz="1300" b="1" dirty="0">
+                <a:solidFill>
+                  <a:srgbClr val="16261C"/>
+                </a:solidFill>
+                <a:latin typeface="Cambria" pitchFamily="34" charset="0"/>
+                <a:ea typeface="Cambria" pitchFamily="34" charset="-122"/>
+                <a:cs typeface="Cambria" pitchFamily="34" charset="-120"/>
+              </a:rPr>
+              <a:t>Amazon SQS</a:t>
+            </a:r>
+            <a:endParaRPr lang="en-US" sz="1300" dirty="0"/>
+          </a:p>
+        </p:txBody>
+      </p:sp>
+      <p:sp>
+        <p:nvSpPr>
+          <p:cNvPr id="21" name="Text 19"/>
+          <p:cNvSpPr/>
+          <p:nvPr/>
+        </p:nvSpPr>
+        <p:spPr>
+          <a:xfrm>
+            <a:off x="4621682" y="4773168"/>
+            <a:ext cx="1099261" cy="365760"/>
+          </a:xfrm>
+          <a:prstGeom prst="rect">
+            <a:avLst/>
+          </a:prstGeom>
+          <a:noFill/>
+          <a:ln/>
+        </p:spPr>
+        <p:txBody>
+          <a:bodyPr wrap="square" lIns="0" tIns="0" rIns="0" bIns="0" rtlCol="0" anchor="ctr"/>
+          <a:lstStyle/>
+          <a:p>
+            <a:pPr indent="0" marL="0">
+              <a:buNone/>
+            </a:pPr>
+            <a:r>
+              <a:rPr lang="en-US" sz="900" dirty="0">
+                <a:solidFill>
+                  <a:srgbClr val="5F6B74"/>
                 </a:solidFill>
                 <a:latin typeface="Calibri" pitchFamily="34" charset="0"/>
                 <a:ea typeface="Calibri" pitchFamily="34" charset="-122"/>
                 <a:cs typeface="Calibri" pitchFamily="34" charset="-120"/>
               </a:rPr>
-              <a:t>Fog node</a:t>
-            </a:r>
-            <a:endParaRPr lang="en-US" sz="1450" dirty="0"/>
-          </a:p>
-        </p:txBody>
-      </p:sp>
-      <p:sp>
-        <p:nvSpPr>
-          <p:cNvPr id="11" name="Text 9"/>
-          <p:cNvSpPr/>
-          <p:nvPr/>
-        </p:nvSpPr>
-        <p:spPr>
-          <a:xfrm>
-            <a:off x="4937760" y="2606040"/>
-            <a:ext cx="2286000" cy="411480"/>
+              <a:t>aggregate queue</a:t>
+            </a:r>
+            <a:endParaRPr lang="en-US" sz="900" dirty="0"/>
+          </a:p>
+        </p:txBody>
+      </p:sp>
+      <p:sp>
+        <p:nvSpPr>
+          <p:cNvPr id="22" name="Shape 20"/>
+          <p:cNvSpPr/>
+          <p:nvPr/>
+        </p:nvSpPr>
+        <p:spPr>
+          <a:xfrm>
+            <a:off x="5940400" y="4165092"/>
+            <a:ext cx="310896" cy="219456"/>
+          </a:xfrm>
+          <a:prstGeom prst="rightArrow">
+            <a:avLst/>
+          </a:prstGeom>
+          <a:solidFill>
+            <a:srgbClr val="5F6B74"/>
+          </a:solidFill>
+          <a:ln/>
+        </p:spPr>
+      </p:sp>
+      <p:sp>
+        <p:nvSpPr>
+          <p:cNvPr id="23" name="Shape 21"/>
+          <p:cNvSpPr/>
+          <p:nvPr/>
+        </p:nvSpPr>
+        <p:spPr>
+          <a:xfrm>
+            <a:off x="6324448" y="3291840"/>
+            <a:ext cx="1391869" cy="1965960"/>
+          </a:xfrm>
+          <a:prstGeom prst="roundRect">
+            <a:avLst>
+              <a:gd name="adj" fmla="val 2628"/>
+            </a:avLst>
+          </a:prstGeom>
+          <a:solidFill>
+            <a:srgbClr val="FFFFFF"/>
+          </a:solidFill>
+          <a:ln w="12700">
+            <a:solidFill>
+              <a:srgbClr val="E4E6E9"/>
+            </a:solidFill>
+            <a:prstDash val="solid"/>
+          </a:ln>
+        </p:spPr>
+      </p:sp>
+      <p:sp>
+        <p:nvSpPr>
+          <p:cNvPr id="24" name="Text 22"/>
+          <p:cNvSpPr/>
+          <p:nvPr/>
+        </p:nvSpPr>
+        <p:spPr>
+          <a:xfrm>
+            <a:off x="6470752" y="3474720"/>
+            <a:ext cx="1099261" cy="320040"/>
+          </a:xfrm>
+          <a:prstGeom prst="rect">
+            <a:avLst/>
+          </a:prstGeom>
+          <a:noFill/>
+          <a:ln/>
+        </p:spPr>
+        <p:txBody>
+          <a:bodyPr wrap="square" lIns="0" tIns="0" rIns="0" bIns="0" rtlCol="0" anchor="ctr"/>
+          <a:lstStyle/>
+          <a:p>
+            <a:pPr indent="0" marL="0">
+              <a:buNone/>
+            </a:pPr>
+            <a:r>
+              <a:rPr lang="en-US" sz="1100" dirty="0">
+                <a:solidFill>
+                  <a:srgbClr val="1F7A4D"/>
+                </a:solidFill>
+                <a:latin typeface="Consolas" pitchFamily="34" charset="0"/>
+                <a:ea typeface="Consolas" pitchFamily="34" charset="-122"/>
+                <a:cs typeface="Consolas" pitchFamily="34" charset="-120"/>
+              </a:rPr>
+              <a:t>04</a:t>
+            </a:r>
+            <a:endParaRPr lang="en-US" sz="1100" dirty="0"/>
+          </a:p>
+        </p:txBody>
+      </p:sp>
+      <p:sp>
+        <p:nvSpPr>
+          <p:cNvPr id="25" name="Text 23"/>
+          <p:cNvSpPr/>
+          <p:nvPr/>
+        </p:nvSpPr>
+        <p:spPr>
+          <a:xfrm>
+            <a:off x="6470752" y="3913632"/>
+            <a:ext cx="1099261" cy="868680"/>
           </a:xfrm>
           <a:prstGeom prst="rect">
             <a:avLst/>
@@ -1679,71 +2140,108 @@
           <a:bodyPr wrap="square" lIns="0" tIns="0" rIns="0" bIns="0" rtlCol="0" anchor="t"/>
           <a:lstStyle/>
           <a:p>
-            <a:pPr algn="ctr" indent="0" marL="0">
-              <a:buNone/>
-            </a:pPr>
-            <a:r>
-              <a:rPr lang="en-US" sz="1050" dirty="0">
-                <a:solidFill>
-                  <a:srgbClr val="5C6E58"/>
+            <a:pPr indent="0" marL="0">
+              <a:lnSpc>
+                <a:spcPct val="96000"/>
+              </a:lnSpc>
+              <a:buNone/>
+            </a:pPr>
+            <a:r>
+              <a:rPr lang="en-US" sz="1300" b="1" dirty="0">
+                <a:solidFill>
+                  <a:srgbClr val="16261C"/>
+                </a:solidFill>
+                <a:latin typeface="Cambria" pitchFamily="34" charset="0"/>
+                <a:ea typeface="Cambria" pitchFamily="34" charset="-122"/>
+                <a:cs typeface="Cambria" pitchFamily="34" charset="-120"/>
+              </a:rPr>
+              <a:t>AWS Lambda</a:t>
+            </a:r>
+            <a:endParaRPr lang="en-US" sz="1300" dirty="0"/>
+          </a:p>
+        </p:txBody>
+      </p:sp>
+      <p:sp>
+        <p:nvSpPr>
+          <p:cNvPr id="26" name="Text 24"/>
+          <p:cNvSpPr/>
+          <p:nvPr/>
+        </p:nvSpPr>
+        <p:spPr>
+          <a:xfrm>
+            <a:off x="6470752" y="4773168"/>
+            <a:ext cx="1099261" cy="365760"/>
+          </a:xfrm>
+          <a:prstGeom prst="rect">
+            <a:avLst/>
+          </a:prstGeom>
+          <a:noFill/>
+          <a:ln/>
+        </p:spPr>
+        <p:txBody>
+          <a:bodyPr wrap="square" lIns="0" tIns="0" rIns="0" bIns="0" rtlCol="0" anchor="ctr"/>
+          <a:lstStyle/>
+          <a:p>
+            <a:pPr indent="0" marL="0">
+              <a:buNone/>
+            </a:pPr>
+            <a:r>
+              <a:rPr lang="en-US" sz="900" dirty="0">
+                <a:solidFill>
+                  <a:srgbClr val="5F6B74"/>
                 </a:solidFill>
                 <a:latin typeface="Calibri" pitchFamily="34" charset="0"/>
                 <a:ea typeface="Calibri" pitchFamily="34" charset="-122"/>
                 <a:cs typeface="Calibri" pitchFamily="34" charset="-120"/>
               </a:rPr>
-              <a:t>one consumer thread</a:t>
-            </a:r>
-            <a:endParaRPr lang="en-US" sz="1050" dirty="0"/>
-          </a:p>
-        </p:txBody>
-      </p:sp>
-      <p:sp>
-        <p:nvSpPr>
-          <p:cNvPr id="12" name="Shape 10"/>
-          <p:cNvSpPr/>
-          <p:nvPr/>
-        </p:nvSpPr>
-        <p:spPr>
-          <a:xfrm>
-            <a:off x="7242048" y="2514600"/>
-            <a:ext cx="1975104" cy="0"/>
-          </a:xfrm>
-          <a:prstGeom prst="line">
-            <a:avLst/>
-          </a:prstGeom>
-          <a:noFill/>
-          <a:ln w="25400">
-            <a:solidFill>
-              <a:srgbClr val="6A9A52"/>
-            </a:solidFill>
-            <a:prstDash val="solid"/>
-            <a:headEnd type="none"/>
-            <a:tailEnd type="triangle"/>
-          </a:ln>
-        </p:spPr>
-      </p:sp>
-      <p:sp>
-        <p:nvSpPr>
-          <p:cNvPr id="13" name="Shape 11"/>
-          <p:cNvSpPr/>
-          <p:nvPr/>
-        </p:nvSpPr>
-        <p:spPr>
-          <a:xfrm>
-            <a:off x="9235440" y="1874520"/>
-            <a:ext cx="2286000" cy="1280160"/>
+              <a:t>python3.12 ingest</a:t>
+            </a:r>
+            <a:endParaRPr lang="en-US" sz="900" dirty="0"/>
+          </a:p>
+        </p:txBody>
+      </p:sp>
+      <p:sp>
+        <p:nvSpPr>
+          <p:cNvPr id="27" name="Shape 25"/>
+          <p:cNvSpPr/>
+          <p:nvPr/>
+        </p:nvSpPr>
+        <p:spPr>
+          <a:xfrm>
+            <a:off x="7789469" y="4165092"/>
+            <a:ext cx="310896" cy="219456"/>
+          </a:xfrm>
+          <a:prstGeom prst="rightArrow">
+            <a:avLst/>
+          </a:prstGeom>
+          <a:solidFill>
+            <a:srgbClr val="5F6B74"/>
+          </a:solidFill>
+          <a:ln/>
+        </p:spPr>
+      </p:sp>
+      <p:sp>
+        <p:nvSpPr>
+          <p:cNvPr id="28" name="Shape 26"/>
+          <p:cNvSpPr/>
+          <p:nvPr/>
+        </p:nvSpPr>
+        <p:spPr>
+          <a:xfrm>
+            <a:off x="8173517" y="3291840"/>
+            <a:ext cx="1391869" cy="1965960"/>
           </a:xfrm>
           <a:prstGeom prst="roundRect">
             <a:avLst>
-              <a:gd name="adj" fmla="val 7143"/>
+              <a:gd name="adj" fmla="val 2628"/>
             </a:avLst>
           </a:prstGeom>
           <a:solidFill>
-            <a:srgbClr val="EEF4EC"/>
+            <a:srgbClr val="FFFFFF"/>
           </a:solidFill>
-          <a:ln w="19050">
+          <a:ln w="12700">
             <a:solidFill>
-              <a:srgbClr val="1B5E20"/>
+              <a:srgbClr val="E4E6E9"/>
             </a:solidFill>
             <a:prstDash val="solid"/>
           </a:ln>
@@ -1751,34 +2249,14 @@
       </p:sp>
       <p:sp>
         <p:nvSpPr>
-          <p:cNvPr id="14" name="Shape 12"/>
-          <p:cNvSpPr/>
-          <p:nvPr/>
-        </p:nvSpPr>
-        <p:spPr>
-          <a:xfrm>
-            <a:off x="10287000" y="2039112"/>
-            <a:ext cx="182880" cy="182880"/>
-          </a:xfrm>
-          <a:prstGeom prst="ellipse">
-            <a:avLst/>
-          </a:prstGeom>
-          <a:solidFill>
-            <a:srgbClr val="1B5E20"/>
-          </a:solidFill>
-          <a:ln/>
-        </p:spPr>
-      </p:sp>
-      <p:sp>
-        <p:nvSpPr>
-          <p:cNvPr id="15" name="Text 13"/>
-          <p:cNvSpPr/>
-          <p:nvPr/>
-        </p:nvSpPr>
-        <p:spPr>
-          <a:xfrm>
-            <a:off x="9208008" y="2258568"/>
-            <a:ext cx="2340864" cy="365760"/>
+          <p:cNvPr id="29" name="Text 27"/>
+          <p:cNvSpPr/>
+          <p:nvPr/>
+        </p:nvSpPr>
+        <p:spPr>
+          <a:xfrm>
+            <a:off x="8319821" y="3474720"/>
+            <a:ext cx="1099261" cy="320040"/>
           </a:xfrm>
           <a:prstGeom prst="rect">
             <a:avLst/>
@@ -1790,34 +2268,201 @@
           <a:bodyPr wrap="square" lIns="0" tIns="0" rIns="0" bIns="0" rtlCol="0" anchor="ctr"/>
           <a:lstStyle/>
           <a:p>
-            <a:pPr algn="ctr" indent="0" marL="0">
-              <a:buNone/>
-            </a:pPr>
-            <a:r>
-              <a:rPr lang="en-US" sz="1450" b="1" dirty="0">
-                <a:solidFill>
-                  <a:srgbClr val="153020"/>
+            <a:pPr indent="0" marL="0">
+              <a:buNone/>
+            </a:pPr>
+            <a:r>
+              <a:rPr lang="en-US" sz="1100" dirty="0">
+                <a:solidFill>
+                  <a:srgbClr val="1F7A4D"/>
+                </a:solidFill>
+                <a:latin typeface="Consolas" pitchFamily="34" charset="0"/>
+                <a:ea typeface="Consolas" pitchFamily="34" charset="-122"/>
+                <a:cs typeface="Consolas" pitchFamily="34" charset="-120"/>
+              </a:rPr>
+              <a:t>05</a:t>
+            </a:r>
+            <a:endParaRPr lang="en-US" sz="1100" dirty="0"/>
+          </a:p>
+        </p:txBody>
+      </p:sp>
+      <p:sp>
+        <p:nvSpPr>
+          <p:cNvPr id="30" name="Text 28"/>
+          <p:cNvSpPr/>
+          <p:nvPr/>
+        </p:nvSpPr>
+        <p:spPr>
+          <a:xfrm>
+            <a:off x="8319821" y="3913632"/>
+            <a:ext cx="1099261" cy="868680"/>
+          </a:xfrm>
+          <a:prstGeom prst="rect">
+            <a:avLst/>
+          </a:prstGeom>
+          <a:noFill/>
+          <a:ln/>
+        </p:spPr>
+        <p:txBody>
+          <a:bodyPr wrap="square" lIns="0" tIns="0" rIns="0" bIns="0" rtlCol="0" anchor="t"/>
+          <a:lstStyle/>
+          <a:p>
+            <a:pPr indent="0" marL="0">
+              <a:lnSpc>
+                <a:spcPct val="96000"/>
+              </a:lnSpc>
+              <a:buNone/>
+            </a:pPr>
+            <a:r>
+              <a:rPr lang="en-US" sz="1300" b="1" dirty="0">
+                <a:solidFill>
+                  <a:srgbClr val="16261C"/>
+                </a:solidFill>
+                <a:latin typeface="Cambria" pitchFamily="34" charset="0"/>
+                <a:ea typeface="Cambria" pitchFamily="34" charset="-122"/>
+                <a:cs typeface="Cambria" pitchFamily="34" charset="-120"/>
+              </a:rPr>
+              <a:t>DynamoDB</a:t>
+            </a:r>
+            <a:endParaRPr lang="en-US" sz="1300" dirty="0"/>
+          </a:p>
+        </p:txBody>
+      </p:sp>
+      <p:sp>
+        <p:nvSpPr>
+          <p:cNvPr id="31" name="Text 29"/>
+          <p:cNvSpPr/>
+          <p:nvPr/>
+        </p:nvSpPr>
+        <p:spPr>
+          <a:xfrm>
+            <a:off x="8319821" y="4773168"/>
+            <a:ext cx="1099261" cy="365760"/>
+          </a:xfrm>
+          <a:prstGeom prst="rect">
+            <a:avLst/>
+          </a:prstGeom>
+          <a:noFill/>
+          <a:ln/>
+        </p:spPr>
+        <p:txBody>
+          <a:bodyPr wrap="square" lIns="0" tIns="0" rIns="0" bIns="0" rtlCol="0" anchor="ctr"/>
+          <a:lstStyle/>
+          <a:p>
+            <a:pPr indent="0" marL="0">
+              <a:buNone/>
+            </a:pPr>
+            <a:r>
+              <a:rPr lang="en-US" sz="900" dirty="0">
+                <a:solidFill>
+                  <a:srgbClr val="5F6B74"/>
                 </a:solidFill>
                 <a:latin typeface="Calibri" pitchFamily="34" charset="0"/>
                 <a:ea typeface="Calibri" pitchFamily="34" charset="-122"/>
                 <a:cs typeface="Calibri" pitchFamily="34" charset="-120"/>
               </a:rPr>
-              <a:t>Amazon SQS</a:t>
-            </a:r>
-            <a:endParaRPr lang="en-US" sz="1450" dirty="0"/>
-          </a:p>
-        </p:txBody>
-      </p:sp>
-      <p:sp>
-        <p:nvSpPr>
-          <p:cNvPr id="16" name="Text 14"/>
-          <p:cNvSpPr/>
-          <p:nvPr/>
-        </p:nvSpPr>
-        <p:spPr>
-          <a:xfrm>
-            <a:off x="9235440" y="2606040"/>
-            <a:ext cx="2286000" cy="411480"/>
+              <a:t>window store</a:t>
+            </a:r>
+            <a:endParaRPr lang="en-US" sz="900" dirty="0"/>
+          </a:p>
+        </p:txBody>
+      </p:sp>
+      <p:sp>
+        <p:nvSpPr>
+          <p:cNvPr id="32" name="Shape 30"/>
+          <p:cNvSpPr/>
+          <p:nvPr/>
+        </p:nvSpPr>
+        <p:spPr>
+          <a:xfrm>
+            <a:off x="9638538" y="4165092"/>
+            <a:ext cx="310896" cy="219456"/>
+          </a:xfrm>
+          <a:prstGeom prst="rightArrow">
+            <a:avLst/>
+          </a:prstGeom>
+          <a:solidFill>
+            <a:srgbClr val="5F6B74"/>
+          </a:solidFill>
+          <a:ln/>
+        </p:spPr>
+      </p:sp>
+      <p:sp>
+        <p:nvSpPr>
+          <p:cNvPr id="33" name="Shape 31"/>
+          <p:cNvSpPr/>
+          <p:nvPr/>
+        </p:nvSpPr>
+        <p:spPr>
+          <a:xfrm>
+            <a:off x="10022586" y="3291840"/>
+            <a:ext cx="1391869" cy="1965960"/>
+          </a:xfrm>
+          <a:prstGeom prst="roundRect">
+            <a:avLst>
+              <a:gd name="adj" fmla="val 2628"/>
+            </a:avLst>
+          </a:prstGeom>
+          <a:solidFill>
+            <a:srgbClr val="FFFFFF"/>
+          </a:solidFill>
+          <a:ln w="12700">
+            <a:solidFill>
+              <a:srgbClr val="E4E6E9"/>
+            </a:solidFill>
+            <a:prstDash val="solid"/>
+          </a:ln>
+        </p:spPr>
+      </p:sp>
+      <p:sp>
+        <p:nvSpPr>
+          <p:cNvPr id="34" name="Text 32"/>
+          <p:cNvSpPr/>
+          <p:nvPr/>
+        </p:nvSpPr>
+        <p:spPr>
+          <a:xfrm>
+            <a:off x="10168890" y="3474720"/>
+            <a:ext cx="1099261" cy="320040"/>
+          </a:xfrm>
+          <a:prstGeom prst="rect">
+            <a:avLst/>
+          </a:prstGeom>
+          <a:noFill/>
+          <a:ln/>
+        </p:spPr>
+        <p:txBody>
+          <a:bodyPr wrap="square" lIns="0" tIns="0" rIns="0" bIns="0" rtlCol="0" anchor="ctr"/>
+          <a:lstStyle/>
+          <a:p>
+            <a:pPr indent="0" marL="0">
+              <a:buNone/>
+            </a:pPr>
+            <a:r>
+              <a:rPr lang="en-US" sz="1100" dirty="0">
+                <a:solidFill>
+                  <a:srgbClr val="1F7A4D"/>
+                </a:solidFill>
+                <a:latin typeface="Consolas" pitchFamily="34" charset="0"/>
+                <a:ea typeface="Consolas" pitchFamily="34" charset="-122"/>
+                <a:cs typeface="Consolas" pitchFamily="34" charset="-120"/>
+              </a:rPr>
+              <a:t>06</a:t>
+            </a:r>
+            <a:endParaRPr lang="en-US" sz="1100" dirty="0"/>
+          </a:p>
+        </p:txBody>
+      </p:sp>
+      <p:sp>
+        <p:nvSpPr>
+          <p:cNvPr id="35" name="Text 33"/>
+          <p:cNvSpPr/>
+          <p:nvPr/>
+        </p:nvSpPr>
+        <p:spPr>
+          <a:xfrm>
+            <a:off x="10168890" y="3913632"/>
+            <a:ext cx="1099261" cy="868680"/>
           </a:xfrm>
           <a:prstGeom prst="rect">
             <a:avLst/>
@@ -1829,509 +2474,63 @@
           <a:bodyPr wrap="square" lIns="0" tIns="0" rIns="0" bIns="0" rtlCol="0" anchor="t"/>
           <a:lstStyle/>
           <a:p>
-            <a:pPr algn="ctr" indent="0" marL="0">
-              <a:buNone/>
-            </a:pPr>
-            <a:r>
-              <a:rPr lang="en-US" sz="1050" dirty="0">
-                <a:solidFill>
-                  <a:srgbClr val="5C6E58"/>
+            <a:pPr indent="0" marL="0">
+              <a:lnSpc>
+                <a:spcPct val="96000"/>
+              </a:lnSpc>
+              <a:buNone/>
+            </a:pPr>
+            <a:r>
+              <a:rPr lang="en-US" sz="1300" b="1" dirty="0">
+                <a:solidFill>
+                  <a:srgbClr val="16261C"/>
+                </a:solidFill>
+                <a:latin typeface="Cambria" pitchFamily="34" charset="0"/>
+                <a:ea typeface="Cambria" pitchFamily="34" charset="-122"/>
+                <a:cs typeface="Cambria" pitchFamily="34" charset="-120"/>
+              </a:rPr>
+              <a:t>API GW + S3</a:t>
+            </a:r>
+            <a:endParaRPr lang="en-US" sz="1300" dirty="0"/>
+          </a:p>
+        </p:txBody>
+      </p:sp>
+      <p:sp>
+        <p:nvSpPr>
+          <p:cNvPr id="36" name="Text 34"/>
+          <p:cNvSpPr/>
+          <p:nvPr/>
+        </p:nvSpPr>
+        <p:spPr>
+          <a:xfrm>
+            <a:off x="10168890" y="4773168"/>
+            <a:ext cx="1099261" cy="365760"/>
+          </a:xfrm>
+          <a:prstGeom prst="rect">
+            <a:avLst/>
+          </a:prstGeom>
+          <a:noFill/>
+          <a:ln/>
+        </p:spPr>
+        <p:txBody>
+          <a:bodyPr wrap="square" lIns="0" tIns="0" rIns="0" bIns="0" rtlCol="0" anchor="ctr"/>
+          <a:lstStyle/>
+          <a:p>
+            <a:pPr indent="0" marL="0">
+              <a:buNone/>
+            </a:pPr>
+            <a:r>
+              <a:rPr lang="en-US" sz="900" dirty="0">
+                <a:solidFill>
+                  <a:srgbClr val="5F6B74"/>
                 </a:solidFill>
                 <a:latin typeface="Calibri" pitchFamily="34" charset="0"/>
                 <a:ea typeface="Calibri" pitchFamily="34" charset="-122"/>
                 <a:cs typeface="Calibri" pitchFamily="34" charset="-120"/>
               </a:rPr>
-              <a:t>aggregate queue</a:t>
-            </a:r>
-            <a:endParaRPr lang="en-US" sz="1050" dirty="0"/>
-          </a:p>
-        </p:txBody>
-      </p:sp>
-      <p:sp>
-        <p:nvSpPr>
-          <p:cNvPr id="17" name="Shape 15"/>
-          <p:cNvSpPr/>
-          <p:nvPr/>
-        </p:nvSpPr>
-        <p:spPr>
-          <a:xfrm>
-            <a:off x="9235440" y="3520440"/>
-            <a:ext cx="2286000" cy="1280160"/>
-          </a:xfrm>
-          <a:prstGeom prst="roundRect">
-            <a:avLst>
-              <a:gd name="adj" fmla="val 7143"/>
-            </a:avLst>
-          </a:prstGeom>
-          <a:solidFill>
-            <a:srgbClr val="EEF4EC"/>
-          </a:solidFill>
-          <a:ln w="19050">
-            <a:solidFill>
-              <a:srgbClr val="1B5E20"/>
-            </a:solidFill>
-            <a:prstDash val="solid"/>
-          </a:ln>
-        </p:spPr>
-      </p:sp>
-      <p:sp>
-        <p:nvSpPr>
-          <p:cNvPr id="18" name="Shape 16"/>
-          <p:cNvSpPr/>
-          <p:nvPr/>
-        </p:nvSpPr>
-        <p:spPr>
-          <a:xfrm>
-            <a:off x="10287000" y="3685032"/>
-            <a:ext cx="182880" cy="182880"/>
-          </a:xfrm>
-          <a:prstGeom prst="ellipse">
-            <a:avLst/>
-          </a:prstGeom>
-          <a:solidFill>
-            <a:srgbClr val="1B5E20"/>
-          </a:solidFill>
-          <a:ln/>
-        </p:spPr>
-      </p:sp>
-      <p:sp>
-        <p:nvSpPr>
-          <p:cNvPr id="19" name="Text 17"/>
-          <p:cNvSpPr/>
-          <p:nvPr/>
-        </p:nvSpPr>
-        <p:spPr>
-          <a:xfrm>
-            <a:off x="9208008" y="3904488"/>
-            <a:ext cx="2340864" cy="365760"/>
-          </a:xfrm>
-          <a:prstGeom prst="rect">
-            <a:avLst/>
-          </a:prstGeom>
-          <a:noFill/>
-          <a:ln/>
-        </p:spPr>
-        <p:txBody>
-          <a:bodyPr wrap="square" lIns="0" tIns="0" rIns="0" bIns="0" rtlCol="0" anchor="ctr"/>
-          <a:lstStyle/>
-          <a:p>
-            <a:pPr algn="ctr" indent="0" marL="0">
-              <a:buNone/>
-            </a:pPr>
-            <a:r>
-              <a:rPr lang="en-US" sz="1450" b="1" dirty="0">
-                <a:solidFill>
-                  <a:srgbClr val="153020"/>
-                </a:solidFill>
-                <a:latin typeface="Calibri" pitchFamily="34" charset="0"/>
-                <a:ea typeface="Calibri" pitchFamily="34" charset="-122"/>
-                <a:cs typeface="Calibri" pitchFamily="34" charset="-120"/>
-              </a:rPr>
-              <a:t>AWS Lambda</a:t>
-            </a:r>
-            <a:endParaRPr lang="en-US" sz="1450" dirty="0"/>
-          </a:p>
-        </p:txBody>
-      </p:sp>
-      <p:sp>
-        <p:nvSpPr>
-          <p:cNvPr id="20" name="Text 18"/>
-          <p:cNvSpPr/>
-          <p:nvPr/>
-        </p:nvSpPr>
-        <p:spPr>
-          <a:xfrm>
-            <a:off x="9235440" y="4251960"/>
-            <a:ext cx="2286000" cy="411480"/>
-          </a:xfrm>
-          <a:prstGeom prst="rect">
-            <a:avLst/>
-          </a:prstGeom>
-          <a:noFill/>
-          <a:ln/>
-        </p:spPr>
-        <p:txBody>
-          <a:bodyPr wrap="square" lIns="0" tIns="0" rIns="0" bIns="0" rtlCol="0" anchor="t"/>
-          <a:lstStyle/>
-          <a:p>
-            <a:pPr algn="ctr" indent="0" marL="0">
-              <a:buNone/>
-            </a:pPr>
-            <a:r>
-              <a:rPr lang="en-US" sz="1050" dirty="0">
-                <a:solidFill>
-                  <a:srgbClr val="5C6E58"/>
-                </a:solidFill>
-                <a:latin typeface="Calibri" pitchFamily="34" charset="0"/>
-                <a:ea typeface="Calibri" pitchFamily="34" charset="-122"/>
-                <a:cs typeface="Calibri" pitchFamily="34" charset="-120"/>
-              </a:rPr>
-              <a:t>python3.12 ingest</a:t>
-            </a:r>
-            <a:endParaRPr lang="en-US" sz="1050" dirty="0"/>
-          </a:p>
-        </p:txBody>
-      </p:sp>
-      <p:sp>
-        <p:nvSpPr>
-          <p:cNvPr id="21" name="Shape 19"/>
-          <p:cNvSpPr/>
-          <p:nvPr/>
-        </p:nvSpPr>
-        <p:spPr>
-          <a:xfrm>
-            <a:off x="7242048" y="4160520"/>
-            <a:ext cx="1975104" cy="0"/>
-          </a:xfrm>
-          <a:prstGeom prst="line">
-            <a:avLst/>
-          </a:prstGeom>
-          <a:noFill/>
-          <a:ln w="25400">
-            <a:solidFill>
-              <a:srgbClr val="6A9A52"/>
-            </a:solidFill>
-            <a:prstDash val="solid"/>
-            <a:headEnd type="triangle"/>
-            <a:tailEnd type="oval"/>
-          </a:ln>
-        </p:spPr>
-      </p:sp>
-      <p:sp>
-        <p:nvSpPr>
-          <p:cNvPr id="22" name="Shape 20"/>
-          <p:cNvSpPr/>
-          <p:nvPr/>
-        </p:nvSpPr>
-        <p:spPr>
-          <a:xfrm>
-            <a:off x="4937760" y="3520440"/>
-            <a:ext cx="2286000" cy="1280160"/>
-          </a:xfrm>
-          <a:prstGeom prst="roundRect">
-            <a:avLst>
-              <a:gd name="adj" fmla="val 7143"/>
-            </a:avLst>
-          </a:prstGeom>
-          <a:solidFill>
-            <a:srgbClr val="EEF4EC"/>
-          </a:solidFill>
-          <a:ln w="19050">
-            <a:solidFill>
-              <a:srgbClr val="1B5E20"/>
-            </a:solidFill>
-            <a:prstDash val="solid"/>
-          </a:ln>
-        </p:spPr>
-      </p:sp>
-      <p:sp>
-        <p:nvSpPr>
-          <p:cNvPr id="23" name="Shape 21"/>
-          <p:cNvSpPr/>
-          <p:nvPr/>
-        </p:nvSpPr>
-        <p:spPr>
-          <a:xfrm>
-            <a:off x="5989320" y="3685032"/>
-            <a:ext cx="182880" cy="182880"/>
-          </a:xfrm>
-          <a:prstGeom prst="ellipse">
-            <a:avLst/>
-          </a:prstGeom>
-          <a:solidFill>
-            <a:srgbClr val="1B5E20"/>
-          </a:solidFill>
-          <a:ln/>
-        </p:spPr>
-      </p:sp>
-      <p:sp>
-        <p:nvSpPr>
-          <p:cNvPr id="24" name="Text 22"/>
-          <p:cNvSpPr/>
-          <p:nvPr/>
-        </p:nvSpPr>
-        <p:spPr>
-          <a:xfrm>
-            <a:off x="4910328" y="3904488"/>
-            <a:ext cx="2340864" cy="365760"/>
-          </a:xfrm>
-          <a:prstGeom prst="rect">
-            <a:avLst/>
-          </a:prstGeom>
-          <a:noFill/>
-          <a:ln/>
-        </p:spPr>
-        <p:txBody>
-          <a:bodyPr wrap="square" lIns="0" tIns="0" rIns="0" bIns="0" rtlCol="0" anchor="ctr"/>
-          <a:lstStyle/>
-          <a:p>
-            <a:pPr algn="ctr" indent="0" marL="0">
-              <a:buNone/>
-            </a:pPr>
-            <a:r>
-              <a:rPr lang="en-US" sz="1450" b="1" dirty="0">
-                <a:solidFill>
-                  <a:srgbClr val="153020"/>
-                </a:solidFill>
-                <a:latin typeface="Calibri" pitchFamily="34" charset="0"/>
-                <a:ea typeface="Calibri" pitchFamily="34" charset="-122"/>
-                <a:cs typeface="Calibri" pitchFamily="34" charset="-120"/>
-              </a:rPr>
-              <a:t>DynamoDB</a:t>
-            </a:r>
-            <a:endParaRPr lang="en-US" sz="1450" dirty="0"/>
-          </a:p>
-        </p:txBody>
-      </p:sp>
-      <p:sp>
-        <p:nvSpPr>
-          <p:cNvPr id="25" name="Text 23"/>
-          <p:cNvSpPr/>
-          <p:nvPr/>
-        </p:nvSpPr>
-        <p:spPr>
-          <a:xfrm>
-            <a:off x="4937760" y="4251960"/>
-            <a:ext cx="2286000" cy="411480"/>
-          </a:xfrm>
-          <a:prstGeom prst="rect">
-            <a:avLst/>
-          </a:prstGeom>
-          <a:noFill/>
-          <a:ln/>
-        </p:spPr>
-        <p:txBody>
-          <a:bodyPr wrap="square" lIns="0" tIns="0" rIns="0" bIns="0" rtlCol="0" anchor="t"/>
-          <a:lstStyle/>
-          <a:p>
-            <a:pPr algn="ctr" indent="0" marL="0">
-              <a:buNone/>
-            </a:pPr>
-            <a:r>
-              <a:rPr lang="en-US" sz="1050" dirty="0">
-                <a:solidFill>
-                  <a:srgbClr val="5C6E58"/>
-                </a:solidFill>
-                <a:latin typeface="Calibri" pitchFamily="34" charset="0"/>
-                <a:ea typeface="Calibri" pitchFamily="34" charset="-122"/>
-                <a:cs typeface="Calibri" pitchFamily="34" charset="-120"/>
-              </a:rPr>
-              <a:t>window store</a:t>
-            </a:r>
-            <a:endParaRPr lang="en-US" sz="1050" dirty="0"/>
-          </a:p>
-        </p:txBody>
-      </p:sp>
-      <p:sp>
-        <p:nvSpPr>
-          <p:cNvPr id="26" name="Shape 24"/>
-          <p:cNvSpPr/>
-          <p:nvPr/>
-        </p:nvSpPr>
-        <p:spPr>
-          <a:xfrm>
-            <a:off x="2944368" y="4160520"/>
-            <a:ext cx="1975104" cy="0"/>
-          </a:xfrm>
-          <a:prstGeom prst="line">
-            <a:avLst/>
-          </a:prstGeom>
-          <a:noFill/>
-          <a:ln w="25400">
-            <a:solidFill>
-              <a:srgbClr val="6A9A52"/>
-            </a:solidFill>
-            <a:prstDash val="solid"/>
-            <a:headEnd type="triangle"/>
-            <a:tailEnd type="oval"/>
-          </a:ln>
-        </p:spPr>
-      </p:sp>
-      <p:sp>
-        <p:nvSpPr>
-          <p:cNvPr id="27" name="Shape 25"/>
-          <p:cNvSpPr/>
-          <p:nvPr/>
-        </p:nvSpPr>
-        <p:spPr>
-          <a:xfrm>
-            <a:off x="640080" y="3520440"/>
-            <a:ext cx="2286000" cy="1280160"/>
-          </a:xfrm>
-          <a:prstGeom prst="roundRect">
-            <a:avLst>
-              <a:gd name="adj" fmla="val 7143"/>
-            </a:avLst>
-          </a:prstGeom>
-          <a:solidFill>
-            <a:srgbClr val="EEF4EC"/>
-          </a:solidFill>
-          <a:ln w="19050">
-            <a:solidFill>
-              <a:srgbClr val="2E7D32"/>
-            </a:solidFill>
-            <a:prstDash val="solid"/>
-          </a:ln>
-        </p:spPr>
-      </p:sp>
-      <p:sp>
-        <p:nvSpPr>
-          <p:cNvPr id="28" name="Shape 26"/>
-          <p:cNvSpPr/>
-          <p:nvPr/>
-        </p:nvSpPr>
-        <p:spPr>
-          <a:xfrm>
-            <a:off x="1691640" y="3685032"/>
-            <a:ext cx="182880" cy="182880"/>
-          </a:xfrm>
-          <a:prstGeom prst="ellipse">
-            <a:avLst/>
-          </a:prstGeom>
-          <a:solidFill>
-            <a:srgbClr val="2E7D32"/>
-          </a:solidFill>
-          <a:ln/>
-        </p:spPr>
-      </p:sp>
-      <p:sp>
-        <p:nvSpPr>
-          <p:cNvPr id="29" name="Text 27"/>
-          <p:cNvSpPr/>
-          <p:nvPr/>
-        </p:nvSpPr>
-        <p:spPr>
-          <a:xfrm>
-            <a:off x="612648" y="3904488"/>
-            <a:ext cx="2340864" cy="365760"/>
-          </a:xfrm>
-          <a:prstGeom prst="rect">
-            <a:avLst/>
-          </a:prstGeom>
-          <a:noFill/>
-          <a:ln/>
-        </p:spPr>
-        <p:txBody>
-          <a:bodyPr wrap="square" lIns="0" tIns="0" rIns="0" bIns="0" rtlCol="0" anchor="ctr"/>
-          <a:lstStyle/>
-          <a:p>
-            <a:pPr algn="ctr" indent="0" marL="0">
-              <a:buNone/>
-            </a:pPr>
-            <a:r>
-              <a:rPr lang="en-US" sz="1450" b="1" dirty="0">
-                <a:solidFill>
-                  <a:srgbClr val="153020"/>
-                </a:solidFill>
-                <a:latin typeface="Calibri" pitchFamily="34" charset="0"/>
-                <a:ea typeface="Calibri" pitchFamily="34" charset="-122"/>
-                <a:cs typeface="Calibri" pitchFamily="34" charset="-120"/>
-              </a:rPr>
-              <a:t>API GW + S3</a:t>
-            </a:r>
-            <a:endParaRPr lang="en-US" sz="1450" dirty="0"/>
-          </a:p>
-        </p:txBody>
-      </p:sp>
-      <p:sp>
-        <p:nvSpPr>
-          <p:cNvPr id="30" name="Text 28"/>
-          <p:cNvSpPr/>
-          <p:nvPr/>
-        </p:nvSpPr>
-        <p:spPr>
-          <a:xfrm>
-            <a:off x="640080" y="4251960"/>
-            <a:ext cx="2286000" cy="411480"/>
-          </a:xfrm>
-          <a:prstGeom prst="rect">
-            <a:avLst/>
-          </a:prstGeom>
-          <a:noFill/>
-          <a:ln/>
-        </p:spPr>
-        <p:txBody>
-          <a:bodyPr wrap="square" lIns="0" tIns="0" rIns="0" bIns="0" rtlCol="0" anchor="t"/>
-          <a:lstStyle/>
-          <a:p>
-            <a:pPr algn="ctr" indent="0" marL="0">
-              <a:buNone/>
-            </a:pPr>
-            <a:r>
-              <a:rPr lang="en-US" sz="1050" dirty="0">
-                <a:solidFill>
-                  <a:srgbClr val="5C6E58"/>
-                </a:solidFill>
-                <a:latin typeface="Calibri" pitchFamily="34" charset="0"/>
-                <a:ea typeface="Calibri" pitchFamily="34" charset="-122"/>
-                <a:cs typeface="Calibri" pitchFamily="34" charset="-120"/>
-              </a:rPr>
               <a:t>A–F scorecard</a:t>
             </a:r>
-            <a:endParaRPr lang="en-US" sz="1050" dirty="0"/>
-          </a:p>
-        </p:txBody>
-      </p:sp>
-      <p:sp>
-        <p:nvSpPr>
-          <p:cNvPr id="31" name="Shape 29"/>
-          <p:cNvSpPr/>
-          <p:nvPr/>
-        </p:nvSpPr>
-        <p:spPr>
-          <a:xfrm>
-            <a:off x="10378440" y="3154680"/>
-            <a:ext cx="0" cy="365760"/>
-          </a:xfrm>
-          <a:prstGeom prst="line">
-            <a:avLst/>
-          </a:prstGeom>
-          <a:noFill/>
-          <a:ln w="25400">
-            <a:solidFill>
-              <a:srgbClr val="6A9A52"/>
-            </a:solidFill>
-            <a:prstDash val="solid"/>
-            <a:tailEnd type="triangle"/>
-          </a:ln>
-        </p:spPr>
-      </p:sp>
-      <p:sp>
-        <p:nvSpPr>
-          <p:cNvPr id="32" name="Text 30"/>
-          <p:cNvSpPr/>
-          <p:nvPr/>
-        </p:nvSpPr>
-        <p:spPr>
-          <a:xfrm>
-            <a:off x="640080" y="5257800"/>
-            <a:ext cx="10972800" cy="731520"/>
-          </a:xfrm>
-          <a:prstGeom prst="rect">
-            <a:avLst/>
-          </a:prstGeom>
-          <a:noFill/>
-          <a:ln/>
-        </p:spPr>
-        <p:txBody>
-          <a:bodyPr wrap="square" rtlCol="0" anchor="ctr"/>
-          <a:lstStyle/>
-          <a:p>
-            <a:pPr algn="ctr" indent="0" marL="0">
-              <a:buNone/>
-            </a:pPr>
-            <a:r>
-              <a:rPr lang="en-US" sz="1500" i="1" dirty="0">
-                <a:solidFill>
-                  <a:srgbClr val="1B5E20"/>
-                </a:solidFill>
-                <a:latin typeface="Calibri" pitchFamily="34" charset="0"/>
-                <a:ea typeface="Calibri" pitchFamily="34" charset="-122"/>
-                <a:cs typeface="Calibri" pitchFamily="34" charset="-120"/>
-              </a:rPr>
-              <a:t>The fog raises hard exception alarms at the edge; the dashboard derives an A-to-F efficiency grade fresh on every read, never stored.</a:t>
-            </a:r>
-            <a:endParaRPr lang="en-US" sz="1500" dirty="0"/>
+            <a:endParaRPr lang="en-US" sz="900" dirty="0"/>
           </a:p>
         </p:txBody>
       </p:sp>
@@ -2349,7 +2548,7 @@
     <p:bg>
       <p:bgPr>
         <a:solidFill>
-          <a:srgbClr val="FFFFFF"/>
+          <a:srgbClr val="F4FAF6"/>
         </a:solidFill>
       </p:bgPr>
     </p:bg>
@@ -2369,23 +2568,92 @@
       </p:grpSpPr>
       <p:sp>
         <p:nvSpPr>
-          <p:cNvPr id="2" name="Text 0"/>
-          <p:cNvSpPr/>
-          <p:nvPr/>
-        </p:nvSpPr>
-        <p:spPr>
-          <a:xfrm>
-            <a:off x="640080" y="457200"/>
-            <a:ext cx="7315200" cy="640080"/>
-          </a:xfrm>
-          <a:prstGeom prst="rect">
-            <a:avLst/>
-          </a:prstGeom>
-          <a:noFill/>
-          <a:ln/>
-        </p:spPr>
-        <p:txBody>
-          <a:bodyPr wrap="square" rtlCol="0" anchor="ctr"/>
+          <p:cNvPr id="2" name="Shape 0"/>
+          <p:cNvSpPr/>
+          <p:nvPr/>
+        </p:nvSpPr>
+        <p:spPr>
+          <a:xfrm>
+            <a:off x="777240" y="777240"/>
+            <a:ext cx="10637215" cy="0"/>
+          </a:xfrm>
+          <a:prstGeom prst="line">
+            <a:avLst/>
+          </a:prstGeom>
+          <a:noFill/>
+          <a:ln w="15875">
+            <a:solidFill>
+              <a:srgbClr val="1F7A4D"/>
+            </a:solidFill>
+            <a:prstDash val="solid"/>
+          </a:ln>
+        </p:spPr>
+      </p:sp>
+      <p:sp>
+        <p:nvSpPr>
+          <p:cNvPr id="3" name="Shape 1"/>
+          <p:cNvSpPr/>
+          <p:nvPr/>
+        </p:nvSpPr>
+        <p:spPr>
+          <a:xfrm>
+            <a:off x="777240" y="896112"/>
+            <a:ext cx="10637215" cy="0"/>
+          </a:xfrm>
+          <a:prstGeom prst="line">
+            <a:avLst/>
+          </a:prstGeom>
+          <a:noFill/>
+          <a:ln w="6350">
+            <a:solidFill>
+              <a:srgbClr val="5F6B74"/>
+            </a:solidFill>
+            <a:prstDash val="solid"/>
+          </a:ln>
+        </p:spPr>
+      </p:sp>
+      <p:sp>
+        <p:nvSpPr>
+          <p:cNvPr id="4" name="Shape 2"/>
+          <p:cNvSpPr/>
+          <p:nvPr/>
+        </p:nvSpPr>
+        <p:spPr>
+          <a:xfrm>
+            <a:off x="777240" y="6217920"/>
+            <a:ext cx="10637215" cy="0"/>
+          </a:xfrm>
+          <a:prstGeom prst="line">
+            <a:avLst/>
+          </a:prstGeom>
+          <a:noFill/>
+          <a:ln w="6350">
+            <a:solidFill>
+              <a:srgbClr val="5F6B74"/>
+            </a:solidFill>
+            <a:prstDash val="solid"/>
+          </a:ln>
+        </p:spPr>
+      </p:sp>
+      <p:sp>
+        <p:nvSpPr>
+          <p:cNvPr id="5" name="Text 3"/>
+          <p:cNvSpPr/>
+          <p:nvPr/>
+        </p:nvSpPr>
+        <p:spPr>
+          <a:xfrm>
+            <a:off x="777240" y="1051560"/>
+            <a:ext cx="914400" cy="640080"/>
+          </a:xfrm>
+          <a:prstGeom prst="rect">
+            <a:avLst/>
+          </a:prstGeom>
+          <a:noFill/>
+          <a:ln/>
+        </p:spPr>
+        <p:txBody>
+          <a:bodyPr wrap="square" lIns="0" tIns="0" rIns="0" bIns="0" rtlCol="0" anchor="ctr"/>
           <a:lstStyle/>
           <a:p>
             <a:pPr indent="0" marL="0">
@@ -2394,13 +2662,13 @@
             <a:r>
               <a:rPr lang="en-US" sz="3000" b="1" dirty="0">
                 <a:solidFill>
-                  <a:srgbClr val="153020"/>
+                  <a:srgbClr val="1F7A4D"/>
                 </a:solidFill>
                 <a:latin typeface="Cambria" pitchFamily="34" charset="0"/>
                 <a:ea typeface="Cambria" pitchFamily="34" charset="-122"/>
                 <a:cs typeface="Cambria" pitchFamily="34" charset="-120"/>
               </a:rPr>
-              <a:t>Live Demo</a:t>
+              <a:t>02</a:t>
             </a:r>
             <a:endParaRPr lang="en-US" sz="3000" dirty="0"/>
           </a:p>
@@ -2408,14 +2676,92 @@
       </p:sp>
       <p:sp>
         <p:nvSpPr>
-          <p:cNvPr id="3" name="Text 1"/>
-          <p:cNvSpPr/>
-          <p:nvPr/>
-        </p:nvSpPr>
-        <p:spPr>
-          <a:xfrm>
-            <a:off x="658368" y="1143000"/>
-            <a:ext cx="10972800" cy="365760"/>
+          <p:cNvPr id="6" name="Text 4"/>
+          <p:cNvSpPr/>
+          <p:nvPr/>
+        </p:nvSpPr>
+        <p:spPr>
+          <a:xfrm>
+            <a:off x="1645920" y="1225296"/>
+            <a:ext cx="9768535" cy="274320"/>
+          </a:xfrm>
+          <a:prstGeom prst="rect">
+            <a:avLst/>
+          </a:prstGeom>
+          <a:noFill/>
+          <a:ln/>
+        </p:spPr>
+        <p:txBody>
+          <a:bodyPr wrap="square" lIns="0" tIns="0" rIns="0" bIns="0" rtlCol="0" anchor="ctr"/>
+          <a:lstStyle/>
+          <a:p>
+            <a:pPr indent="0" marL="0">
+              <a:buNone/>
+            </a:pPr>
+            <a:r>
+              <a:rPr lang="en-US" sz="1100" b="1" spc="200" kern="0" dirty="0">
+                <a:solidFill>
+                  <a:srgbClr val="5F6B74"/>
+                </a:solidFill>
+                <a:latin typeface="Calibri" pitchFamily="34" charset="0"/>
+                <a:ea typeface="Calibri" pitchFamily="34" charset="-122"/>
+                <a:cs typeface="Calibri" pitchFamily="34" charset="-120"/>
+              </a:rPr>
+              <a:t>LIVE DEMO</a:t>
+            </a:r>
+            <a:endParaRPr lang="en-US" sz="1100" dirty="0"/>
+          </a:p>
+        </p:txBody>
+      </p:sp>
+      <p:sp>
+        <p:nvSpPr>
+          <p:cNvPr id="7" name="Text 5"/>
+          <p:cNvSpPr/>
+          <p:nvPr/>
+        </p:nvSpPr>
+        <p:spPr>
+          <a:xfrm>
+            <a:off x="777240" y="1700784"/>
+            <a:ext cx="10637215" cy="640080"/>
+          </a:xfrm>
+          <a:prstGeom prst="rect">
+            <a:avLst/>
+          </a:prstGeom>
+          <a:noFill/>
+          <a:ln/>
+        </p:spPr>
+        <p:txBody>
+          <a:bodyPr wrap="square" lIns="0" tIns="0" rIns="0" bIns="0" rtlCol="0" anchor="ctr"/>
+          <a:lstStyle/>
+          <a:p>
+            <a:pPr indent="0" marL="0">
+              <a:buNone/>
+            </a:pPr>
+            <a:r>
+              <a:rPr lang="en-US" sz="2300" b="1" dirty="0">
+                <a:solidFill>
+                  <a:srgbClr val="16261C"/>
+                </a:solidFill>
+                <a:latin typeface="Cambria" pitchFamily="34" charset="0"/>
+                <a:ea typeface="Cambria" pitchFamily="34" charset="-122"/>
+                <a:cs typeface="Cambria" pitchFamily="34" charset="-120"/>
+              </a:rPr>
+              <a:t>See it running on AWS</a:t>
+            </a:r>
+            <a:endParaRPr lang="en-US" sz="2300" dirty="0"/>
+          </a:p>
+        </p:txBody>
+      </p:sp>
+      <p:sp>
+        <p:nvSpPr>
+          <p:cNvPr id="8" name="Text 6"/>
+          <p:cNvSpPr/>
+          <p:nvPr/>
+        </p:nvSpPr>
+        <p:spPr>
+          <a:xfrm>
+            <a:off x="777240" y="2221992"/>
+            <a:ext cx="10637215" cy="274320"/>
           </a:xfrm>
           <a:prstGeom prst="rect">
             <a:avLst/>
@@ -2431,9 +2777,9 @@
               <a:buNone/>
             </a:pPr>
             <a:r>
-              <a:rPr lang="en-US" sz="1400" dirty="0">
-                <a:solidFill>
-                  <a:srgbClr val="2E7D32"/>
+              <a:rPr lang="en-US" sz="1100" dirty="0">
+                <a:solidFill>
+                  <a:srgbClr val="1F7A4D"/>
                 </a:solidFill>
                 <a:latin typeface="Consolas" pitchFamily="34" charset="0"/>
                 <a:ea typeface="Consolas" pitchFamily="34" charset="-122"/>
@@ -2441,32 +2787,32 @@
               </a:rPr>
               <a:t>smart-building-energy-monitor.s3.us-east-1.amazonaws.com</a:t>
             </a:r>
-            <a:endParaRPr lang="en-US" sz="1400" dirty="0"/>
-          </a:p>
-        </p:txBody>
-      </p:sp>
-      <p:sp>
-        <p:nvSpPr>
-          <p:cNvPr id="4" name="Shape 2"/>
-          <p:cNvSpPr/>
-          <p:nvPr/>
-        </p:nvSpPr>
-        <p:spPr>
-          <a:xfrm>
-            <a:off x="640080" y="1828800"/>
-            <a:ext cx="10881360" cy="1371600"/>
+            <a:endParaRPr lang="en-US" sz="1100" dirty="0"/>
+          </a:p>
+        </p:txBody>
+      </p:sp>
+      <p:sp>
+        <p:nvSpPr>
+          <p:cNvPr id="9" name="Shape 7"/>
+          <p:cNvSpPr/>
+          <p:nvPr/>
+        </p:nvSpPr>
+        <p:spPr>
+          <a:xfrm>
+            <a:off x="777240" y="2834640"/>
+            <a:ext cx="3301898" cy="3017520"/>
           </a:xfrm>
           <a:prstGeom prst="roundRect">
             <a:avLst>
-              <a:gd name="adj" fmla="val 6667"/>
+              <a:gd name="adj" fmla="val 1212"/>
             </a:avLst>
           </a:prstGeom>
           <a:solidFill>
-            <a:srgbClr val="EEF4EC"/>
+            <a:srgbClr val="FFFFFF"/>
           </a:solidFill>
-          <a:ln w="15240">
+          <a:ln w="12700">
             <a:solidFill>
-              <a:srgbClr val="2E7D32"/>
+              <a:srgbClr val="E4E6E9"/>
             </a:solidFill>
             <a:prstDash val="solid"/>
           </a:ln>
@@ -2474,34 +2820,14 @@
       </p:sp>
       <p:sp>
         <p:nvSpPr>
-          <p:cNvPr id="5" name="Shape 3"/>
-          <p:cNvSpPr/>
-          <p:nvPr/>
-        </p:nvSpPr>
-        <p:spPr>
-          <a:xfrm>
-            <a:off x="960120" y="2203704"/>
-            <a:ext cx="621792" cy="621792"/>
-          </a:xfrm>
-          <a:prstGeom prst="ellipse">
-            <a:avLst/>
-          </a:prstGeom>
-          <a:solidFill>
-            <a:srgbClr val="1B5E20"/>
-          </a:solidFill>
-          <a:ln/>
-        </p:spPr>
-      </p:sp>
-      <p:sp>
-        <p:nvSpPr>
-          <p:cNvPr id="6" name="Text 4"/>
-          <p:cNvSpPr/>
-          <p:nvPr/>
-        </p:nvSpPr>
-        <p:spPr>
-          <a:xfrm>
-            <a:off x="960120" y="2203704"/>
-            <a:ext cx="621792" cy="621792"/>
+          <p:cNvPr id="10" name="Text 8"/>
+          <p:cNvSpPr/>
+          <p:nvPr/>
+        </p:nvSpPr>
+        <p:spPr>
+          <a:xfrm>
+            <a:off x="1051560" y="3072384"/>
+            <a:ext cx="1828800" cy="777240"/>
           </a:xfrm>
           <a:prstGeom prst="rect">
             <a:avLst/>
@@ -2513,34 +2839,76 @@
           <a:bodyPr wrap="square" lIns="0" tIns="0" rIns="0" bIns="0" rtlCol="0" anchor="ctr"/>
           <a:lstStyle/>
           <a:p>
-            <a:pPr algn="ctr" indent="0" marL="0">
-              <a:buNone/>
-            </a:pPr>
-            <a:r>
-              <a:rPr lang="en-US" sz="2200" b="1" dirty="0">
-                <a:solidFill>
-                  <a:srgbClr val="FFFFFF"/>
+            <a:pPr indent="0" marL="0">
+              <a:buNone/>
+            </a:pPr>
+            <a:r>
+              <a:rPr lang="en-US" sz="3800" b="1" dirty="0">
+                <a:solidFill>
+                  <a:srgbClr val="1F7A4D"/>
                 </a:solidFill>
                 <a:latin typeface="Cambria" pitchFamily="34" charset="0"/>
                 <a:ea typeface="Cambria" pitchFamily="34" charset="-122"/>
                 <a:cs typeface="Cambria" pitchFamily="34" charset="-120"/>
               </a:rPr>
-              <a:t>1</a:t>
-            </a:r>
-            <a:endParaRPr lang="en-US" sz="2200" dirty="0"/>
-          </a:p>
-        </p:txBody>
-      </p:sp>
-      <p:sp>
-        <p:nvSpPr>
-          <p:cNvPr id="7" name="Text 5"/>
-          <p:cNvSpPr/>
-          <p:nvPr/>
-        </p:nvSpPr>
-        <p:spPr>
-          <a:xfrm>
-            <a:off x="1828800" y="2029968"/>
-            <a:ext cx="9418320" cy="411480"/>
+              <a:t>01</a:t>
+            </a:r>
+            <a:endParaRPr lang="en-US" sz="3800" dirty="0"/>
+          </a:p>
+        </p:txBody>
+      </p:sp>
+      <p:sp>
+        <p:nvSpPr>
+          <p:cNvPr id="11" name="Text 9"/>
+          <p:cNvSpPr/>
+          <p:nvPr/>
+        </p:nvSpPr>
+        <p:spPr>
+          <a:xfrm>
+            <a:off x="1069848" y="3886200"/>
+            <a:ext cx="2753258" cy="868680"/>
+          </a:xfrm>
+          <a:prstGeom prst="rect">
+            <a:avLst/>
+          </a:prstGeom>
+          <a:noFill/>
+          <a:ln/>
+        </p:spPr>
+        <p:txBody>
+          <a:bodyPr wrap="square" lIns="0" tIns="0" rIns="0" bIns="0" rtlCol="0" anchor="t"/>
+          <a:lstStyle/>
+          <a:p>
+            <a:pPr indent="0" marL="0">
+              <a:lnSpc>
+                <a:spcPct val="100000"/>
+              </a:lnSpc>
+              <a:buNone/>
+            </a:pPr>
+            <a:r>
+              <a:rPr lang="en-US" sz="1550" b="1" dirty="0">
+                <a:solidFill>
+                  <a:srgbClr val="16261C"/>
+                </a:solidFill>
+                <a:latin typeface="Cambria" pitchFamily="34" charset="0"/>
+                <a:ea typeface="Cambria" pitchFamily="34" charset="-122"/>
+                <a:cs typeface="Cambria" pitchFamily="34" charset="-120"/>
+              </a:rPr>
+              <a:t>An A-to-F grade badge per floor</a:t>
+            </a:r>
+            <a:endParaRPr lang="en-US" sz="1550" dirty="0"/>
+          </a:p>
+        </p:txBody>
+      </p:sp>
+      <p:sp>
+        <p:nvSpPr>
+          <p:cNvPr id="12" name="Text 10"/>
+          <p:cNvSpPr/>
+          <p:nvPr/>
+        </p:nvSpPr>
+        <p:spPr>
+          <a:xfrm>
+            <a:off x="1069848" y="4754880"/>
+            <a:ext cx="2753258" cy="914400"/>
           </a:xfrm>
           <a:prstGeom prst="rect">
             <a:avLst/>
@@ -2553,33 +2921,63 @@
           <a:lstStyle/>
           <a:p>
             <a:pPr indent="0" marL="0">
-              <a:buNone/>
-            </a:pPr>
-            <a:r>
-              <a:rPr lang="en-US" sz="1700" b="1" dirty="0">
-                <a:solidFill>
-                  <a:srgbClr val="153020"/>
+              <a:lnSpc>
+                <a:spcPct val="120000"/>
+              </a:lnSpc>
+              <a:buNone/>
+            </a:pPr>
+            <a:r>
+              <a:rPr lang="en-US" sz="1200" dirty="0">
+                <a:solidFill>
+                  <a:srgbClr val="5F6B74"/>
                 </a:solidFill>
                 <a:latin typeface="Calibri" pitchFamily="34" charset="0"/>
                 <a:ea typeface="Calibri" pitchFamily="34" charset="-122"/>
                 <a:cs typeface="Calibri" pitchFamily="34" charset="-120"/>
               </a:rPr>
-              <a:t>An A-to-F grade badge per floor</a:t>
-            </a:r>
-            <a:endParaRPr lang="en-US" sz="1700" dirty="0"/>
-          </a:p>
-        </p:txBody>
-      </p:sp>
-      <p:sp>
-        <p:nvSpPr>
-          <p:cNvPr id="8" name="Text 6"/>
-          <p:cNvSpPr/>
-          <p:nvPr/>
-        </p:nvSpPr>
-        <p:spPr>
-          <a:xfrm>
-            <a:off x="1828800" y="2450592"/>
-            <a:ext cx="9418320" cy="594360"/>
+              <a:t>Each floor is graded fresh on read — both floors sit at A right now, at 100 and 91.7, the score beneath the letter separating lean from drifting.</a:t>
+            </a:r>
+            <a:endParaRPr lang="en-US" sz="1200" dirty="0"/>
+          </a:p>
+        </p:txBody>
+      </p:sp>
+      <p:sp>
+        <p:nvSpPr>
+          <p:cNvPr id="13" name="Shape 11"/>
+          <p:cNvSpPr/>
+          <p:nvPr/>
+        </p:nvSpPr>
+        <p:spPr>
+          <a:xfrm>
+            <a:off x="4444898" y="2834640"/>
+            <a:ext cx="3301898" cy="3017520"/>
+          </a:xfrm>
+          <a:prstGeom prst="roundRect">
+            <a:avLst>
+              <a:gd name="adj" fmla="val 1212"/>
+            </a:avLst>
+          </a:prstGeom>
+          <a:solidFill>
+            <a:srgbClr val="FFFFFF"/>
+          </a:solidFill>
+          <a:ln w="12700">
+            <a:solidFill>
+              <a:srgbClr val="E4E6E9"/>
+            </a:solidFill>
+            <a:prstDash val="solid"/>
+          </a:ln>
+        </p:spPr>
+      </p:sp>
+      <p:sp>
+        <p:nvSpPr>
+          <p:cNvPr id="14" name="Text 12"/>
+          <p:cNvSpPr/>
+          <p:nvPr/>
+        </p:nvSpPr>
+        <p:spPr>
+          <a:xfrm>
+            <a:off x="4719218" y="3072384"/>
+            <a:ext cx="1828800" cy="777240"/>
           </a:xfrm>
           <a:prstGeom prst="rect">
             <a:avLst/>
@@ -2592,48 +2990,129 @@
           <a:lstStyle/>
           <a:p>
             <a:pPr indent="0" marL="0">
+              <a:buNone/>
+            </a:pPr>
+            <a:r>
+              <a:rPr lang="en-US" sz="3800" b="1" dirty="0">
+                <a:solidFill>
+                  <a:srgbClr val="1F7A4D"/>
+                </a:solidFill>
+                <a:latin typeface="Cambria" pitchFamily="34" charset="0"/>
+                <a:ea typeface="Cambria" pitchFamily="34" charset="-122"/>
+                <a:cs typeface="Cambria" pitchFamily="34" charset="-120"/>
+              </a:rPr>
+              <a:t>02</a:t>
+            </a:r>
+            <a:endParaRPr lang="en-US" sz="3800" dirty="0"/>
+          </a:p>
+        </p:txBody>
+      </p:sp>
+      <p:sp>
+        <p:nvSpPr>
+          <p:cNvPr id="15" name="Text 13"/>
+          <p:cNvSpPr/>
+          <p:nvPr/>
+        </p:nvSpPr>
+        <p:spPr>
+          <a:xfrm>
+            <a:off x="4737506" y="3886200"/>
+            <a:ext cx="2753258" cy="868680"/>
+          </a:xfrm>
+          <a:prstGeom prst="rect">
+            <a:avLst/>
+          </a:prstGeom>
+          <a:noFill/>
+          <a:ln/>
+        </p:spPr>
+        <p:txBody>
+          <a:bodyPr wrap="square" lIns="0" tIns="0" rIns="0" bIns="0" rtlCol="0" anchor="t"/>
+          <a:lstStyle/>
+          <a:p>
+            <a:pPr indent="0" marL="0">
               <a:lnSpc>
-                <a:spcPct val="105000"/>
+                <a:spcPct val="100000"/>
               </a:lnSpc>
               <a:buNone/>
             </a:pPr>
             <a:r>
-              <a:rPr lang="en-US" sz="1300" dirty="0">
-                <a:solidFill>
-                  <a:srgbClr val="5C6E58"/>
+              <a:rPr lang="en-US" sz="1550" b="1" dirty="0">
+                <a:solidFill>
+                  <a:srgbClr val="16261C"/>
+                </a:solidFill>
+                <a:latin typeface="Cambria" pitchFamily="34" charset="0"/>
+                <a:ea typeface="Cambria" pitchFamily="34" charset="-122"/>
+                <a:cs typeface="Cambria" pitchFamily="34" charset="-120"/>
+              </a:rPr>
+              <a:t>Alarm and rating on separate axes</a:t>
+            </a:r>
+            <a:endParaRPr lang="en-US" sz="1550" dirty="0"/>
+          </a:p>
+        </p:txBody>
+      </p:sp>
+      <p:sp>
+        <p:nvSpPr>
+          <p:cNvPr id="16" name="Text 14"/>
+          <p:cNvSpPr/>
+          <p:nvPr/>
+        </p:nvSpPr>
+        <p:spPr>
+          <a:xfrm>
+            <a:off x="4737506" y="4754880"/>
+            <a:ext cx="2753258" cy="914400"/>
+          </a:xfrm>
+          <a:prstGeom prst="rect">
+            <a:avLst/>
+          </a:prstGeom>
+          <a:noFill/>
+          <a:ln/>
+        </p:spPr>
+        <p:txBody>
+          <a:bodyPr wrap="square" lIns="0" tIns="0" rIns="0" bIns="0" rtlCol="0" anchor="ctr"/>
+          <a:lstStyle/>
+          <a:p>
+            <a:pPr indent="0" marL="0">
+              <a:lnSpc>
+                <a:spcPct val="120000"/>
+              </a:lnSpc>
+              <a:buNone/>
+            </a:pPr>
+            <a:r>
+              <a:rPr lang="en-US" sz="1200" dirty="0">
+                <a:solidFill>
+                  <a:srgbClr val="5F6B74"/>
                 </a:solidFill>
                 <a:latin typeface="Calibri" pitchFamily="34" charset="0"/>
                 <a:ea typeface="Calibri" pitchFamily="34" charset="-122"/>
                 <a:cs typeface="Calibri" pitchFamily="34" charset="-120"/>
               </a:rPr>
-              <a:t>Each floor is graded fresh on read — both floors sit at A right now, at 100 and 91.7, the score beneath the letter separating lean from drifting.</a:t>
-            </a:r>
-            <a:endParaRPr lang="en-US" sz="1300" dirty="0"/>
-          </a:p>
-        </p:txBody>
-      </p:sp>
-      <p:sp>
-        <p:nvSpPr>
-          <p:cNvPr id="9" name="Shape 7"/>
-          <p:cNvSpPr/>
-          <p:nvPr/>
-        </p:nvSpPr>
-        <p:spPr>
-          <a:xfrm>
-            <a:off x="640080" y="3346704"/>
-            <a:ext cx="10881360" cy="1371600"/>
+              <a:t>Four hard exception alarms fire at the edge, while the A-to-F rating answers a different question: how efficiently the floor runs overall.</a:t>
+            </a:r>
+            <a:endParaRPr lang="en-US" sz="1200" dirty="0"/>
+          </a:p>
+        </p:txBody>
+      </p:sp>
+      <p:sp>
+        <p:nvSpPr>
+          <p:cNvPr id="17" name="Shape 15"/>
+          <p:cNvSpPr/>
+          <p:nvPr/>
+        </p:nvSpPr>
+        <p:spPr>
+          <a:xfrm>
+            <a:off x="8112557" y="2834640"/>
+            <a:ext cx="3301898" cy="3017520"/>
           </a:xfrm>
           <a:prstGeom prst="roundRect">
             <a:avLst>
-              <a:gd name="adj" fmla="val 6667"/>
+              <a:gd name="adj" fmla="val 1212"/>
             </a:avLst>
           </a:prstGeom>
           <a:solidFill>
-            <a:srgbClr val="EEF4EC"/>
+            <a:srgbClr val="FFFFFF"/>
           </a:solidFill>
-          <a:ln w="15240">
+          <a:ln w="12700">
             <a:solidFill>
-              <a:srgbClr val="2E7D32"/>
+              <a:srgbClr val="E4E6E9"/>
             </a:solidFill>
             <a:prstDash val="solid"/>
           </a:ln>
@@ -2641,34 +3120,14 @@
       </p:sp>
       <p:sp>
         <p:nvSpPr>
-          <p:cNvPr id="10" name="Shape 8"/>
-          <p:cNvSpPr/>
-          <p:nvPr/>
-        </p:nvSpPr>
-        <p:spPr>
-          <a:xfrm>
-            <a:off x="960120" y="3721608"/>
-            <a:ext cx="621792" cy="621792"/>
-          </a:xfrm>
-          <a:prstGeom prst="ellipse">
-            <a:avLst/>
-          </a:prstGeom>
-          <a:solidFill>
-            <a:srgbClr val="1B5E20"/>
-          </a:solidFill>
-          <a:ln/>
-        </p:spPr>
-      </p:sp>
-      <p:sp>
-        <p:nvSpPr>
-          <p:cNvPr id="11" name="Text 9"/>
-          <p:cNvSpPr/>
-          <p:nvPr/>
-        </p:nvSpPr>
-        <p:spPr>
-          <a:xfrm>
-            <a:off x="960120" y="3721608"/>
-            <a:ext cx="621792" cy="621792"/>
+          <p:cNvPr id="18" name="Text 16"/>
+          <p:cNvSpPr/>
+          <p:nvPr/>
+        </p:nvSpPr>
+        <p:spPr>
+          <a:xfrm>
+            <a:off x="8386877" y="3072384"/>
+            <a:ext cx="1828800" cy="777240"/>
           </a:xfrm>
           <a:prstGeom prst="rect">
             <a:avLst/>
@@ -2680,34 +3139,76 @@
           <a:bodyPr wrap="square" lIns="0" tIns="0" rIns="0" bIns="0" rtlCol="0" anchor="ctr"/>
           <a:lstStyle/>
           <a:p>
-            <a:pPr algn="ctr" indent="0" marL="0">
-              <a:buNone/>
-            </a:pPr>
-            <a:r>
-              <a:rPr lang="en-US" sz="2200" b="1" dirty="0">
-                <a:solidFill>
-                  <a:srgbClr val="FFFFFF"/>
+            <a:pPr indent="0" marL="0">
+              <a:buNone/>
+            </a:pPr>
+            <a:r>
+              <a:rPr lang="en-US" sz="3800" b="1" dirty="0">
+                <a:solidFill>
+                  <a:srgbClr val="1F7A4D"/>
                 </a:solidFill>
                 <a:latin typeface="Cambria" pitchFamily="34" charset="0"/>
                 <a:ea typeface="Cambria" pitchFamily="34" charset="-122"/>
                 <a:cs typeface="Cambria" pitchFamily="34" charset="-120"/>
               </a:rPr>
-              <a:t>2</a:t>
-            </a:r>
-            <a:endParaRPr lang="en-US" sz="2200" dirty="0"/>
-          </a:p>
-        </p:txBody>
-      </p:sp>
-      <p:sp>
-        <p:nvSpPr>
-          <p:cNvPr id="12" name="Text 10"/>
-          <p:cNvSpPr/>
-          <p:nvPr/>
-        </p:nvSpPr>
-        <p:spPr>
-          <a:xfrm>
-            <a:off x="1828800" y="3547872"/>
-            <a:ext cx="9418320" cy="411480"/>
+              <a:t>03</a:t>
+            </a:r>
+            <a:endParaRPr lang="en-US" sz="3800" dirty="0"/>
+          </a:p>
+        </p:txBody>
+      </p:sp>
+      <p:sp>
+        <p:nvSpPr>
+          <p:cNvPr id="19" name="Text 17"/>
+          <p:cNvSpPr/>
+          <p:nvPr/>
+        </p:nvSpPr>
+        <p:spPr>
+          <a:xfrm>
+            <a:off x="8405165" y="3886200"/>
+            <a:ext cx="2753258" cy="868680"/>
+          </a:xfrm>
+          <a:prstGeom prst="rect">
+            <a:avLst/>
+          </a:prstGeom>
+          <a:noFill/>
+          <a:ln/>
+        </p:spPr>
+        <p:txBody>
+          <a:bodyPr wrap="square" lIns="0" tIns="0" rIns="0" bIns="0" rtlCol="0" anchor="t"/>
+          <a:lstStyle/>
+          <a:p>
+            <a:pPr indent="0" marL="0">
+              <a:lnSpc>
+                <a:spcPct val="100000"/>
+              </a:lnSpc>
+              <a:buNone/>
+            </a:pPr>
+            <a:r>
+              <a:rPr lang="en-US" sz="1550" b="1" dirty="0">
+                <a:solidFill>
+                  <a:srgbClr val="16261C"/>
+                </a:solidFill>
+                <a:latin typeface="Cambria" pitchFamily="34" charset="0"/>
+                <a:ea typeface="Cambria" pitchFamily="34" charset="-122"/>
+                <a:cs typeface="Cambria" pitchFamily="34" charset="-120"/>
+              </a:rPr>
+              <a:t>A live energy-consumption trend</a:t>
+            </a:r>
+            <a:endParaRPr lang="en-US" sz="1550" dirty="0"/>
+          </a:p>
+        </p:txBody>
+      </p:sp>
+      <p:sp>
+        <p:nvSpPr>
+          <p:cNvPr id="20" name="Text 18"/>
+          <p:cNvSpPr/>
+          <p:nvPr/>
+        </p:nvSpPr>
+        <p:spPr>
+          <a:xfrm>
+            <a:off x="8405165" y="4754880"/>
+            <a:ext cx="2753258" cy="914400"/>
           </a:xfrm>
           <a:prstGeom prst="rect">
             <a:avLst/>
@@ -2720,229 +3221,23 @@
           <a:lstStyle/>
           <a:p>
             <a:pPr indent="0" marL="0">
-              <a:buNone/>
-            </a:pPr>
-            <a:r>
-              <a:rPr lang="en-US" sz="1700" b="1" dirty="0">
-                <a:solidFill>
-                  <a:srgbClr val="153020"/>
+              <a:lnSpc>
+                <a:spcPct val="120000"/>
+              </a:lnSpc>
+              <a:buNone/>
+            </a:pPr>
+            <a:r>
+              <a:rPr lang="en-US" sz="1200" dirty="0">
+                <a:solidFill>
+                  <a:srgbClr val="5F6B74"/>
                 </a:solidFill>
                 <a:latin typeface="Calibri" pitchFamily="34" charset="0"/>
                 <a:ea typeface="Calibri" pitchFamily="34" charset="-122"/>
                 <a:cs typeface="Calibri" pitchFamily="34" charset="-120"/>
               </a:rPr>
-              <a:t>Alarm and rating on separate axes</a:t>
-            </a:r>
-            <a:endParaRPr lang="en-US" sz="1700" dirty="0"/>
-          </a:p>
-        </p:txBody>
-      </p:sp>
-      <p:sp>
-        <p:nvSpPr>
-          <p:cNvPr id="13" name="Text 11"/>
-          <p:cNvSpPr/>
-          <p:nvPr/>
-        </p:nvSpPr>
-        <p:spPr>
-          <a:xfrm>
-            <a:off x="1828800" y="3968496"/>
-            <a:ext cx="9418320" cy="594360"/>
-          </a:xfrm>
-          <a:prstGeom prst="rect">
-            <a:avLst/>
-          </a:prstGeom>
-          <a:noFill/>
-          <a:ln/>
-        </p:spPr>
-        <p:txBody>
-          <a:bodyPr wrap="square" lIns="0" tIns="0" rIns="0" bIns="0" rtlCol="0" anchor="ctr"/>
-          <a:lstStyle/>
-          <a:p>
-            <a:pPr indent="0" marL="0">
-              <a:lnSpc>
-                <a:spcPct val="105000"/>
-              </a:lnSpc>
-              <a:buNone/>
-            </a:pPr>
-            <a:r>
-              <a:rPr lang="en-US" sz="1300" dirty="0">
-                <a:solidFill>
-                  <a:srgbClr val="5C6E58"/>
-                </a:solidFill>
-                <a:latin typeface="Calibri" pitchFamily="34" charset="0"/>
-                <a:ea typeface="Calibri" pitchFamily="34" charset="-122"/>
-                <a:cs typeface="Calibri" pitchFamily="34" charset="-120"/>
-              </a:rPr>
-              <a:t>Four hard exception alarms fire at the edge, while the A-to-F rating answers a different question: how efficiently the floor runs overall.</a:t>
-            </a:r>
-            <a:endParaRPr lang="en-US" sz="1300" dirty="0"/>
-          </a:p>
-        </p:txBody>
-      </p:sp>
-      <p:sp>
-        <p:nvSpPr>
-          <p:cNvPr id="14" name="Shape 12"/>
-          <p:cNvSpPr/>
-          <p:nvPr/>
-        </p:nvSpPr>
-        <p:spPr>
-          <a:xfrm>
-            <a:off x="640080" y="4864608"/>
-            <a:ext cx="10881360" cy="1371600"/>
-          </a:xfrm>
-          <a:prstGeom prst="roundRect">
-            <a:avLst>
-              <a:gd name="adj" fmla="val 6667"/>
-            </a:avLst>
-          </a:prstGeom>
-          <a:solidFill>
-            <a:srgbClr val="EEF4EC"/>
-          </a:solidFill>
-          <a:ln w="15240">
-            <a:solidFill>
-              <a:srgbClr val="2E7D32"/>
-            </a:solidFill>
-            <a:prstDash val="solid"/>
-          </a:ln>
-        </p:spPr>
-      </p:sp>
-      <p:sp>
-        <p:nvSpPr>
-          <p:cNvPr id="15" name="Shape 13"/>
-          <p:cNvSpPr/>
-          <p:nvPr/>
-        </p:nvSpPr>
-        <p:spPr>
-          <a:xfrm>
-            <a:off x="960120" y="5239512"/>
-            <a:ext cx="621792" cy="621792"/>
-          </a:xfrm>
-          <a:prstGeom prst="ellipse">
-            <a:avLst/>
-          </a:prstGeom>
-          <a:solidFill>
-            <a:srgbClr val="1B5E20"/>
-          </a:solidFill>
-          <a:ln/>
-        </p:spPr>
-      </p:sp>
-      <p:sp>
-        <p:nvSpPr>
-          <p:cNvPr id="16" name="Text 14"/>
-          <p:cNvSpPr/>
-          <p:nvPr/>
-        </p:nvSpPr>
-        <p:spPr>
-          <a:xfrm>
-            <a:off x="960120" y="5239512"/>
-            <a:ext cx="621792" cy="621792"/>
-          </a:xfrm>
-          <a:prstGeom prst="rect">
-            <a:avLst/>
-          </a:prstGeom>
-          <a:noFill/>
-          <a:ln/>
-        </p:spPr>
-        <p:txBody>
-          <a:bodyPr wrap="square" lIns="0" tIns="0" rIns="0" bIns="0" rtlCol="0" anchor="ctr"/>
-          <a:lstStyle/>
-          <a:p>
-            <a:pPr algn="ctr" indent="0" marL="0">
-              <a:buNone/>
-            </a:pPr>
-            <a:r>
-              <a:rPr lang="en-US" sz="2200" b="1" dirty="0">
-                <a:solidFill>
-                  <a:srgbClr val="FFFFFF"/>
-                </a:solidFill>
-                <a:latin typeface="Cambria" pitchFamily="34" charset="0"/>
-                <a:ea typeface="Cambria" pitchFamily="34" charset="-122"/>
-                <a:cs typeface="Cambria" pitchFamily="34" charset="-120"/>
-              </a:rPr>
-              <a:t>3</a:t>
-            </a:r>
-            <a:endParaRPr lang="en-US" sz="2200" dirty="0"/>
-          </a:p>
-        </p:txBody>
-      </p:sp>
-      <p:sp>
-        <p:nvSpPr>
-          <p:cNvPr id="17" name="Text 15"/>
-          <p:cNvSpPr/>
-          <p:nvPr/>
-        </p:nvSpPr>
-        <p:spPr>
-          <a:xfrm>
-            <a:off x="1828800" y="5065776"/>
-            <a:ext cx="9418320" cy="411480"/>
-          </a:xfrm>
-          <a:prstGeom prst="rect">
-            <a:avLst/>
-          </a:prstGeom>
-          <a:noFill/>
-          <a:ln/>
-        </p:spPr>
-        <p:txBody>
-          <a:bodyPr wrap="square" lIns="0" tIns="0" rIns="0" bIns="0" rtlCol="0" anchor="ctr"/>
-          <a:lstStyle/>
-          <a:p>
-            <a:pPr indent="0" marL="0">
-              <a:buNone/>
-            </a:pPr>
-            <a:r>
-              <a:rPr lang="en-US" sz="1700" b="1" dirty="0">
-                <a:solidFill>
-                  <a:srgbClr val="153020"/>
-                </a:solidFill>
-                <a:latin typeface="Calibri" pitchFamily="34" charset="0"/>
-                <a:ea typeface="Calibri" pitchFamily="34" charset="-122"/>
-                <a:cs typeface="Calibri" pitchFamily="34" charset="-120"/>
-              </a:rPr>
-              <a:t>A live energy-consumption trend</a:t>
-            </a:r>
-            <a:endParaRPr lang="en-US" sz="1700" dirty="0"/>
-          </a:p>
-        </p:txBody>
-      </p:sp>
-      <p:sp>
-        <p:nvSpPr>
-          <p:cNvPr id="18" name="Text 16"/>
-          <p:cNvSpPr/>
-          <p:nvPr/>
-        </p:nvSpPr>
-        <p:spPr>
-          <a:xfrm>
-            <a:off x="1828800" y="5486400"/>
-            <a:ext cx="9418320" cy="594360"/>
-          </a:xfrm>
-          <a:prstGeom prst="rect">
-            <a:avLst/>
-          </a:prstGeom>
-          <a:noFill/>
-          <a:ln/>
-        </p:spPr>
-        <p:txBody>
-          <a:bodyPr wrap="square" lIns="0" tIns="0" rIns="0" bIns="0" rtlCol="0" anchor="ctr"/>
-          <a:lstStyle/>
-          <a:p>
-            <a:pPr indent="0" marL="0">
-              <a:lnSpc>
-                <a:spcPct val="105000"/>
-              </a:lnSpc>
-              <a:buNone/>
-            </a:pPr>
-            <a:r>
-              <a:rPr lang="en-US" sz="1300" dirty="0">
-                <a:solidFill>
-                  <a:srgbClr val="5C6E58"/>
-                </a:solidFill>
-                <a:latin typeface="Calibri" pitchFamily="34" charset="0"/>
-                <a:ea typeface="Calibri" pitchFamily="34" charset="-122"/>
-                <a:cs typeface="Calibri" pitchFamily="34" charset="-120"/>
-              </a:rPr>
               <a:t>The energy chart tracks both floors, so the number behind each grade is visible as it moves.</a:t>
             </a:r>
-            <a:endParaRPr lang="en-US" sz="1300" dirty="0"/>
+            <a:endParaRPr lang="en-US" sz="1200" dirty="0"/>
           </a:p>
         </p:txBody>
       </p:sp>
@@ -2960,7 +3255,7 @@
     <p:bg>
       <p:bgPr>
         <a:solidFill>
-          <a:srgbClr val="FFFFFF"/>
+          <a:srgbClr val="F4FAF6"/>
         </a:solidFill>
       </p:bgPr>
     </p:bg>
@@ -2980,65 +3275,212 @@
       </p:grpSpPr>
       <p:sp>
         <p:nvSpPr>
-          <p:cNvPr id="2" name="Text 0"/>
-          <p:cNvSpPr/>
-          <p:nvPr/>
-        </p:nvSpPr>
-        <p:spPr>
-          <a:xfrm>
-            <a:off x="640080" y="502920"/>
-            <a:ext cx="10972800" cy="822960"/>
-          </a:xfrm>
-          <a:prstGeom prst="rect">
-            <a:avLst/>
-          </a:prstGeom>
-          <a:noFill/>
-          <a:ln/>
-        </p:spPr>
-        <p:txBody>
-          <a:bodyPr wrap="square" rtlCol="0" anchor="t"/>
-          <a:lstStyle/>
-          <a:p>
-            <a:pPr indent="0" marL="0">
-              <a:buNone/>
-            </a:pPr>
-            <a:r>
-              <a:rPr lang="en-US" sz="2800" b="1" dirty="0">
-                <a:solidFill>
-                  <a:srgbClr val="153020"/>
+          <p:cNvPr id="2" name="Shape 0"/>
+          <p:cNvSpPr/>
+          <p:nvPr/>
+        </p:nvSpPr>
+        <p:spPr>
+          <a:xfrm>
+            <a:off x="777240" y="777240"/>
+            <a:ext cx="10637215" cy="0"/>
+          </a:xfrm>
+          <a:prstGeom prst="line">
+            <a:avLst/>
+          </a:prstGeom>
+          <a:noFill/>
+          <a:ln w="15875">
+            <a:solidFill>
+              <a:srgbClr val="1F7A4D"/>
+            </a:solidFill>
+            <a:prstDash val="solid"/>
+          </a:ln>
+        </p:spPr>
+      </p:sp>
+      <p:sp>
+        <p:nvSpPr>
+          <p:cNvPr id="3" name="Shape 1"/>
+          <p:cNvSpPr/>
+          <p:nvPr/>
+        </p:nvSpPr>
+        <p:spPr>
+          <a:xfrm>
+            <a:off x="777240" y="896112"/>
+            <a:ext cx="10637215" cy="0"/>
+          </a:xfrm>
+          <a:prstGeom prst="line">
+            <a:avLst/>
+          </a:prstGeom>
+          <a:noFill/>
+          <a:ln w="6350">
+            <a:solidFill>
+              <a:srgbClr val="5F6B74"/>
+            </a:solidFill>
+            <a:prstDash val="solid"/>
+          </a:ln>
+        </p:spPr>
+      </p:sp>
+      <p:sp>
+        <p:nvSpPr>
+          <p:cNvPr id="4" name="Shape 2"/>
+          <p:cNvSpPr/>
+          <p:nvPr/>
+        </p:nvSpPr>
+        <p:spPr>
+          <a:xfrm>
+            <a:off x="777240" y="6217920"/>
+            <a:ext cx="10637215" cy="0"/>
+          </a:xfrm>
+          <a:prstGeom prst="line">
+            <a:avLst/>
+          </a:prstGeom>
+          <a:noFill/>
+          <a:ln w="6350">
+            <a:solidFill>
+              <a:srgbClr val="5F6B74"/>
+            </a:solidFill>
+            <a:prstDash val="solid"/>
+          </a:ln>
+        </p:spPr>
+      </p:sp>
+      <p:sp>
+        <p:nvSpPr>
+          <p:cNvPr id="5" name="Text 3"/>
+          <p:cNvSpPr/>
+          <p:nvPr/>
+        </p:nvSpPr>
+        <p:spPr>
+          <a:xfrm>
+            <a:off x="777240" y="1051560"/>
+            <a:ext cx="914400" cy="640080"/>
+          </a:xfrm>
+          <a:prstGeom prst="rect">
+            <a:avLst/>
+          </a:prstGeom>
+          <a:noFill/>
+          <a:ln/>
+        </p:spPr>
+        <p:txBody>
+          <a:bodyPr wrap="square" lIns="0" tIns="0" rIns="0" bIns="0" rtlCol="0" anchor="ctr"/>
+          <a:lstStyle/>
+          <a:p>
+            <a:pPr indent="0" marL="0">
+              <a:buNone/>
+            </a:pPr>
+            <a:r>
+              <a:rPr lang="en-US" sz="3000" b="1" dirty="0">
+                <a:solidFill>
+                  <a:srgbClr val="1F7A4D"/>
                 </a:solidFill>
                 <a:latin typeface="Cambria" pitchFamily="34" charset="0"/>
                 <a:ea typeface="Cambria" pitchFamily="34" charset="-122"/>
                 <a:cs typeface="Cambria" pitchFamily="34" charset="-120"/>
               </a:rPr>
-              <a:t>Hardest Part — grade the floor without storing the grade</a:t>
-            </a:r>
-            <a:endParaRPr lang="en-US" sz="2800" dirty="0"/>
-          </a:p>
-        </p:txBody>
-      </p:sp>
-      <p:sp>
-        <p:nvSpPr>
-          <p:cNvPr id="3" name="Shape 1"/>
-          <p:cNvSpPr/>
-          <p:nvPr/>
-        </p:nvSpPr>
-        <p:spPr>
-          <a:xfrm>
-            <a:off x="731520" y="1920240"/>
-            <a:ext cx="10698480" cy="1965960"/>
+              <a:t>03</a:t>
+            </a:r>
+            <a:endParaRPr lang="en-US" sz="3000" dirty="0"/>
+          </a:p>
+        </p:txBody>
+      </p:sp>
+      <p:sp>
+        <p:nvSpPr>
+          <p:cNvPr id="6" name="Text 4"/>
+          <p:cNvSpPr/>
+          <p:nvPr/>
+        </p:nvSpPr>
+        <p:spPr>
+          <a:xfrm>
+            <a:off x="1645920" y="1225296"/>
+            <a:ext cx="9768535" cy="274320"/>
+          </a:xfrm>
+          <a:prstGeom prst="rect">
+            <a:avLst/>
+          </a:prstGeom>
+          <a:noFill/>
+          <a:ln/>
+        </p:spPr>
+        <p:txBody>
+          <a:bodyPr wrap="square" lIns="0" tIns="0" rIns="0" bIns="0" rtlCol="0" anchor="ctr"/>
+          <a:lstStyle/>
+          <a:p>
+            <a:pPr indent="0" marL="0">
+              <a:buNone/>
+            </a:pPr>
+            <a:r>
+              <a:rPr lang="en-US" sz="1100" b="1" spc="200" kern="0" dirty="0">
+                <a:solidFill>
+                  <a:srgbClr val="5F6B74"/>
+                </a:solidFill>
+                <a:latin typeface="Calibri" pitchFamily="34" charset="0"/>
+                <a:ea typeface="Calibri" pitchFamily="34" charset="-122"/>
+                <a:cs typeface="Calibri" pitchFamily="34" charset="-120"/>
+              </a:rPr>
+              <a:t>CHALLENGE</a:t>
+            </a:r>
+            <a:endParaRPr lang="en-US" sz="1100" dirty="0"/>
+          </a:p>
+        </p:txBody>
+      </p:sp>
+      <p:sp>
+        <p:nvSpPr>
+          <p:cNvPr id="7" name="Text 5"/>
+          <p:cNvSpPr/>
+          <p:nvPr/>
+        </p:nvSpPr>
+        <p:spPr>
+          <a:xfrm>
+            <a:off x="777240" y="1700784"/>
+            <a:ext cx="10637215" cy="640080"/>
+          </a:xfrm>
+          <a:prstGeom prst="rect">
+            <a:avLst/>
+          </a:prstGeom>
+          <a:noFill/>
+          <a:ln/>
+        </p:spPr>
+        <p:txBody>
+          <a:bodyPr wrap="square" lIns="0" tIns="0" rIns="0" bIns="0" rtlCol="0" anchor="ctr"/>
+          <a:lstStyle/>
+          <a:p>
+            <a:pPr indent="0" marL="0">
+              <a:buNone/>
+            </a:pPr>
+            <a:r>
+              <a:rPr lang="en-US" sz="2300" b="1" dirty="0">
+                <a:solidFill>
+                  <a:srgbClr val="16261C"/>
+                </a:solidFill>
+                <a:latin typeface="Cambria" pitchFamily="34" charset="0"/>
+                <a:ea typeface="Cambria" pitchFamily="34" charset="-122"/>
+                <a:cs typeface="Cambria" pitchFamily="34" charset="-120"/>
+              </a:rPr>
+              <a:t>grade the floor without storing the grade</a:t>
+            </a:r>
+            <a:endParaRPr lang="en-US" sz="2300" dirty="0"/>
+          </a:p>
+        </p:txBody>
+      </p:sp>
+      <p:sp>
+        <p:nvSpPr>
+          <p:cNvPr id="8" name="Shape 6"/>
+          <p:cNvSpPr/>
+          <p:nvPr/>
+        </p:nvSpPr>
+        <p:spPr>
+          <a:xfrm>
+            <a:off x="777240" y="2743200"/>
+            <a:ext cx="5090008" cy="3108960"/>
           </a:xfrm>
           <a:prstGeom prst="roundRect">
             <a:avLst>
-              <a:gd name="adj" fmla="val 4651"/>
+              <a:gd name="adj" fmla="val 1176"/>
             </a:avLst>
           </a:prstGeom>
           <a:solidFill>
-            <a:srgbClr val="EEF4EC"/>
+            <a:srgbClr val="FFFFFF"/>
           </a:solidFill>
-          <a:ln w="19050">
+          <a:ln w="12700">
             <a:solidFill>
-              <a:srgbClr val="D9A62E"/>
+              <a:srgbClr val="E4E6E9"/>
             </a:solidFill>
             <a:prstDash val="solid"/>
           </a:ln>
@@ -3046,14 +3488,14 @@
       </p:sp>
       <p:sp>
         <p:nvSpPr>
-          <p:cNvPr id="4" name="Text 2"/>
-          <p:cNvSpPr/>
-          <p:nvPr/>
-        </p:nvSpPr>
-        <p:spPr>
-          <a:xfrm>
-            <a:off x="1005840" y="2103120"/>
-            <a:ext cx="3657600" cy="457200"/>
+          <p:cNvPr id="9" name="Text 7"/>
+          <p:cNvSpPr/>
+          <p:nvPr/>
+        </p:nvSpPr>
+        <p:spPr>
+          <a:xfrm>
+            <a:off x="1097280" y="3017520"/>
+            <a:ext cx="4449928" cy="320040"/>
           </a:xfrm>
           <a:prstGeom prst="rect">
             <a:avLst/>
@@ -3069,84 +3511,38 @@
               <a:buNone/>
             </a:pPr>
             <a:r>
-              <a:rPr lang="en-US" sz="1900" b="1" dirty="0">
-                <a:solidFill>
-                  <a:srgbClr val="D9A62E"/>
-                </a:solidFill>
-                <a:latin typeface="Cambria" pitchFamily="34" charset="0"/>
-                <a:ea typeface="Cambria" pitchFamily="34" charset="-122"/>
-                <a:cs typeface="Cambria" pitchFamily="34" charset="-120"/>
-              </a:rPr>
-              <a:t>Problem</a:t>
-            </a:r>
-            <a:endParaRPr lang="en-US" sz="1900" dirty="0"/>
-          </a:p>
-        </p:txBody>
-      </p:sp>
-      <p:sp>
-        <p:nvSpPr>
-          <p:cNvPr id="5" name="Text 3"/>
-          <p:cNvSpPr/>
-          <p:nvPr/>
-        </p:nvSpPr>
-        <p:spPr>
-          <a:xfrm>
-            <a:off x="1005840" y="2578608"/>
-            <a:ext cx="9966960" cy="1188720"/>
-          </a:xfrm>
-          <a:prstGeom prst="rect">
-            <a:avLst/>
-          </a:prstGeom>
-          <a:noFill/>
-          <a:ln/>
-        </p:spPr>
-        <p:txBody>
-          <a:bodyPr wrap="square" lIns="0" tIns="0" rIns="0" bIns="0" rtlCol="0" anchor="ctr"/>
-          <a:lstStyle/>
-          <a:p>
-            <a:pPr indent="0" marL="0">
-              <a:lnSpc>
-                <a:spcPct val="105000"/>
-              </a:lnSpc>
-              <a:buNone/>
-            </a:pPr>
-            <a:r>
-              <a:rPr lang="en-US" sz="1300" dirty="0">
-                <a:solidFill>
-                  <a:srgbClr val="153020"/>
+              <a:rPr lang="en-US" sz="1200" b="1" spc="200" kern="0" dirty="0">
+                <a:solidFill>
+                  <a:srgbClr val="D1584E"/>
                 </a:solidFill>
                 <a:latin typeface="Calibri" pitchFamily="34" charset="0"/>
                 <a:ea typeface="Calibri" pitchFamily="34" charset="-122"/>
                 <a:cs typeface="Calibri" pitchFamily="34" charset="-120"/>
               </a:rPr>
-              <a:t>A manager needs both an exception (something specific is wrong now) and a rating (how efficiently the floor runs overall) — but they belong on separate axes. Baking a rating into stored records would freeze the thresholds and blur the two questions together.</a:t>
-            </a:r>
-            <a:endParaRPr lang="en-US" sz="1300" dirty="0"/>
-          </a:p>
-        </p:txBody>
-      </p:sp>
-      <p:sp>
-        <p:nvSpPr>
-          <p:cNvPr id="6" name="Shape 4"/>
-          <p:cNvSpPr/>
-          <p:nvPr/>
-        </p:nvSpPr>
-        <p:spPr>
-          <a:xfrm>
-            <a:off x="731520" y="4041648"/>
-            <a:ext cx="10698480" cy="1965960"/>
-          </a:xfrm>
-          <a:prstGeom prst="roundRect">
-            <a:avLst>
-              <a:gd name="adj" fmla="val 4651"/>
-            </a:avLst>
-          </a:prstGeom>
-          <a:solidFill>
-            <a:srgbClr val="EEF4EC"/>
-          </a:solidFill>
+              <a:t>PROBLEM</a:t>
+            </a:r>
+            <a:endParaRPr lang="en-US" sz="1200" dirty="0"/>
+          </a:p>
+        </p:txBody>
+      </p:sp>
+      <p:sp>
+        <p:nvSpPr>
+          <p:cNvPr id="10" name="Shape 8"/>
+          <p:cNvSpPr/>
+          <p:nvPr/>
+        </p:nvSpPr>
+        <p:spPr>
+          <a:xfrm>
+            <a:off x="1097280" y="3401568"/>
+            <a:ext cx="4449928" cy="0"/>
+          </a:xfrm>
+          <a:prstGeom prst="line">
+            <a:avLst/>
+          </a:prstGeom>
+          <a:noFill/>
           <a:ln w="19050">
             <a:solidFill>
-              <a:srgbClr val="2E7D32"/>
+              <a:srgbClr val="D1584E"/>
             </a:solidFill>
             <a:prstDash val="solid"/>
           </a:ln>
@@ -3154,82 +3550,174 @@
       </p:sp>
       <p:sp>
         <p:nvSpPr>
-          <p:cNvPr id="7" name="Text 5"/>
-          <p:cNvSpPr/>
-          <p:nvPr/>
-        </p:nvSpPr>
-        <p:spPr>
-          <a:xfrm>
-            <a:off x="1005840" y="4224528"/>
-            <a:ext cx="3657600" cy="457200"/>
-          </a:xfrm>
-          <a:prstGeom prst="rect">
-            <a:avLst/>
-          </a:prstGeom>
-          <a:noFill/>
-          <a:ln/>
-        </p:spPr>
-        <p:txBody>
-          <a:bodyPr wrap="square" lIns="0" tIns="0" rIns="0" bIns="0" rtlCol="0" anchor="ctr"/>
-          <a:lstStyle/>
-          <a:p>
-            <a:pPr indent="0" marL="0">
-              <a:buNone/>
-            </a:pPr>
-            <a:r>
-              <a:rPr lang="en-US" sz="1900" b="1" dirty="0">
-                <a:solidFill>
-                  <a:srgbClr val="2E7D32"/>
-                </a:solidFill>
-                <a:latin typeface="Cambria" pitchFamily="34" charset="0"/>
-                <a:ea typeface="Cambria" pitchFamily="34" charset="-122"/>
-                <a:cs typeface="Cambria" pitchFamily="34" charset="-120"/>
-              </a:rPr>
-              <a:t>Solution</a:t>
-            </a:r>
-            <a:endParaRPr lang="en-US" sz="1900" dirty="0"/>
-          </a:p>
-        </p:txBody>
-      </p:sp>
-      <p:sp>
-        <p:nvSpPr>
-          <p:cNvPr id="8" name="Text 6"/>
-          <p:cNvSpPr/>
-          <p:nvPr/>
-        </p:nvSpPr>
-        <p:spPr>
-          <a:xfrm>
-            <a:off x="1005840" y="4700016"/>
-            <a:ext cx="9966960" cy="1188720"/>
-          </a:xfrm>
-          <a:prstGeom prst="rect">
-            <a:avLst/>
-          </a:prstGeom>
-          <a:noFill/>
-          <a:ln/>
-        </p:spPr>
-        <p:txBody>
-          <a:bodyPr wrap="square" lIns="0" tIns="0" rIns="0" bIns="0" rtlCol="0" anchor="ctr"/>
+          <p:cNvPr id="11" name="Text 9"/>
+          <p:cNvSpPr/>
+          <p:nvPr/>
+        </p:nvSpPr>
+        <p:spPr>
+          <a:xfrm>
+            <a:off x="1097280" y="3566160"/>
+            <a:ext cx="4449928" cy="2103120"/>
+          </a:xfrm>
+          <a:prstGeom prst="rect">
+            <a:avLst/>
+          </a:prstGeom>
+          <a:noFill/>
+          <a:ln/>
+        </p:spPr>
+        <p:txBody>
+          <a:bodyPr wrap="square" lIns="0" tIns="0" rIns="0" bIns="0" rtlCol="0" anchor="t"/>
           <a:lstStyle/>
           <a:p>
             <a:pPr indent="0" marL="0">
               <a:lnSpc>
-                <a:spcPct val="105000"/>
+                <a:spcPct val="128000"/>
               </a:lnSpc>
               <a:buNone/>
             </a:pPr>
             <a:r>
-              <a:rPr lang="en-US" sz="1300" dirty="0">
-                <a:solidFill>
-                  <a:srgbClr val="153020"/>
+              <a:rPr lang="en-US" sz="1350" dirty="0">
+                <a:solidFill>
+                  <a:srgbClr val="16261C"/>
                 </a:solidFill>
                 <a:latin typeface="Calibri" pitchFamily="34" charset="0"/>
                 <a:ea typeface="Calibri" pitchFamily="34" charset="-122"/>
                 <a:cs typeface="Calibri" pitchFamily="34" charset="-120"/>
               </a:rPr>
+              <a:t>A manager needs both an exception (something specific is wrong now) and a rating (how efficiently the floor runs overall) — but they belong on separate axes. Baking a rating into stored records would freeze the thresholds and blur the two questions together.</a:t>
+            </a:r>
+            <a:endParaRPr lang="en-US" sz="1350" dirty="0"/>
+          </a:p>
+        </p:txBody>
+      </p:sp>
+      <p:sp>
+        <p:nvSpPr>
+          <p:cNvPr id="12" name="Shape 10"/>
+          <p:cNvSpPr/>
+          <p:nvPr/>
+        </p:nvSpPr>
+        <p:spPr>
+          <a:xfrm>
+            <a:off x="6324448" y="2743200"/>
+            <a:ext cx="5090008" cy="3108960"/>
+          </a:xfrm>
+          <a:prstGeom prst="roundRect">
+            <a:avLst>
+              <a:gd name="adj" fmla="val 1176"/>
+            </a:avLst>
+          </a:prstGeom>
+          <a:solidFill>
+            <a:srgbClr val="FFFFFF"/>
+          </a:solidFill>
+          <a:ln w="12700">
+            <a:solidFill>
+              <a:srgbClr val="E4E6E9"/>
+            </a:solidFill>
+            <a:prstDash val="solid"/>
+          </a:ln>
+        </p:spPr>
+      </p:sp>
+      <p:sp>
+        <p:nvSpPr>
+          <p:cNvPr id="13" name="Text 11"/>
+          <p:cNvSpPr/>
+          <p:nvPr/>
+        </p:nvSpPr>
+        <p:spPr>
+          <a:xfrm>
+            <a:off x="6644488" y="3017520"/>
+            <a:ext cx="4449928" cy="320040"/>
+          </a:xfrm>
+          <a:prstGeom prst="rect">
+            <a:avLst/>
+          </a:prstGeom>
+          <a:noFill/>
+          <a:ln/>
+        </p:spPr>
+        <p:txBody>
+          <a:bodyPr wrap="square" lIns="0" tIns="0" rIns="0" bIns="0" rtlCol="0" anchor="ctr"/>
+          <a:lstStyle/>
+          <a:p>
+            <a:pPr indent="0" marL="0">
+              <a:buNone/>
+            </a:pPr>
+            <a:r>
+              <a:rPr lang="en-US" sz="1200" b="1" spc="200" kern="0" dirty="0">
+                <a:solidFill>
+                  <a:srgbClr val="3FAE82"/>
+                </a:solidFill>
+                <a:latin typeface="Calibri" pitchFamily="34" charset="0"/>
+                <a:ea typeface="Calibri" pitchFamily="34" charset="-122"/>
+                <a:cs typeface="Calibri" pitchFamily="34" charset="-120"/>
+              </a:rPr>
+              <a:t>SOLUTION</a:t>
+            </a:r>
+            <a:endParaRPr lang="en-US" sz="1200" dirty="0"/>
+          </a:p>
+        </p:txBody>
+      </p:sp>
+      <p:sp>
+        <p:nvSpPr>
+          <p:cNvPr id="14" name="Shape 12"/>
+          <p:cNvSpPr/>
+          <p:nvPr/>
+        </p:nvSpPr>
+        <p:spPr>
+          <a:xfrm>
+            <a:off x="6644488" y="3401568"/>
+            <a:ext cx="4449928" cy="0"/>
+          </a:xfrm>
+          <a:prstGeom prst="line">
+            <a:avLst/>
+          </a:prstGeom>
+          <a:noFill/>
+          <a:ln w="19050">
+            <a:solidFill>
+              <a:srgbClr val="3FAE82"/>
+            </a:solidFill>
+            <a:prstDash val="solid"/>
+          </a:ln>
+        </p:spPr>
+      </p:sp>
+      <p:sp>
+        <p:nvSpPr>
+          <p:cNvPr id="15" name="Text 13"/>
+          <p:cNvSpPr/>
+          <p:nvPr/>
+        </p:nvSpPr>
+        <p:spPr>
+          <a:xfrm>
+            <a:off x="6644488" y="3566160"/>
+            <a:ext cx="4449928" cy="2103120"/>
+          </a:xfrm>
+          <a:prstGeom prst="rect">
+            <a:avLst/>
+          </a:prstGeom>
+          <a:noFill/>
+          <a:ln/>
+        </p:spPr>
+        <p:txBody>
+          <a:bodyPr wrap="square" lIns="0" tIns="0" rIns="0" bIns="0" rtlCol="0" anchor="t"/>
+          <a:lstStyle/>
+          <a:p>
+            <a:pPr indent="0" marL="0">
+              <a:lnSpc>
+                <a:spcPct val="128000"/>
+              </a:lnSpc>
+              <a:buNone/>
+            </a:pPr>
+            <a:r>
+              <a:rPr lang="en-US" sz="1350" dirty="0">
+                <a:solidFill>
+                  <a:srgbClr val="16261C"/>
+                </a:solidFill>
+                <a:latin typeface="Calibri" pitchFamily="34" charset="0"/>
+                <a:ea typeface="Calibri" pitchFamily="34" charset="-122"/>
+                <a:cs typeface="Calibri" pitchFamily="34" charset="-120"/>
+              </a:rPr>
               <a:t>The fog answers the exception question at the edge, raising four hard alarms per window. The dashboard answers performance on read: it scores energy draw and air quality each from 100 down to 0, averages them, and maps the number to an A-to-F letter like a building energy certificate — derived fresh on every read, never stored, so thresholds can be retuned without touching a saved record.</a:t>
             </a:r>
-            <a:endParaRPr lang="en-US" sz="1300" dirty="0"/>
+            <a:endParaRPr lang="en-US" sz="1350" dirty="0"/>
           </a:p>
         </p:txBody>
       </p:sp>
